--- a/orchestrer-intelligence-gatherly.pptx
+++ b/orchestrer-intelligence-gatherly.pptx
@@ -7779,24 +7779,24 @@
         </p:nvSpPr>
         <p:spPr>
           <a:xfrm>
-            <a:off x="457200" y="2286000"/>
-            <a:ext cx="8229600" cy="914400"/>
-          </a:xfrm>
-          <a:prstGeom prst="rect">
-            <a:avLst/>
-          </a:prstGeom>
-          <a:noFill/>
-          <a:ln/>
-        </p:spPr>
-        <p:txBody>
-          <a:bodyPr wrap="square" lIns="0" tIns="0" rIns="0" bIns="0" rtlCol="0" anchor="ctr"/>
-          <a:lstStyle/>
-          <a:p>
-            <a:pPr marL="0" indent="0">
-              <a:buNone/>
-            </a:pPr>
-            <a:r>
-              <a:rPr lang="en-US" sz="6000" b="1" dirty="0">
+            <a:off x="503766" y="1568196"/>
+            <a:ext cx="4889500" cy="1748366"/>
+          </a:xfrm>
+          <a:prstGeom prst="rect">
+            <a:avLst/>
+          </a:prstGeom>
+          <a:noFill/>
+          <a:ln/>
+        </p:spPr>
+        <p:txBody>
+          <a:bodyPr wrap="square" lIns="0" tIns="0" rIns="0" bIns="0" rtlCol="0" anchor="ctr"/>
+          <a:lstStyle/>
+          <a:p>
+            <a:pPr marL="0" indent="0">
+              <a:buNone/>
+            </a:pPr>
+            <a:r>
+              <a:rPr lang="en-US" b="1" dirty="0">
                 <a:solidFill>
                   <a:srgbClr val="3B82F6"/>
                 </a:solidFill>
@@ -7804,9 +7804,20 @@
                 <a:ea typeface="Inter" pitchFamily="34" charset="-122"/>
                 <a:cs typeface="Inter" pitchFamily="34" charset="-120"/>
               </a:rPr>
-              <a:t>8   readiness gaps · 8 hours · no supervision</a:t>
-            </a:r>
-            <a:endParaRPr lang="en-US" sz="6000" dirty="0"/>
+              <a:t>8   readiness gaps · </a:t>
+            </a:r>
+            <a:r>
+              <a:rPr lang="en-US" sz="1400" b="1" dirty="0">
+                <a:solidFill>
+                  <a:srgbClr val="3B82F6"/>
+                </a:solidFill>
+                <a:latin typeface="Montserrat" pitchFamily="34" charset="0"/>
+                <a:ea typeface="Inter" pitchFamily="34" charset="-122"/>
+                <a:cs typeface="Inter" pitchFamily="34" charset="-120"/>
+              </a:rPr>
+              <a:t>8 hours · no supervision</a:t>
+            </a:r>
+            <a:endParaRPr lang="en-US" sz="1400" dirty="0"/>
           </a:p>
         </p:txBody>
       </p:sp>
@@ -14167,7 +14178,7 @@
           <p:nvPr>
             <p:extLst>
               <p:ext uri="{D42A27DB-BD31-4B8C-83A1-F6EECF244321}">
-                <p14:modId xmlns:p14="http://schemas.microsoft.com/office/powerpoint/2010/main" val="1579011935"/>
+                <p14:modId xmlns:p14="http://schemas.microsoft.com/office/powerpoint/2010/main" val="3926131547"/>
               </p:ext>
             </p:extLst>
           </p:nvPr>
@@ -14979,7 +14990,29 @@
                           <a:ea typeface="Inter" pitchFamily="34" charset="-122"/>
                           <a:cs typeface="Inter" pitchFamily="34" charset="-120"/>
                         </a:rPr>
-                        <a:t>diagnose, retry ×3, escalate</a:t>
+                        <a:t>diagnose</a:t>
+                      </a:r>
+                      <a:r>
+                        <a:rPr lang="en-US" sz="1200">
+                          <a:solidFill>
+                            <a:srgbClr val="F8FAFC"/>
+                          </a:solidFill>
+                          <a:latin typeface="Inter" pitchFamily="34" charset="0"/>
+                          <a:ea typeface="Inter" pitchFamily="34" charset="-122"/>
+                          <a:cs typeface="Inter" pitchFamily="34" charset="-120"/>
+                        </a:rPr>
+                        <a:t>, retry , </a:t>
+                      </a:r>
+                      <a:r>
+                        <a:rPr lang="en-US" sz="1200" dirty="0">
+                          <a:solidFill>
+                            <a:srgbClr val="F8FAFC"/>
+                          </a:solidFill>
+                          <a:latin typeface="Inter" pitchFamily="34" charset="0"/>
+                          <a:ea typeface="Inter" pitchFamily="34" charset="-122"/>
+                          <a:cs typeface="Inter" pitchFamily="34" charset="-120"/>
+                        </a:rPr>
+                        <a:t>escalate</a:t>
                       </a:r>
                       <a:endParaRPr lang="en-US" sz="1200" dirty="0">
                         <a:latin typeface="Inter" charset="0"/>
@@ -18000,4 +18033,10 @@
     </a:ext>
   </a:extLst>
 </a:theme>
+</file>
+
+<file path=docMetadata/LabelInfo.xml><?xml version="1.0" encoding="utf-8"?>
+<clbl:labelList xmlns:clbl="http://schemas.microsoft.com/office/2020/mipLabelMetadata">
+  <clbl:label id="{af3cd2ba-39fc-428b-a333-80f7eb18b18d}" enabled="1" method="Standard" siteId="{e8b88f3d-222b-4ce5-b9d1-46b0ff9466a0}" contentBits="0" removed="0"/>
+</clbl:labelList>
 </file>
--- a/orchestrer-intelligence-gatherly.pptx
+++ b/orchestrer-intelligence-gatherly.pptx
@@ -5,7 +5,7 @@
     <p:sldMasterId id="2147483648" r:id="rId1"/>
   </p:sldMasterIdLst>
   <p:notesMasterIdLst>
-    <p:notesMasterId r:id="rId28"/>
+    <p:notesMasterId r:id="rId26"/>
   </p:notesMasterIdLst>
   <p:sldIdLst>
     <p:sldId id="256" r:id="rId2"/>
@@ -25,15 +25,13 @@
     <p:sldId id="270" r:id="rId16"/>
     <p:sldId id="271" r:id="rId17"/>
     <p:sldId id="272" r:id="rId18"/>
-    <p:sldId id="273" r:id="rId19"/>
-    <p:sldId id="274" r:id="rId20"/>
-    <p:sldId id="275" r:id="rId21"/>
-    <p:sldId id="276" r:id="rId22"/>
-    <p:sldId id="277" r:id="rId23"/>
-    <p:sldId id="278" r:id="rId24"/>
-    <p:sldId id="279" r:id="rId25"/>
-    <p:sldId id="280" r:id="rId26"/>
-    <p:sldId id="281" r:id="rId27"/>
+    <p:sldId id="274" r:id="rId19"/>
+    <p:sldId id="275" r:id="rId20"/>
+    <p:sldId id="276" r:id="rId21"/>
+    <p:sldId id="278" r:id="rId22"/>
+    <p:sldId id="279" r:id="rId23"/>
+    <p:sldId id="280" r:id="rId24"/>
+    <p:sldId id="281" r:id="rId25"/>
   </p:sldIdLst>
   <p:sldSz cx="9144000" cy="5143500" type="screen16x9"/>
   <p:notesSz cx="5143500" cy="9144000"/>
@@ -1091,7 +1089,7 @@
           <a:p>
             <a:r>
               <a:rPr lang="en-US" dirty="0"/>
-              <a:t>Le résultat le plus contre-intuitif : l'escalade est la meilleure nouvelle de la nuit. Un système qui dit « je ne sais pas faire ça » est un système digne de confiance. 7 correctifs prêts à reviewer au matin = du temps humain économisé, pas remplacé.</a:t>
+              <a:t>Le plan d'action universel. Insister sur l'étape 4 : itérer le skill, pas le prompt — c'est ce qui transforme une astuce en actif.</a:t>
             </a:r>
           </a:p>
         </p:txBody>
@@ -1178,7 +1176,7 @@
           <a:p>
             <a:r>
               <a:rPr lang="en-US" dirty="0"/>
-              <a:t>Le plan d'action universel. Insister sur l'étape 4 : itérer le skill, pas le prompt — c'est ce qui transforme une astuce en actif.</a:t>
+              <a:t>Pause de 2 secondes sur cette slide avant le Q&amp;A.</a:t>
             </a:r>
           </a:p>
         </p:txBody>
@@ -1352,7 +1350,7 @@
           <a:p>
             <a:r>
               <a:rPr lang="en-US" dirty="0"/>
-              <a:t>Pause de 2 secondes sur cette slide avant le Q&amp;A.</a:t>
+              <a:t>Remercier l’audience et ouvrir le Q&amp;A. Rappeler les deux points à retenir : (1) l’écart entre vibe coding et vibe engineering n’est pas l’intelligence du modèle, c’est l’orchestration ; (2) on commence dès lundi avec un seul fichier CLAUDE.md et un dossier de skills. Inviter l’audience à récupérer les slides et le starter pack Gatherly sur github.com/Bmbsolution/genai-demo (code de la démo, skills, CLAUDE.md : tout est public et réutilisable). Donner les contacts LinkedIn / GitHub pour le suivi. Si le Q&amp;A démarre lentement, amorcer avec une question anticipée (slides 23 à 26 : emplois, coûts, sécurité, hallucinations).</a:t>
             </a:r>
           </a:p>
         </p:txBody>
@@ -1439,7 +1437,7 @@
           <a:p>
             <a:r>
               <a:rPr lang="en-US" dirty="0"/>
-              <a:t>Remercier l’audience et ouvrir le Q&amp;A. Rappeler les deux points à retenir : (1) l’écart entre vibe coding et vibe engineering n’est pas l’intelligence du modèle, c’est l’orchestration ; (2) on commence dès lundi avec un seul fichier CLAUDE.md et un dossier de skills. Inviter l’audience à récupérer les slides et le starter pack Gatherly sur github.com/Bmbsolution/genai-demo (code de la démo, skills, CLAUDE.md : tout est public et réutilisable). Donner les contacts LinkedIn / GitHub pour le suivi. Si le Q&amp;A démarre lentement, amorcer avec une question anticipée (slides 23 à 26 : emplois, coûts, sécurité, hallucinations).</a:t>
+              <a:t>Question quasi garantie (CEO et curieux). Ton calme, pas défensif. Pivot : montrer la slide « humans are sync points ». Si on insiste sur les chiffres d'emploi : dire honnêtement que le marché évolue et que les données récentes méritent d'être vérifiées à la source plutôt que citées de mémoire.</a:t>
             </a:r>
           </a:p>
         </p:txBody>
@@ -1526,7 +1524,7 @@
           <a:p>
             <a:r>
               <a:rPr lang="en-US" dirty="0"/>
-              <a:t>Slide de navigation, pas à présenter linéairement. Pendant le Q&amp;A, sauter directement à la slide backup qui correspond à la question posée : slide 23 « est-ce que ça remplace les développeurs ? », slide 24 « combien ça coûte vraiment ? », slide 25 « notre code et nos données sont-ils en sécurité ? », slide 26 « et les hallucinations ? ». Chaque backup tient en une slide avec une punchline. Si aucune question ne tombe dessus, ne pas s’y attarder : revenir à la slide 20 (« it’s orchestration ») pour clôturer.</a:t>
+              <a:t>Question entrepreneur/CEO. NE PAS donner de chiffre en dollars universel — ça dépend du modèle, du volume et du workflow. Donner la structure : coût à la tâche, plafonné par les retries bornés. Proposer de partager une grille de calcul après la conf.</a:t>
             </a:r>
           </a:p>
         </p:txBody>
@@ -1613,7 +1611,7 @@
           <a:p>
             <a:r>
               <a:rPr lang="en-US" dirty="0"/>
-              <a:t>Question quasi garantie (CEO et curieux). Ton calme, pas défensif. Pivot : montrer la slide « humans are sync points ». Si on insiste sur les chiffres d'emploi : dire honnêtement que le marché évolue et que les données récentes méritent d'être vérifiées à la source plutôt que citées de mémoire.</a:t>
+              <a:t>Question TECH/CEO. Pointer le YAML du skill : allowed-tools = Read, Grep, Glob — le contrat technique est vérifiable. Si la question porte sur l'envoi de code à un fournisseur de modèle : sujet légitime, dépend du contrat (rétention, résidence des données) — à valider avec le fournisseur, ne pas improviser de garanties.</a:t>
             </a:r>
           </a:p>
         </p:txBody>
@@ -1700,7 +1698,7 @@
           <a:p>
             <a:r>
               <a:rPr lang="en-US" dirty="0"/>
-              <a:t>Question entrepreneur/CEO. NE PAS donner de chiffre en dollars universel — ça dépend du modèle, du volume et du workflow. Donner la structure : coût à la tâche, plafonné par les retries bornés. Proposer de partager une grille de calcul après la conf.</a:t>
+              <a:t>Question AI PRO/TECH. Le point fort : on ne prétend pas que le modèle ne se trompe pas — on conçoit le système pour qu'une erreur ne puisse pas sortir. Parallèle avec les humains : on ne déploie pas le code d'un humain sans tests non plus.</a:t>
             </a:r>
           </a:p>
         </p:txBody>
@@ -1723,180 +1721,6 @@
             <a:fld id="{F7021451-1387-4CA6-816F-3879F97B5CBC}" type="slidenum">
               <a:rPr lang="en-US"/>
               <a:t>24</a:t>
-            </a:fld>
-            <a:endParaRPr lang="en-US"/>
-          </a:p>
-        </p:txBody>
-      </p:sp>
-    </p:spTree>
-    <p:extLst>
-      <p:ext uri="{BB962C8B-B14F-4D97-AF65-F5344CB8AC3E}">
-        <p14:creationId xmlns:p14="http://schemas.microsoft.com/office/powerpoint/2010/main" val="1024086991"/>
-      </p:ext>
-    </p:extLst>
-  </p:cSld>
-  <p:clrMapOvr>
-    <a:masterClrMapping/>
-  </p:clrMapOvr>
-</p:notes>
-</file>
-
-<file path=ppt/notesSlides/notesSlide25.xml><?xml version="1.0" encoding="utf-8"?>
-<p:notes xmlns:a="http://schemas.openxmlformats.org/drawingml/2006/main" xmlns:r="http://schemas.openxmlformats.org/officeDocument/2006/relationships" xmlns:p="http://schemas.openxmlformats.org/presentationml/2006/main">
-  <p:cSld>
-    <p:spTree>
-      <p:nvGrpSpPr>
-        <p:cNvPr id="1" name=""/>
-        <p:cNvGrpSpPr/>
-        <p:nvPr/>
-      </p:nvGrpSpPr>
-      <p:grpSpPr>
-        <a:xfrm>
-          <a:off x="0" y="0"/>
-          <a:ext cx="0" cy="0"/>
-          <a:chOff x="0" y="0"/>
-          <a:chExt cx="0" cy="0"/>
-        </a:xfrm>
-      </p:grpSpPr>
-      <p:sp>
-        <p:nvSpPr>
-          <p:cNvPr id="2" name="Slide Image Placeholder 1"/>
-          <p:cNvSpPr>
-            <a:spLocks noGrp="1" noRot="1" noChangeAspect="1"/>
-          </p:cNvSpPr>
-          <p:nvPr>
-            <p:ph type="sldImg"/>
-          </p:nvPr>
-        </p:nvSpPr>
-        <p:spPr/>
-      </p:sp>
-      <p:sp>
-        <p:nvSpPr>
-          <p:cNvPr id="3" name="Notes Placeholder 2"/>
-          <p:cNvSpPr>
-            <a:spLocks noGrp="1"/>
-          </p:cNvSpPr>
-          <p:nvPr>
-            <p:ph type="body" idx="1"/>
-          </p:nvPr>
-        </p:nvSpPr>
-        <p:spPr/>
-        <p:txBody>
-          <a:bodyPr/>
-          <a:lstStyle/>
-          <a:p>
-            <a:r>
-              <a:rPr lang="en-US" dirty="0"/>
-              <a:t>Question TECH/CEO. Pointer le YAML du skill : allowed-tools = Read, Grep, Glob — le contrat technique est vérifiable. Si la question porte sur l'envoi de code à un fournisseur de modèle : sujet légitime, dépend du contrat (rétention, résidence des données) — à valider avec le fournisseur, ne pas improviser de garanties.</a:t>
-            </a:r>
-          </a:p>
-        </p:txBody>
-      </p:sp>
-      <p:sp>
-        <p:nvSpPr>
-          <p:cNvPr id="4" name="Slide Number Placeholder 3"/>
-          <p:cNvSpPr>
-            <a:spLocks noGrp="1"/>
-          </p:cNvSpPr>
-          <p:nvPr>
-            <p:ph type="sldNum" sz="quarter" idx="10"/>
-          </p:nvPr>
-        </p:nvSpPr>
-        <p:spPr/>
-        <p:txBody>
-          <a:bodyPr/>
-          <a:lstStyle/>
-          <a:p>
-            <a:fld id="{F7021451-1387-4CA6-816F-3879F97B5CBC}" type="slidenum">
-              <a:rPr lang="en-US"/>
-              <a:t>25</a:t>
-            </a:fld>
-            <a:endParaRPr lang="en-US"/>
-          </a:p>
-        </p:txBody>
-      </p:sp>
-    </p:spTree>
-    <p:extLst>
-      <p:ext uri="{BB962C8B-B14F-4D97-AF65-F5344CB8AC3E}">
-        <p14:creationId xmlns:p14="http://schemas.microsoft.com/office/powerpoint/2010/main" val="1024086991"/>
-      </p:ext>
-    </p:extLst>
-  </p:cSld>
-  <p:clrMapOvr>
-    <a:masterClrMapping/>
-  </p:clrMapOvr>
-</p:notes>
-</file>
-
-<file path=ppt/notesSlides/notesSlide26.xml><?xml version="1.0" encoding="utf-8"?>
-<p:notes xmlns:a="http://schemas.openxmlformats.org/drawingml/2006/main" xmlns:r="http://schemas.openxmlformats.org/officeDocument/2006/relationships" xmlns:p="http://schemas.openxmlformats.org/presentationml/2006/main">
-  <p:cSld>
-    <p:spTree>
-      <p:nvGrpSpPr>
-        <p:cNvPr id="1" name=""/>
-        <p:cNvGrpSpPr/>
-        <p:nvPr/>
-      </p:nvGrpSpPr>
-      <p:grpSpPr>
-        <a:xfrm>
-          <a:off x="0" y="0"/>
-          <a:ext cx="0" cy="0"/>
-          <a:chOff x="0" y="0"/>
-          <a:chExt cx="0" cy="0"/>
-        </a:xfrm>
-      </p:grpSpPr>
-      <p:sp>
-        <p:nvSpPr>
-          <p:cNvPr id="2" name="Slide Image Placeholder 1"/>
-          <p:cNvSpPr>
-            <a:spLocks noGrp="1" noRot="1" noChangeAspect="1"/>
-          </p:cNvSpPr>
-          <p:nvPr>
-            <p:ph type="sldImg"/>
-          </p:nvPr>
-        </p:nvSpPr>
-        <p:spPr/>
-      </p:sp>
-      <p:sp>
-        <p:nvSpPr>
-          <p:cNvPr id="3" name="Notes Placeholder 2"/>
-          <p:cNvSpPr>
-            <a:spLocks noGrp="1"/>
-          </p:cNvSpPr>
-          <p:nvPr>
-            <p:ph type="body" idx="1"/>
-          </p:nvPr>
-        </p:nvSpPr>
-        <p:spPr/>
-        <p:txBody>
-          <a:bodyPr/>
-          <a:lstStyle/>
-          <a:p>
-            <a:r>
-              <a:rPr lang="en-US" dirty="0"/>
-              <a:t>Question AI PRO/TECH. Le point fort : on ne prétend pas que le modèle ne se trompe pas — on conçoit le système pour qu'une erreur ne puisse pas sortir. Parallèle avec les humains : on ne déploie pas le code d'un humain sans tests non plus.</a:t>
-            </a:r>
-          </a:p>
-        </p:txBody>
-      </p:sp>
-      <p:sp>
-        <p:nvSpPr>
-          <p:cNvPr id="4" name="Slide Number Placeholder 3"/>
-          <p:cNvSpPr>
-            <a:spLocks noGrp="1"/>
-          </p:cNvSpPr>
-          <p:nvPr>
-            <p:ph type="sldNum" sz="quarter" idx="10"/>
-          </p:nvPr>
-        </p:nvSpPr>
-        <p:spPr/>
-        <p:txBody>
-          <a:bodyPr/>
-          <a:lstStyle/>
-          <a:p>
-            <a:fld id="{F7021451-1387-4CA6-816F-3879F97B5CBC}" type="slidenum">
-              <a:rPr lang="en-US"/>
-              <a:t>26</a:t>
             </a:fld>
             <a:endParaRPr lang="en-US"/>
           </a:p>
@@ -5602,7 +5426,7 @@
         </p:nvSpPr>
         <p:spPr>
           <a:xfrm>
-            <a:off x="457200" y="384048"/>
+            <a:off x="457200" y="438912"/>
             <a:ext cx="8229600" cy="274320"/>
           </a:xfrm>
           <a:prstGeom prst="rect">
@@ -5627,7 +5451,7 @@
                 <a:ea typeface="Inter" pitchFamily="34" charset="-122"/>
                 <a:cs typeface="Inter" pitchFamily="34" charset="-120"/>
               </a:rPr>
-              <a:t>02 · THE RULES</a:t>
+              <a:t>03 · THE RULES</a:t>
             </a:r>
             <a:endParaRPr lang="en-US" sz="1000" dirty="0"/>
           </a:p>
@@ -6254,7 +6078,7 @@
                 <a:ea typeface="Inter" pitchFamily="34" charset="-122"/>
                 <a:cs typeface="Inter" pitchFamily="34" charset="-120"/>
               </a:rPr>
-              <a:t>03 · THE DEMO</a:t>
+              <a:t>04 · THE DEMO</a:t>
             </a:r>
             <a:endParaRPr lang="en-US" sz="1000" dirty="0"/>
           </a:p>
@@ -7237,45 +7061,6 @@
           </a:p>
         </p:txBody>
       </p:sp>
-      <p:sp>
-        <p:nvSpPr>
-          <p:cNvPr id="8" name="Text 6"/>
-          <p:cNvSpPr/>
-          <p:nvPr/>
-        </p:nvSpPr>
-        <p:spPr>
-          <a:xfrm>
-            <a:off x="457200" y="3429000"/>
-            <a:ext cx="8229600" cy="365760"/>
-          </a:xfrm>
-          <a:prstGeom prst="rect">
-            <a:avLst/>
-          </a:prstGeom>
-          <a:noFill/>
-          <a:ln/>
-        </p:spPr>
-        <p:txBody>
-          <a:bodyPr wrap="square" lIns="0" tIns="0" rIns="0" bIns="0" rtlCol="0" anchor="ctr"/>
-          <a:lstStyle/>
-          <a:p>
-            <a:pPr marL="0" indent="0">
-              <a:buNone/>
-            </a:pPr>
-            <a:r>
-              <a:rPr lang="en-US" sz="1400" i="1" dirty="0">
-                <a:solidFill>
-                  <a:srgbClr val="3B82F6"/>
-                </a:solidFill>
-                <a:latin typeface="Inter" pitchFamily="34" charset="0"/>
-                <a:ea typeface="Inter" pitchFamily="34" charset="-122"/>
-                <a:cs typeface="Inter" pitchFamily="34" charset="-120"/>
-              </a:rPr>
-              <a:t>→ switching to terminal</a:t>
-            </a:r>
-            <a:endParaRPr lang="en-US" sz="1400" dirty="0"/>
-          </a:p>
-        </p:txBody>
-      </p:sp>
     </p:spTree>
   </p:cSld>
   <p:clrMapOvr>
@@ -7543,45 +7328,6 @@
           </a:p>
         </p:txBody>
       </p:sp>
-      <p:sp>
-        <p:nvSpPr>
-          <p:cNvPr id="8" name="Text 6"/>
-          <p:cNvSpPr/>
-          <p:nvPr/>
-        </p:nvSpPr>
-        <p:spPr>
-          <a:xfrm>
-            <a:off x="457200" y="3474720"/>
-            <a:ext cx="8229600" cy="365760"/>
-          </a:xfrm>
-          <a:prstGeom prst="rect">
-            <a:avLst/>
-          </a:prstGeom>
-          <a:noFill/>
-          <a:ln/>
-        </p:spPr>
-        <p:txBody>
-          <a:bodyPr wrap="square" lIns="0" tIns="0" rIns="0" bIns="0" rtlCol="0" anchor="ctr"/>
-          <a:lstStyle/>
-          <a:p>
-            <a:pPr marL="0" indent="0">
-              <a:buNone/>
-            </a:pPr>
-            <a:r>
-              <a:rPr lang="en-US" sz="1400" i="1" dirty="0">
-                <a:solidFill>
-                  <a:srgbClr val="3B82F6"/>
-                </a:solidFill>
-                <a:latin typeface="Inter" pitchFamily="34" charset="0"/>
-                <a:ea typeface="Inter" pitchFamily="34" charset="-122"/>
-                <a:cs typeface="Inter" pitchFamily="34" charset="-120"/>
-              </a:rPr>
-              <a:t>→ switching to terminal</a:t>
-            </a:r>
-            <a:endParaRPr lang="en-US" sz="1400" dirty="0"/>
-          </a:p>
-        </p:txBody>
-      </p:sp>
     </p:spTree>
   </p:cSld>
   <p:clrMapOvr>
@@ -7771,95 +7517,6 @@
           </a:p>
         </p:txBody>
       </p:sp>
-      <p:sp>
-        <p:nvSpPr>
-          <p:cNvPr id="6" name="Text 4"/>
-          <p:cNvSpPr/>
-          <p:nvPr/>
-        </p:nvSpPr>
-        <p:spPr>
-          <a:xfrm>
-            <a:off x="503766" y="1568196"/>
-            <a:ext cx="4889500" cy="1748366"/>
-          </a:xfrm>
-          <a:prstGeom prst="rect">
-            <a:avLst/>
-          </a:prstGeom>
-          <a:noFill/>
-          <a:ln/>
-        </p:spPr>
-        <p:txBody>
-          <a:bodyPr wrap="square" lIns="0" tIns="0" rIns="0" bIns="0" rtlCol="0" anchor="ctr"/>
-          <a:lstStyle/>
-          <a:p>
-            <a:pPr marL="0" indent="0">
-              <a:buNone/>
-            </a:pPr>
-            <a:r>
-              <a:rPr lang="en-US" b="1" dirty="0">
-                <a:solidFill>
-                  <a:srgbClr val="3B82F6"/>
-                </a:solidFill>
-                <a:latin typeface="Montserrat" pitchFamily="34" charset="0"/>
-                <a:ea typeface="Inter" pitchFamily="34" charset="-122"/>
-                <a:cs typeface="Inter" pitchFamily="34" charset="-120"/>
-              </a:rPr>
-              <a:t>8   readiness gaps · </a:t>
-            </a:r>
-            <a:r>
-              <a:rPr lang="en-US" sz="1400" b="1" dirty="0">
-                <a:solidFill>
-                  <a:srgbClr val="3B82F6"/>
-                </a:solidFill>
-                <a:latin typeface="Montserrat" pitchFamily="34" charset="0"/>
-                <a:ea typeface="Inter" pitchFamily="34" charset="-122"/>
-                <a:cs typeface="Inter" pitchFamily="34" charset="-120"/>
-              </a:rPr>
-              <a:t>8 hours · no supervision</a:t>
-            </a:r>
-            <a:endParaRPr lang="en-US" sz="1400" dirty="0"/>
-          </a:p>
-        </p:txBody>
-      </p:sp>
-      <p:sp>
-        <p:nvSpPr>
-          <p:cNvPr id="7" name="Text 5"/>
-          <p:cNvSpPr/>
-          <p:nvPr/>
-        </p:nvSpPr>
-        <p:spPr>
-          <a:xfrm>
-            <a:off x="457200" y="3520440"/>
-            <a:ext cx="8229600" cy="365760"/>
-          </a:xfrm>
-          <a:prstGeom prst="rect">
-            <a:avLst/>
-          </a:prstGeom>
-          <a:noFill/>
-          <a:ln/>
-        </p:spPr>
-        <p:txBody>
-          <a:bodyPr wrap="square" lIns="0" tIns="0" rIns="0" bIns="0" rtlCol="0" anchor="ctr"/>
-          <a:lstStyle/>
-          <a:p>
-            <a:pPr marL="0" indent="0">
-              <a:buNone/>
-            </a:pPr>
-            <a:r>
-              <a:rPr lang="en-US" sz="1400" i="1" dirty="0">
-                <a:solidFill>
-                  <a:srgbClr val="3B82F6"/>
-                </a:solidFill>
-                <a:latin typeface="Inter" pitchFamily="34" charset="0"/>
-                <a:ea typeface="Inter" pitchFamily="34" charset="-122"/>
-                <a:cs typeface="Inter" pitchFamily="34" charset="-120"/>
-              </a:rPr>
-              <a:t>→ switching to timelapse</a:t>
-            </a:r>
-            <a:endParaRPr lang="en-US" sz="1400" dirty="0"/>
-          </a:p>
-        </p:txBody>
-      </p:sp>
     </p:spTree>
   </p:cSld>
   <p:clrMapOvr>
@@ -7869,418 +7526,6 @@
 </file>
 
 <file path=ppt/slides/slide18.xml><?xml version="1.0" encoding="utf-8"?>
-<p:sld xmlns:a="http://schemas.openxmlformats.org/drawingml/2006/main" xmlns:r="http://schemas.openxmlformats.org/officeDocument/2006/relationships" xmlns:p="http://schemas.openxmlformats.org/presentationml/2006/main">
-  <p:cSld name="Slide 18">
-    <p:bg>
-      <p:bgPr>
-        <a:solidFill>
-          <a:srgbClr val="0F1729"/>
-        </a:solidFill>
-        <a:effectLst/>
-      </p:bgPr>
-    </p:bg>
-    <p:spTree>
-      <p:nvGrpSpPr>
-        <p:cNvPr id="1" name=""/>
-        <p:cNvGrpSpPr/>
-        <p:nvPr/>
-      </p:nvGrpSpPr>
-      <p:grpSpPr>
-        <a:xfrm>
-          <a:off x="0" y="0"/>
-          <a:ext cx="0" cy="0"/>
-          <a:chOff x="0" y="0"/>
-          <a:chExt cx="0" cy="0"/>
-        </a:xfrm>
-      </p:grpSpPr>
-      <p:sp>
-        <p:nvSpPr>
-          <p:cNvPr id="2" name="Text 0"/>
-          <p:cNvSpPr/>
-          <p:nvPr/>
-        </p:nvSpPr>
-        <p:spPr>
-          <a:xfrm>
-            <a:off x="457200" y="4796028"/>
-            <a:ext cx="4572000" cy="274320"/>
-          </a:xfrm>
-          <a:prstGeom prst="rect">
-            <a:avLst/>
-          </a:prstGeom>
-          <a:noFill/>
-          <a:ln/>
-        </p:spPr>
-        <p:txBody>
-          <a:bodyPr wrap="square" lIns="0" tIns="0" rIns="0" bIns="0" rtlCol="0" anchor="ctr"/>
-          <a:lstStyle/>
-          <a:p>
-            <a:pPr marL="0" indent="0">
-              <a:buNone/>
-            </a:pPr>
-            <a:r>
-              <a:rPr lang="en-US" sz="800" kern="0" spc="200" dirty="0">
-                <a:solidFill>
-                  <a:srgbClr val="64748B"/>
-                </a:solidFill>
-                <a:latin typeface="Inter" pitchFamily="34" charset="0"/>
-                <a:ea typeface="Inter" pitchFamily="34" charset="-122"/>
-                <a:cs typeface="Inter" pitchFamily="34" charset="-120"/>
-              </a:rPr>
-              <a:t>03 · demo · moment 3</a:t>
-            </a:r>
-            <a:endParaRPr lang="en-US" sz="800" dirty="0"/>
-          </a:p>
-        </p:txBody>
-      </p:sp>
-      <p:sp>
-        <p:nvSpPr>
-          <p:cNvPr id="3" name="Text 1"/>
-          <p:cNvSpPr/>
-          <p:nvPr/>
-        </p:nvSpPr>
-        <p:spPr>
-          <a:xfrm>
-            <a:off x="8229600" y="4796028"/>
-            <a:ext cx="457200" cy="274320"/>
-          </a:xfrm>
-          <a:prstGeom prst="rect">
-            <a:avLst/>
-          </a:prstGeom>
-          <a:noFill/>
-          <a:ln/>
-        </p:spPr>
-        <p:txBody>
-          <a:bodyPr wrap="square" lIns="0" tIns="0" rIns="0" bIns="0" rtlCol="0" anchor="ctr"/>
-          <a:lstStyle/>
-          <a:p>
-            <a:pPr marL="0" indent="0" algn="r">
-              <a:buNone/>
-            </a:pPr>
-            <a:r>
-              <a:rPr lang="en-US" sz="800" dirty="0">
-                <a:solidFill>
-                  <a:srgbClr val="64748B"/>
-                </a:solidFill>
-                <a:latin typeface="Inter" pitchFamily="34" charset="0"/>
-                <a:ea typeface="Inter" pitchFamily="34" charset="-122"/>
-                <a:cs typeface="Inter" pitchFamily="34" charset="-120"/>
-              </a:rPr>
-              <a:t>18</a:t>
-            </a:r>
-            <a:endParaRPr lang="en-US" sz="800" dirty="0"/>
-          </a:p>
-        </p:txBody>
-      </p:sp>
-      <p:sp>
-        <p:nvSpPr>
-          <p:cNvPr id="4" name="Text 2"/>
-          <p:cNvSpPr/>
-          <p:nvPr/>
-        </p:nvSpPr>
-        <p:spPr>
-          <a:xfrm>
-            <a:off x="457200" y="384048"/>
-            <a:ext cx="8229600" cy="274320"/>
-          </a:xfrm>
-          <a:prstGeom prst="rect">
-            <a:avLst/>
-          </a:prstGeom>
-          <a:noFill/>
-          <a:ln/>
-        </p:spPr>
-        <p:txBody>
-          <a:bodyPr wrap="square" lIns="0" tIns="0" rIns="0" bIns="0" rtlCol="0" anchor="ctr"/>
-          <a:lstStyle/>
-          <a:p>
-            <a:pPr marL="0" indent="0">
-              <a:buNone/>
-            </a:pPr>
-            <a:r>
-              <a:rPr lang="en-US" sz="1000" b="1" kern="0" spc="300" dirty="0">
-                <a:solidFill>
-                  <a:srgbClr val="3B82F6"/>
-                </a:solidFill>
-                <a:latin typeface="Inter" pitchFamily="34" charset="0"/>
-                <a:ea typeface="Inter" pitchFamily="34" charset="-122"/>
-                <a:cs typeface="Inter" pitchFamily="34" charset="-120"/>
-              </a:rPr>
-              <a:t>03 · DEMO · MOMENT 3</a:t>
-            </a:r>
-            <a:endParaRPr lang="en-US" sz="1000" dirty="0"/>
-          </a:p>
-        </p:txBody>
-      </p:sp>
-      <p:sp>
-        <p:nvSpPr>
-          <p:cNvPr id="5" name="Text 3"/>
-          <p:cNvSpPr/>
-          <p:nvPr/>
-        </p:nvSpPr>
-        <p:spPr>
-          <a:xfrm>
-            <a:off x="457200" y="713232"/>
-            <a:ext cx="8229600" cy="640080"/>
-          </a:xfrm>
-          <a:prstGeom prst="rect">
-            <a:avLst/>
-          </a:prstGeom>
-          <a:noFill/>
-          <a:ln/>
-        </p:spPr>
-        <p:txBody>
-          <a:bodyPr wrap="square" lIns="0" tIns="0" rIns="0" bIns="0" rtlCol="0" anchor="ctr"/>
-          <a:lstStyle/>
-          <a:p>
-            <a:pPr marL="0" indent="0">
-              <a:buNone/>
-            </a:pPr>
-            <a:r>
-              <a:rPr lang="en-US" sz="2800" b="1" dirty="0">
-                <a:solidFill>
-                  <a:srgbClr val="F8FAFC"/>
-                </a:solidFill>
-                <a:latin typeface="Montserrat" pitchFamily="34" charset="0"/>
-                <a:ea typeface="Inter" pitchFamily="34" charset="-122"/>
-                <a:cs typeface="Inter" pitchFamily="34" charset="-120"/>
-              </a:rPr>
-              <a:t>8 readiness gaps overnight</a:t>
-            </a:r>
-            <a:endParaRPr lang="en-US" sz="2800" dirty="0"/>
-          </a:p>
-        </p:txBody>
-      </p:sp>
-      <p:sp>
-        <p:nvSpPr>
-          <p:cNvPr id="6" name="Shape 4"/>
-          <p:cNvSpPr/>
-          <p:nvPr/>
-        </p:nvSpPr>
-        <p:spPr>
-          <a:xfrm>
-            <a:off x="457200" y="1554480"/>
-            <a:ext cx="5212080" cy="2377440"/>
-          </a:xfrm>
-          <a:prstGeom prst="roundRect">
-            <a:avLst>
-              <a:gd name="adj" fmla="val 2692"/>
-            </a:avLst>
-          </a:prstGeom>
-          <a:solidFill>
-            <a:srgbClr val="1B2640"/>
-          </a:solidFill>
-          <a:ln/>
-        </p:spPr>
-        <p:txBody>
-          <a:bodyPr/>
-          <a:lstStyle/>
-          <a:p>
-            <a:endParaRPr/>
-          </a:p>
-        </p:txBody>
-      </p:sp>
-      <p:sp>
-        <p:nvSpPr>
-          <p:cNvPr id="7" name="Text 5"/>
-          <p:cNvSpPr/>
-          <p:nvPr/>
-        </p:nvSpPr>
-        <p:spPr>
-          <a:xfrm>
-            <a:off x="685800" y="1783080"/>
-            <a:ext cx="4754880" cy="1920240"/>
-          </a:xfrm>
-          <a:prstGeom prst="rect">
-            <a:avLst/>
-          </a:prstGeom>
-          <a:noFill/>
-          <a:ln/>
-        </p:spPr>
-        <p:txBody>
-          <a:bodyPr wrap="square" lIns="0" tIns="0" rIns="0" bIns="0" rtlCol="0" anchor="ctr"/>
-          <a:lstStyle/>
-          <a:p>
-            <a:pPr marL="0" indent="0">
-              <a:spcAft>
-                <a:spcPts val="800"/>
-              </a:spcAft>
-              <a:buNone/>
-            </a:pPr>
-            <a:r>
-              <a:rPr lang="en-US" sz="2000" b="1" dirty="0">
-                <a:solidFill>
-                  <a:srgbClr val="34D399"/>
-                </a:solidFill>
-                <a:latin typeface="Inter" pitchFamily="34" charset="0"/>
-                <a:ea typeface="Inter" pitchFamily="34" charset="-122"/>
-                <a:cs typeface="Inter" pitchFamily="34" charset="-120"/>
-              </a:rPr>
-              <a:t>7 fixes opened
-</a:t>
-            </a:r>
-            <a:endParaRPr lang="en-US" sz="2000" dirty="0"/>
-          </a:p>
-          <a:p>
-            <a:pPr marL="0" indent="0">
-              <a:spcAft>
-                <a:spcPts val="800"/>
-              </a:spcAft>
-              <a:buNone/>
-            </a:pPr>
-            <a:r>
-              <a:rPr lang="en-US" sz="1150" dirty="0">
-                <a:solidFill>
-                  <a:srgbClr val="94A3B8"/>
-                </a:solidFill>
-                <a:latin typeface="Inter" pitchFamily="34" charset="0"/>
-                <a:ea typeface="Inter" pitchFamily="34" charset="-122"/>
-                <a:cs typeface="Inter" pitchFamily="34" charset="-120"/>
-              </a:rPr>
-              <a:t>missing locations drafted · capacity waitlists · reminder emails · cover images · schedule blocks · dietary summaries</a:t>
-            </a:r>
-            <a:endParaRPr lang="en-US" sz="2000" dirty="0"/>
-          </a:p>
-        </p:txBody>
-      </p:sp>
-      <p:sp>
-        <p:nvSpPr>
-          <p:cNvPr id="8" name="Shape 6"/>
-          <p:cNvSpPr/>
-          <p:nvPr/>
-        </p:nvSpPr>
-        <p:spPr>
-          <a:xfrm>
-            <a:off x="5852160" y="1554480"/>
-            <a:ext cx="2834640" cy="2377440"/>
-          </a:xfrm>
-          <a:prstGeom prst="roundRect">
-            <a:avLst>
-              <a:gd name="adj" fmla="val 2692"/>
-            </a:avLst>
-          </a:prstGeom>
-          <a:solidFill>
-            <a:srgbClr val="1B2640"/>
-          </a:solidFill>
-          <a:ln/>
-        </p:spPr>
-        <p:txBody>
-          <a:bodyPr/>
-          <a:lstStyle/>
-          <a:p>
-            <a:endParaRPr/>
-          </a:p>
-        </p:txBody>
-      </p:sp>
-      <p:sp>
-        <p:nvSpPr>
-          <p:cNvPr id="9" name="Text 7"/>
-          <p:cNvSpPr/>
-          <p:nvPr/>
-        </p:nvSpPr>
-        <p:spPr>
-          <a:xfrm>
-            <a:off x="6080760" y="1783080"/>
-            <a:ext cx="2377440" cy="1920240"/>
-          </a:xfrm>
-          <a:prstGeom prst="rect">
-            <a:avLst/>
-          </a:prstGeom>
-          <a:noFill/>
-          <a:ln/>
-        </p:spPr>
-        <p:txBody>
-          <a:bodyPr wrap="square" lIns="0" tIns="0" rIns="0" bIns="0" rtlCol="0" anchor="ctr"/>
-          <a:lstStyle/>
-          <a:p>
-            <a:pPr marL="0" indent="0">
-              <a:spcAft>
-                <a:spcPts val="800"/>
-              </a:spcAft>
-              <a:buNone/>
-            </a:pPr>
-            <a:r>
-              <a:rPr lang="en-US" sz="2000" b="1" dirty="0">
-                <a:solidFill>
-                  <a:srgbClr val="FBBF24"/>
-                </a:solidFill>
-                <a:latin typeface="Inter" pitchFamily="34" charset="0"/>
-                <a:ea typeface="Inter" pitchFamily="34" charset="-122"/>
-                <a:cs typeface="Inter" pitchFamily="34" charset="-120"/>
-              </a:rPr>
-              <a:t>1 escalation
-</a:t>
-            </a:r>
-            <a:endParaRPr lang="en-US" sz="2000" dirty="0"/>
-          </a:p>
-          <a:p>
-            <a:pPr marL="0" indent="0">
-              <a:spcAft>
-                <a:spcPts val="800"/>
-              </a:spcAft>
-              <a:buNone/>
-            </a:pPr>
-            <a:r>
-              <a:rPr lang="en-US" sz="1150" dirty="0">
-                <a:solidFill>
-                  <a:srgbClr val="94A3B8"/>
-                </a:solidFill>
-                <a:latin typeface="Inter" pitchFamily="34" charset="0"/>
-                <a:ea typeface="Inter" pitchFamily="34" charset="-122"/>
-                <a:cs typeface="Inter" pitchFamily="34" charset="-120"/>
-              </a:rPr>
-              <a:t>a double-booked venue — needs a human call; marked needs-human with full trace</a:t>
-            </a:r>
-            <a:endParaRPr lang="en-US" sz="2000" dirty="0"/>
-          </a:p>
-        </p:txBody>
-      </p:sp>
-      <p:sp>
-        <p:nvSpPr>
-          <p:cNvPr id="10" name="Text 8"/>
-          <p:cNvSpPr/>
-          <p:nvPr/>
-        </p:nvSpPr>
-        <p:spPr>
-          <a:xfrm>
-            <a:off x="457200" y="4206240"/>
-            <a:ext cx="8229600" cy="365760"/>
-          </a:xfrm>
-          <a:prstGeom prst="rect">
-            <a:avLst/>
-          </a:prstGeom>
-          <a:noFill/>
-          <a:ln/>
-        </p:spPr>
-        <p:txBody>
-          <a:bodyPr wrap="square" lIns="0" tIns="0" rIns="0" bIns="0" rtlCol="0" anchor="ctr"/>
-          <a:lstStyle/>
-          <a:p>
-            <a:pPr marL="0" indent="0" algn="ctr">
-              <a:buNone/>
-            </a:pPr>
-            <a:r>
-              <a:rPr lang="en-US" sz="1600" b="1" i="1" dirty="0">
-                <a:solidFill>
-                  <a:srgbClr val="3B82F6"/>
-                </a:solidFill>
-                <a:latin typeface="Inter" pitchFamily="34" charset="0"/>
-                <a:ea typeface="Inter" pitchFamily="34" charset="-122"/>
-                <a:cs typeface="Inter" pitchFamily="34" charset="-120"/>
-              </a:rPr>
-              <a:t>the escalation is the point</a:t>
-            </a:r>
-            <a:endParaRPr lang="en-US" sz="1600" dirty="0"/>
-          </a:p>
-        </p:txBody>
-      </p:sp>
-    </p:spTree>
-  </p:cSld>
-  <p:clrMapOvr>
-    <a:masterClrMapping/>
-  </p:clrMapOvr>
-</p:sld>
-</file>
-
-<file path=ppt/slides/slide19.xml><?xml version="1.0" encoding="utf-8"?>
 <p:sld xmlns:a="http://schemas.openxmlformats.org/drawingml/2006/main" xmlns:r="http://schemas.openxmlformats.org/officeDocument/2006/relationships" xmlns:p="http://schemas.openxmlformats.org/presentationml/2006/main">
   <p:cSld name="Slide 19">
     <p:bg>
@@ -8377,7 +7622,7 @@
                 <a:ea typeface="Inter" pitchFamily="34" charset="-122"/>
                 <a:cs typeface="Inter" pitchFamily="34" charset="-120"/>
               </a:rPr>
-              <a:t>19</a:t>
+              <a:t>18</a:t>
             </a:r>
             <a:endParaRPr lang="en-US" sz="800" dirty="0"/>
           </a:p>
@@ -8965,6 +8210,170 @@
               <a:t>you don't need a multi-agent platform — you need a CLAUDE.md and a folder of skills</a:t>
             </a:r>
             <a:endParaRPr lang="en-US" sz="1350" dirty="0"/>
+          </a:p>
+        </p:txBody>
+      </p:sp>
+    </p:spTree>
+  </p:cSld>
+  <p:clrMapOvr>
+    <a:masterClrMapping/>
+  </p:clrMapOvr>
+</p:sld>
+</file>
+
+<file path=ppt/slides/slide19.xml><?xml version="1.0" encoding="utf-8"?>
+<p:sld xmlns:a="http://schemas.openxmlformats.org/drawingml/2006/main" xmlns:r="http://schemas.openxmlformats.org/officeDocument/2006/relationships" xmlns:p="http://schemas.openxmlformats.org/presentationml/2006/main">
+  <p:cSld name="Slide 20">
+    <p:bg>
+      <p:bgPr>
+        <a:solidFill>
+          <a:srgbClr val="0F1729"/>
+        </a:solidFill>
+        <a:effectLst/>
+      </p:bgPr>
+    </p:bg>
+    <p:spTree>
+      <p:nvGrpSpPr>
+        <p:cNvPr id="1" name=""/>
+        <p:cNvGrpSpPr/>
+        <p:nvPr/>
+      </p:nvGrpSpPr>
+      <p:grpSpPr>
+        <a:xfrm>
+          <a:off x="0" y="0"/>
+          <a:ext cx="0" cy="0"/>
+          <a:chOff x="0" y="0"/>
+          <a:chExt cx="0" cy="0"/>
+        </a:xfrm>
+      </p:grpSpPr>
+      <p:sp>
+        <p:nvSpPr>
+          <p:cNvPr id="2" name="Text 0"/>
+          <p:cNvSpPr/>
+          <p:nvPr/>
+        </p:nvSpPr>
+        <p:spPr>
+          <a:xfrm>
+            <a:off x="457200" y="4796028"/>
+            <a:ext cx="4572000" cy="274320"/>
+          </a:xfrm>
+          <a:prstGeom prst="rect">
+            <a:avLst/>
+          </a:prstGeom>
+          <a:noFill/>
+          <a:ln/>
+        </p:spPr>
+        <p:txBody>
+          <a:bodyPr wrap="square" lIns="0" tIns="0" rIns="0" bIns="0" rtlCol="0" anchor="ctr"/>
+          <a:lstStyle/>
+          <a:p>
+            <a:pPr marL="0" indent="0">
+              <a:buNone/>
+            </a:pPr>
+            <a:r>
+              <a:rPr lang="en-US" sz="800" kern="0" spc="200" dirty="0">
+                <a:solidFill>
+                  <a:srgbClr val="64748B"/>
+                </a:solidFill>
+                <a:latin typeface="Inter" pitchFamily="34" charset="0"/>
+                <a:ea typeface="Inter" pitchFamily="34" charset="-122"/>
+                <a:cs typeface="Inter" pitchFamily="34" charset="-120"/>
+              </a:rPr>
+              <a:t>04 · where to start</a:t>
+            </a:r>
+            <a:endParaRPr lang="en-US" sz="800" dirty="0"/>
+          </a:p>
+        </p:txBody>
+      </p:sp>
+      <p:sp>
+        <p:nvSpPr>
+          <p:cNvPr id="3" name="Text 1"/>
+          <p:cNvSpPr/>
+          <p:nvPr/>
+        </p:nvSpPr>
+        <p:spPr>
+          <a:xfrm>
+            <a:off x="8229600" y="4796028"/>
+            <a:ext cx="457200" cy="274320"/>
+          </a:xfrm>
+          <a:prstGeom prst="rect">
+            <a:avLst/>
+          </a:prstGeom>
+          <a:noFill/>
+          <a:ln/>
+        </p:spPr>
+        <p:txBody>
+          <a:bodyPr wrap="square" lIns="0" tIns="0" rIns="0" bIns="0" rtlCol="0" anchor="ctr"/>
+          <a:lstStyle/>
+          <a:p>
+            <a:pPr marL="0" indent="0" algn="r">
+              <a:buNone/>
+            </a:pPr>
+            <a:r>
+              <a:rPr lang="en-US" sz="800" dirty="0">
+                <a:solidFill>
+                  <a:srgbClr val="64748B"/>
+                </a:solidFill>
+                <a:latin typeface="Inter" pitchFamily="34" charset="0"/>
+                <a:ea typeface="Inter" pitchFamily="34" charset="-122"/>
+              </a:rPr>
+              <a:t>19</a:t>
+            </a:r>
+            <a:endParaRPr lang="en-US" sz="800" dirty="0"/>
+          </a:p>
+        </p:txBody>
+      </p:sp>
+      <p:sp>
+        <p:nvSpPr>
+          <p:cNvPr id="4" name="Text 2"/>
+          <p:cNvSpPr/>
+          <p:nvPr/>
+        </p:nvSpPr>
+        <p:spPr>
+          <a:xfrm>
+            <a:off x="457200" y="1828800"/>
+            <a:ext cx="8229600" cy="1554480"/>
+          </a:xfrm>
+          <a:prstGeom prst="rect">
+            <a:avLst/>
+          </a:prstGeom>
+          <a:noFill/>
+          <a:ln/>
+        </p:spPr>
+        <p:txBody>
+          <a:bodyPr wrap="square" lIns="0" tIns="0" rIns="0" bIns="0" rtlCol="0" anchor="ctr"/>
+          <a:lstStyle/>
+          <a:p>
+            <a:pPr marL="0" indent="0">
+              <a:lnSpc>
+                <a:spcPct val="110000"/>
+              </a:lnSpc>
+              <a:buNone/>
+            </a:pPr>
+            <a:r>
+              <a:rPr lang="en-US" sz="4000" b="1" dirty="0">
+                <a:solidFill>
+                  <a:srgbClr val="F8FAFC"/>
+                </a:solidFill>
+                <a:latin typeface="Montserrat" pitchFamily="34" charset="0"/>
+                <a:ea typeface="Inter" pitchFamily="34" charset="-122"/>
+                <a:cs typeface="Inter" pitchFamily="34" charset="-120"/>
+              </a:rPr>
+              <a:t>the leap isn't intelligence
+</a:t>
+            </a:r>
+            <a:r>
+              <a:rPr lang="en-US" sz="4000" b="1" dirty="0">
+                <a:solidFill>
+                  <a:srgbClr val="3B82F6"/>
+                </a:solidFill>
+                <a:latin typeface="Montserrat" pitchFamily="34" charset="0"/>
+                <a:ea typeface="Inter" pitchFamily="34" charset="-122"/>
+                <a:cs typeface="Inter" pitchFamily="34" charset="-120"/>
+              </a:rPr>
+              <a:t>it's orchestration</a:t>
+            </a:r>
+            <a:endParaRPr lang="en-US" sz="4000" dirty="0"/>
           </a:p>
         </p:txBody>
       </p:sp>
@@ -9277,171 +8686,6 @@
 
 <file path=ppt/slides/slide20.xml><?xml version="1.0" encoding="utf-8"?>
 <p:sld xmlns:a="http://schemas.openxmlformats.org/drawingml/2006/main" xmlns:r="http://schemas.openxmlformats.org/officeDocument/2006/relationships" xmlns:p="http://schemas.openxmlformats.org/presentationml/2006/main">
-  <p:cSld name="Slide 20">
-    <p:bg>
-      <p:bgPr>
-        <a:solidFill>
-          <a:srgbClr val="0F1729"/>
-        </a:solidFill>
-        <a:effectLst/>
-      </p:bgPr>
-    </p:bg>
-    <p:spTree>
-      <p:nvGrpSpPr>
-        <p:cNvPr id="1" name=""/>
-        <p:cNvGrpSpPr/>
-        <p:nvPr/>
-      </p:nvGrpSpPr>
-      <p:grpSpPr>
-        <a:xfrm>
-          <a:off x="0" y="0"/>
-          <a:ext cx="0" cy="0"/>
-          <a:chOff x="0" y="0"/>
-          <a:chExt cx="0" cy="0"/>
-        </a:xfrm>
-      </p:grpSpPr>
-      <p:sp>
-        <p:nvSpPr>
-          <p:cNvPr id="2" name="Text 0"/>
-          <p:cNvSpPr/>
-          <p:nvPr/>
-        </p:nvSpPr>
-        <p:spPr>
-          <a:xfrm>
-            <a:off x="457200" y="4796028"/>
-            <a:ext cx="4572000" cy="274320"/>
-          </a:xfrm>
-          <a:prstGeom prst="rect">
-            <a:avLst/>
-          </a:prstGeom>
-          <a:noFill/>
-          <a:ln/>
-        </p:spPr>
-        <p:txBody>
-          <a:bodyPr wrap="square" lIns="0" tIns="0" rIns="0" bIns="0" rtlCol="0" anchor="ctr"/>
-          <a:lstStyle/>
-          <a:p>
-            <a:pPr marL="0" indent="0">
-              <a:buNone/>
-            </a:pPr>
-            <a:r>
-              <a:rPr lang="en-US" sz="800" kern="0" spc="200" dirty="0">
-                <a:solidFill>
-                  <a:srgbClr val="64748B"/>
-                </a:solidFill>
-                <a:latin typeface="Inter" pitchFamily="34" charset="0"/>
-                <a:ea typeface="Inter" pitchFamily="34" charset="-122"/>
-                <a:cs typeface="Inter" pitchFamily="34" charset="-120"/>
-              </a:rPr>
-              <a:t>04 · where to start</a:t>
-            </a:r>
-            <a:endParaRPr lang="en-US" sz="800" dirty="0"/>
-          </a:p>
-        </p:txBody>
-      </p:sp>
-      <p:sp>
-        <p:nvSpPr>
-          <p:cNvPr id="3" name="Text 1"/>
-          <p:cNvSpPr/>
-          <p:nvPr/>
-        </p:nvSpPr>
-        <p:spPr>
-          <a:xfrm>
-            <a:off x="8229600" y="4796028"/>
-            <a:ext cx="457200" cy="274320"/>
-          </a:xfrm>
-          <a:prstGeom prst="rect">
-            <a:avLst/>
-          </a:prstGeom>
-          <a:noFill/>
-          <a:ln/>
-        </p:spPr>
-        <p:txBody>
-          <a:bodyPr wrap="square" lIns="0" tIns="0" rIns="0" bIns="0" rtlCol="0" anchor="ctr"/>
-          <a:lstStyle/>
-          <a:p>
-            <a:pPr marL="0" indent="0" algn="r">
-              <a:buNone/>
-            </a:pPr>
-            <a:r>
-              <a:rPr lang="en-US" sz="800" dirty="0">
-                <a:solidFill>
-                  <a:srgbClr val="64748B"/>
-                </a:solidFill>
-                <a:latin typeface="Inter" pitchFamily="34" charset="0"/>
-                <a:ea typeface="Inter" pitchFamily="34" charset="-122"/>
-                <a:cs typeface="Inter" pitchFamily="34" charset="-120"/>
-              </a:rPr>
-              <a:t>20</a:t>
-            </a:r>
-            <a:endParaRPr lang="en-US" sz="800" dirty="0"/>
-          </a:p>
-        </p:txBody>
-      </p:sp>
-      <p:sp>
-        <p:nvSpPr>
-          <p:cNvPr id="4" name="Text 2"/>
-          <p:cNvSpPr/>
-          <p:nvPr/>
-        </p:nvSpPr>
-        <p:spPr>
-          <a:xfrm>
-            <a:off x="457200" y="1828800"/>
-            <a:ext cx="8229600" cy="1554480"/>
-          </a:xfrm>
-          <a:prstGeom prst="rect">
-            <a:avLst/>
-          </a:prstGeom>
-          <a:noFill/>
-          <a:ln/>
-        </p:spPr>
-        <p:txBody>
-          <a:bodyPr wrap="square" lIns="0" tIns="0" rIns="0" bIns="0" rtlCol="0" anchor="ctr"/>
-          <a:lstStyle/>
-          <a:p>
-            <a:pPr marL="0" indent="0">
-              <a:lnSpc>
-                <a:spcPct val="110000"/>
-              </a:lnSpc>
-              <a:buNone/>
-            </a:pPr>
-            <a:r>
-              <a:rPr lang="en-US" sz="4000" b="1" dirty="0">
-                <a:solidFill>
-                  <a:srgbClr val="F8FAFC"/>
-                </a:solidFill>
-                <a:latin typeface="Montserrat" pitchFamily="34" charset="0"/>
-                <a:ea typeface="Inter" pitchFamily="34" charset="-122"/>
-                <a:cs typeface="Inter" pitchFamily="34" charset="-120"/>
-              </a:rPr>
-              <a:t>the leap isn't intelligence
-</a:t>
-            </a:r>
-            <a:r>
-              <a:rPr lang="en-US" sz="4000" b="1" dirty="0">
-                <a:solidFill>
-                  <a:srgbClr val="3B82F6"/>
-                </a:solidFill>
-                <a:latin typeface="Montserrat" pitchFamily="34" charset="0"/>
-                <a:ea typeface="Inter" pitchFamily="34" charset="-122"/>
-                <a:cs typeface="Inter" pitchFamily="34" charset="-120"/>
-              </a:rPr>
-              <a:t>it's orchestration</a:t>
-            </a:r>
-            <a:endParaRPr lang="en-US" sz="4000" dirty="0"/>
-          </a:p>
-        </p:txBody>
-      </p:sp>
-    </p:spTree>
-  </p:cSld>
-  <p:clrMapOvr>
-    <a:masterClrMapping/>
-  </p:clrMapOvr>
-</p:sld>
-</file>
-
-<file path=ppt/slides/slide21.xml><?xml version="1.0" encoding="utf-8"?>
-<p:sld xmlns:a="http://schemas.openxmlformats.org/drawingml/2006/main" xmlns:r="http://schemas.openxmlformats.org/officeDocument/2006/relationships" xmlns:p="http://schemas.openxmlformats.org/presentationml/2006/main">
   <p:cSld name="Slide 21">
     <p:bg>
       <p:bgPr>
@@ -9512,7 +8756,7 @@
         </p:nvSpPr>
         <p:spPr>
           <a:xfrm>
-            <a:off x="8229600" y="4796028"/>
+            <a:off x="8233954" y="4796028"/>
             <a:ext cx="457200" cy="274320"/>
           </a:xfrm>
           <a:prstGeom prst="rect">
@@ -9537,7 +8781,7 @@
                 <a:ea typeface="Inter" pitchFamily="34" charset="-122"/>
                 <a:cs typeface="Inter" pitchFamily="34" charset="-120"/>
               </a:rPr>
-              <a:t>21</a:t>
+              <a:t>20</a:t>
             </a:r>
             <a:endParaRPr lang="en-US" sz="800" dirty="0"/>
           </a:p>
@@ -9824,235 +9068,7 @@
 </p:sld>
 </file>
 
-<file path=ppt/slides/slide22.xml><?xml version="1.0" encoding="utf-8"?>
-<p:sld xmlns:a="http://schemas.openxmlformats.org/drawingml/2006/main" xmlns:r="http://schemas.openxmlformats.org/officeDocument/2006/relationships" xmlns:p="http://schemas.openxmlformats.org/presentationml/2006/main">
-  <p:cSld name="Slide 22">
-    <p:bg>
-      <p:bgPr>
-        <a:solidFill>
-          <a:srgbClr val="0F1729"/>
-        </a:solidFill>
-        <a:effectLst/>
-      </p:bgPr>
-    </p:bg>
-    <p:spTree>
-      <p:nvGrpSpPr>
-        <p:cNvPr id="1" name=""/>
-        <p:cNvGrpSpPr/>
-        <p:nvPr/>
-      </p:nvGrpSpPr>
-      <p:grpSpPr>
-        <a:xfrm>
-          <a:off x="0" y="0"/>
-          <a:ext cx="0" cy="0"/>
-          <a:chOff x="0" y="0"/>
-          <a:chExt cx="0" cy="0"/>
-        </a:xfrm>
-      </p:grpSpPr>
-      <p:sp>
-        <p:nvSpPr>
-          <p:cNvPr id="2" name="Text 0"/>
-          <p:cNvSpPr/>
-          <p:nvPr/>
-        </p:nvSpPr>
-        <p:spPr>
-          <a:xfrm>
-            <a:off x="457200" y="4796028"/>
-            <a:ext cx="4572000" cy="274320"/>
-          </a:xfrm>
-          <a:prstGeom prst="rect">
-            <a:avLst/>
-          </a:prstGeom>
-          <a:noFill/>
-          <a:ln/>
-        </p:spPr>
-        <p:txBody>
-          <a:bodyPr wrap="square" lIns="0" tIns="0" rIns="0" bIns="0" rtlCol="0" anchor="ctr"/>
-          <a:lstStyle/>
-          <a:p>
-            <a:pPr marL="0" indent="0">
-              <a:buNone/>
-            </a:pPr>
-            <a:r>
-              <a:rPr lang="en-US" sz="800" kern="0" spc="200" dirty="0">
-                <a:solidFill>
-                  <a:srgbClr val="64748B"/>
-                </a:solidFill>
-                <a:latin typeface="Inter" pitchFamily="34" charset="0"/>
-                <a:ea typeface="Inter" pitchFamily="34" charset="-122"/>
-                <a:cs typeface="Inter" pitchFamily="34" charset="-120"/>
-              </a:rPr>
-              <a:t>06 · backup</a:t>
-            </a:r>
-            <a:endParaRPr lang="en-US" sz="800" dirty="0"/>
-          </a:p>
-        </p:txBody>
-      </p:sp>
-      <p:sp>
-        <p:nvSpPr>
-          <p:cNvPr id="3" name="Text 1"/>
-          <p:cNvSpPr/>
-          <p:nvPr/>
-        </p:nvSpPr>
-        <p:spPr>
-          <a:xfrm>
-            <a:off x="8229600" y="4796028"/>
-            <a:ext cx="457200" cy="274320"/>
-          </a:xfrm>
-          <a:prstGeom prst="rect">
-            <a:avLst/>
-          </a:prstGeom>
-          <a:noFill/>
-          <a:ln/>
-        </p:spPr>
-        <p:txBody>
-          <a:bodyPr wrap="square" lIns="0" tIns="0" rIns="0" bIns="0" rtlCol="0" anchor="ctr"/>
-          <a:lstStyle/>
-          <a:p>
-            <a:pPr marL="0" indent="0" algn="r">
-              <a:buNone/>
-            </a:pPr>
-            <a:r>
-              <a:rPr lang="en-US" sz="800" dirty="0">
-                <a:solidFill>
-                  <a:srgbClr val="64748B"/>
-                </a:solidFill>
-                <a:latin typeface="Inter" pitchFamily="34" charset="0"/>
-                <a:ea typeface="Inter" pitchFamily="34" charset="-122"/>
-                <a:cs typeface="Inter" pitchFamily="34" charset="-120"/>
-              </a:rPr>
-              <a:t>22</a:t>
-            </a:r>
-            <a:endParaRPr lang="en-US" sz="800" dirty="0"/>
-          </a:p>
-        </p:txBody>
-      </p:sp>
-      <p:sp>
-        <p:nvSpPr>
-          <p:cNvPr id="4" name="Text 2"/>
-          <p:cNvSpPr/>
-          <p:nvPr/>
-        </p:nvSpPr>
-        <p:spPr>
-          <a:xfrm>
-            <a:off x="457200" y="1005840"/>
-            <a:ext cx="8229600" cy="320040"/>
-          </a:xfrm>
-          <a:prstGeom prst="rect">
-            <a:avLst/>
-          </a:prstGeom>
-          <a:noFill/>
-          <a:ln/>
-        </p:spPr>
-        <p:txBody>
-          <a:bodyPr wrap="square" lIns="0" tIns="0" rIns="0" bIns="0" rtlCol="0" anchor="ctr"/>
-          <a:lstStyle/>
-          <a:p>
-            <a:pPr marL="0" indent="0">
-              <a:buNone/>
-            </a:pPr>
-            <a:r>
-              <a:rPr lang="en-US" sz="1100" b="1" kern="0" spc="300" dirty="0">
-                <a:solidFill>
-                  <a:srgbClr val="3B82F6"/>
-                </a:solidFill>
-                <a:latin typeface="Inter" pitchFamily="34" charset="0"/>
-                <a:ea typeface="Inter" pitchFamily="34" charset="-122"/>
-                <a:cs typeface="Inter" pitchFamily="34" charset="-120"/>
-              </a:rPr>
-              <a:t>06 · BACKUP · ANTICIPATED QUESTIONS</a:t>
-            </a:r>
-            <a:endParaRPr lang="en-US" sz="1100" dirty="0"/>
-          </a:p>
-        </p:txBody>
-      </p:sp>
-      <p:sp>
-        <p:nvSpPr>
-          <p:cNvPr id="5" name="Text 3"/>
-          <p:cNvSpPr/>
-          <p:nvPr/>
-        </p:nvSpPr>
-        <p:spPr>
-          <a:xfrm>
-            <a:off x="457200" y="1737360"/>
-            <a:ext cx="8229600" cy="822960"/>
-          </a:xfrm>
-          <a:prstGeom prst="rect">
-            <a:avLst/>
-          </a:prstGeom>
-          <a:noFill/>
-          <a:ln/>
-        </p:spPr>
-        <p:txBody>
-          <a:bodyPr wrap="square" lIns="0" tIns="0" rIns="0" bIns="0" rtlCol="0" anchor="ctr"/>
-          <a:lstStyle/>
-          <a:p>
-            <a:pPr marL="0" indent="0">
-              <a:buNone/>
-            </a:pPr>
-            <a:r>
-              <a:rPr lang="en-US" sz="3600" b="1" dirty="0">
-                <a:solidFill>
-                  <a:srgbClr val="F8FAFC"/>
-                </a:solidFill>
-                <a:latin typeface="Montserrat" pitchFamily="34" charset="0"/>
-                <a:ea typeface="Inter" pitchFamily="34" charset="-122"/>
-                <a:cs typeface="Inter" pitchFamily="34" charset="-120"/>
-              </a:rPr>
-              <a:t>anticipated questions</a:t>
-            </a:r>
-            <a:endParaRPr lang="en-US" sz="3600" dirty="0"/>
-          </a:p>
-        </p:txBody>
-      </p:sp>
-      <p:sp>
-        <p:nvSpPr>
-          <p:cNvPr id="6" name="Text 4"/>
-          <p:cNvSpPr/>
-          <p:nvPr/>
-        </p:nvSpPr>
-        <p:spPr>
-          <a:xfrm>
-            <a:off x="457200" y="2651760"/>
-            <a:ext cx="8229600" cy="365760"/>
-          </a:xfrm>
-          <a:prstGeom prst="rect">
-            <a:avLst/>
-          </a:prstGeom>
-          <a:noFill/>
-          <a:ln/>
-        </p:spPr>
-        <p:txBody>
-          <a:bodyPr wrap="square" lIns="0" tIns="0" rIns="0" bIns="0" rtlCol="0" anchor="ctr"/>
-          <a:lstStyle/>
-          <a:p>
-            <a:pPr marL="0" indent="0">
-              <a:buNone/>
-            </a:pPr>
-            <a:r>
-              <a:rPr lang="en-US" sz="1400" i="1" dirty="0">
-                <a:solidFill>
-                  <a:srgbClr val="94A3B8"/>
-                </a:solidFill>
-                <a:latin typeface="Inter" pitchFamily="34" charset="0"/>
-                <a:ea typeface="Inter" pitchFamily="34" charset="-122"/>
-                <a:cs typeface="Inter" pitchFamily="34" charset="-120"/>
-              </a:rPr>
-              <a:t>jump here during Q&amp;A</a:t>
-            </a:r>
-            <a:endParaRPr lang="en-US" sz="1400" dirty="0"/>
-          </a:p>
-        </p:txBody>
-      </p:sp>
-    </p:spTree>
-  </p:cSld>
-  <p:clrMapOvr>
-    <a:masterClrMapping/>
-  </p:clrMapOvr>
-</p:sld>
-</file>
-
-<file path=ppt/slides/slide23.xml><?xml version="1.0" encoding="utf-8"?>
+<file path=ppt/slides/slide21.xml><?xml version="1.0" encoding="utf-8"?>
 <p:sld xmlns:a="http://schemas.openxmlformats.org/drawingml/2006/main" xmlns:r="http://schemas.openxmlformats.org/officeDocument/2006/relationships" xmlns:p="http://schemas.openxmlformats.org/presentationml/2006/main">
   <p:cSld name="Slide 23">
     <p:bg>
@@ -10149,7 +9165,7 @@
                 <a:ea typeface="Inter" pitchFamily="34" charset="-122"/>
                 <a:cs typeface="Inter" pitchFamily="34" charset="-120"/>
               </a:rPr>
-              <a:t>23</a:t>
+              <a:t>21</a:t>
             </a:r>
             <a:endParaRPr lang="en-US" sz="800" dirty="0"/>
           </a:p>
@@ -10365,7 +9381,7 @@
 </p:sld>
 </file>
 
-<file path=ppt/slides/slide24.xml><?xml version="1.0" encoding="utf-8"?>
+<file path=ppt/slides/slide22.xml><?xml version="1.0" encoding="utf-8"?>
 <p:sld xmlns:a="http://schemas.openxmlformats.org/drawingml/2006/main" xmlns:r="http://schemas.openxmlformats.org/officeDocument/2006/relationships" xmlns:p="http://schemas.openxmlformats.org/presentationml/2006/main">
   <p:cSld name="Slide 24">
     <p:bg>
@@ -10462,7 +9478,7 @@
                 <a:ea typeface="Inter" pitchFamily="34" charset="-122"/>
                 <a:cs typeface="Inter" pitchFamily="34" charset="-120"/>
               </a:rPr>
-              <a:t>24</a:t>
+              <a:t>22</a:t>
             </a:r>
             <a:endParaRPr lang="en-US" sz="800" dirty="0"/>
           </a:p>
@@ -10660,7 +9676,7 @@
         </p:nvSpPr>
         <p:spPr>
           <a:xfrm>
-            <a:off x="640080" y="4069080"/>
+            <a:off x="640080" y="4114800"/>
             <a:ext cx="7863840" cy="365760"/>
           </a:xfrm>
           <a:prstGeom prst="rect">
@@ -10699,7 +9715,7 @@
 </p:sld>
 </file>
 
-<file path=ppt/slides/slide25.xml><?xml version="1.0" encoding="utf-8"?>
+<file path=ppt/slides/slide23.xml><?xml version="1.0" encoding="utf-8"?>
 <p:sld xmlns:a="http://schemas.openxmlformats.org/drawingml/2006/main" xmlns:r="http://schemas.openxmlformats.org/officeDocument/2006/relationships" xmlns:p="http://schemas.openxmlformats.org/presentationml/2006/main">
   <p:cSld name="Slide 25">
     <p:bg>
@@ -10796,7 +9812,7 @@
                 <a:ea typeface="Inter" pitchFamily="34" charset="-122"/>
                 <a:cs typeface="Inter" pitchFamily="34" charset="-120"/>
               </a:rPr>
-              <a:t>25</a:t>
+              <a:t>23</a:t>
             </a:r>
             <a:endParaRPr lang="en-US" sz="800" dirty="0"/>
           </a:p>
@@ -11033,7 +10049,7 @@
 </p:sld>
 </file>
 
-<file path=ppt/slides/slide26.xml><?xml version="1.0" encoding="utf-8"?>
+<file path=ppt/slides/slide24.xml><?xml version="1.0" encoding="utf-8"?>
 <p:sld xmlns:a="http://schemas.openxmlformats.org/drawingml/2006/main" xmlns:r="http://schemas.openxmlformats.org/officeDocument/2006/relationships" xmlns:p="http://schemas.openxmlformats.org/presentationml/2006/main">
   <p:cSld name="Slide 26">
     <p:bg>
@@ -11130,7 +10146,7 @@
                 <a:ea typeface="Inter" pitchFamily="34" charset="-122"/>
                 <a:cs typeface="Inter" pitchFamily="34" charset="-120"/>
               </a:rPr>
-              <a:t>26</a:t>
+              <a:t>24</a:t>
             </a:r>
             <a:endParaRPr lang="en-US" sz="800" dirty="0"/>
           </a:p>

--- a/orchestrer-intelligence-gatherly.pptx
+++ b/orchestrer-intelligence-gatherly.pptx
@@ -827,8 +827,8 @@
           <a:lstStyle/>
           <a:p>
             <a:r>
-              <a:rPr lang="en-US" dirty="0"/>
-              <a:t>Moment 1 : une seule commande, l'orchestrateur fait le reste. Narrer les invocations à voix haute. DÉBRIEF À L'ORAL (la slide récap a été coupée, format 20 min) : 1 orchestrateur, 7 spécialistes invoqués ; critères d'acceptation définis au départ, vérifiés à la fin ; 1 race condition attrapée par /review-pr avant commit ; PR ouverte, CI verte, ~8 minutes. Punchline : personne n'a choisi les spécialistes — le routage est dans le système.</a:t>
+              <a:rPr lang="fr-FR" dirty="0"/>
+              <a:t>Moment 1 — « l'équipe s'assemble ». Une seule commande : /implement. L'orchestrateur planifie, explore, implémente, puis FAIT APPEL À TROIS SPÉCIALISTES EN PARALLÈLE — code-reviewer, security-auditor, test-writer — chacun dans son propre contexte. Narrer les invocations à voix haute pendant qu'elles apparaissent à l'écran. DÉBRIEF À L'ORAL : critères d'acceptation définis au départ et vérifiés à la fin ; les trois spécialistes reviennent verts (relecture LGTM, audit CLEAN, tests ≥ 80 % sur le nouveau code) ; PR ouverte, CI verte, ~8 minutes. Punchline : « Je n'ai jamais dit quel spécialiste utiliser — l'orchestrateur a assemblé l'équipe. Ce n'est pas de l'autocomplétion, c'est une équipe. »</a:t>
             </a:r>
           </a:p>
         </p:txBody>
@@ -914,8 +914,8 @@
           <a:lstStyle/>
           <a:p>
             <a:r>
-              <a:rPr lang="en-US" dirty="0"/>
-              <a:t>Moment 2 : montrer l'échec volontaire. Transparence : annoncer que l'erreur est pré-injectée — ça renforce la crédibilité. DÉBRIEF À L'ORAL : /audit-security (et le test d'isolation) a signalé la fuite de confidentialité en quelques secondes ; la boucle de fix a restauré le contrôle de propriété manquant ; re-audit propre, commit passé — zéro humain impliqué. Punchline : le système a attrapé sa propre erreur avant qu'un humain voie le code. Si on demande « et si le fix échoue 3 fois ? » → moment 3 le montre.</a:t>
+              <a:rPr lang="fr-FR" dirty="0"/>
+              <a:t>Moment 2 — « l'équipe s'attrape elle-même ». Montrer l'échec volontaire ; annoncer que la faille est pré-injectée (un invité pouvait lire la liste d'invités d'un autre organisateur) — la transparence renforce la crédibilité. À l'écran : le subagent security-auditor (lecture seule, contexte isolé) signale la violation S2 (isolation des locataires) avec preuve fichier:ligne en quelques secondes → la barrière BLOQUE le commit → la boucle de fix interne rétablit le contrôle de propriété manquant → re-audit propre. Punchline : « L'auditeur est un spécialiste à part : outils en lecture seule, son propre contexte. Il ne peut pas modifier votre code, et on ne peut pas le convaincre d'ignorer une faille. Il a attrapé la fuite avant qu'un humain voie le code. Zéro humain. » Si on demande « et si le fix échoue 3 fois ? » → c'est exactement le moment 3.</a:t>
             </a:r>
           </a:p>
         </p:txBody>
@@ -1001,8 +1001,8 @@
           <a:lstStyle/>
           <a:p>
             <a:r>
-              <a:rPr lang="en-US" dirty="0"/>
-              <a:t>Moment 3 : la nuit en timelapse. C'est ici que « agent à la demande » prend tout son sens : le système s'est réveillé pour chaque écart de préparation, a travaillé, s'est arrêté. Enchaîner directement sur la slide résultats (7 PRs + 1 escalade).</a:t>
+              <a:rPr lang="fr-FR" dirty="0"/>
+              <a:t>Moment 3 — « l'équipe travaille pendant que vous dormez ». Autonomie complète, et c'est RÉEL sur ce dépôt : /work-issues tourne en headless, planifié, la nuit. Montrer le run de la nuit dernière en timelapse, puis la liste des PR sur GitHub. Chaque écart est passé dans la boucle complète AVEC l'équipe de spécialistes → 7 PR ouvertes, 1 escalade marquée « needs-human » avec trace complète après 3 tentatives. Punchline : « Huit écarts, huit heures, sans supervision. Sept corrigés et mis en PR. Un qu'il n'a pas su résoudre — alors il s'est arrêté et a tagué un humain. L'escalade, c'est l'essentiel : un système qui sait s'arrêter est le seul qu'on peut déployer. » (Backup : avoir le timelapse enregistré — impossible de lancer un run de 8 h en direct.)</a:t>
             </a:r>
           </a:p>
         </p:txBody>
@@ -6812,261 +6812,8 @@
 </p:sld>
 </file>
 
-<file path=ppt/slides/slide15.xml><?xml version="1.0" encoding="utf-8"?>
-<p:sld xmlns:a="http://schemas.openxmlformats.org/drawingml/2006/main" xmlns:r="http://schemas.openxmlformats.org/officeDocument/2006/relationships" xmlns:p="http://schemas.openxmlformats.org/presentationml/2006/main">
-  <p:cSld name="Slide 15">
-    <p:bg>
-      <p:bgPr>
-        <a:solidFill>
-          <a:srgbClr val="0F1729"/>
-        </a:solidFill>
-        <a:effectLst/>
-      </p:bgPr>
-    </p:bg>
-    <p:spTree>
-      <p:nvGrpSpPr>
-        <p:cNvPr id="1" name=""/>
-        <p:cNvGrpSpPr/>
-        <p:nvPr/>
-      </p:nvGrpSpPr>
-      <p:grpSpPr>
-        <a:xfrm>
-          <a:off x="0" y="0"/>
-          <a:ext cx="0" cy="0"/>
-          <a:chOff x="0" y="0"/>
-          <a:chExt cx="0" cy="0"/>
-        </a:xfrm>
-      </p:grpSpPr>
-      <p:sp>
-        <p:nvSpPr>
-          <p:cNvPr id="2" name="Text 0"/>
-          <p:cNvSpPr/>
-          <p:nvPr/>
-        </p:nvSpPr>
-        <p:spPr>
-          <a:xfrm>
-            <a:off x="457200" y="4796028"/>
-            <a:ext cx="4572000" cy="274320"/>
-          </a:xfrm>
-          <a:prstGeom prst="rect">
-            <a:avLst/>
-          </a:prstGeom>
-          <a:noFill/>
-          <a:ln/>
-        </p:spPr>
-        <p:txBody>
-          <a:bodyPr wrap="square" lIns="0" tIns="0" rIns="0" bIns="0" rtlCol="0" anchor="ctr"/>
-          <a:lstStyle/>
-          <a:p>
-            <a:pPr marL="0" indent="0">
-              <a:buNone/>
-            </a:pPr>
-            <a:r>
-              <a:rPr lang="en-US" sz="800" kern="0" spc="200" dirty="0">
-                <a:solidFill>
-                  <a:srgbClr val="64748B"/>
-                </a:solidFill>
-                <a:latin typeface="Inter" pitchFamily="34" charset="0"/>
-                <a:ea typeface="Inter" pitchFamily="34" charset="-122"/>
-                <a:cs typeface="Inter" pitchFamily="34" charset="-120"/>
-              </a:rPr>
-              <a:t>03 · demo · moment 1</a:t>
-            </a:r>
-            <a:endParaRPr lang="en-US" sz="800" dirty="0"/>
-          </a:p>
-        </p:txBody>
-      </p:sp>
-      <p:sp>
-        <p:nvSpPr>
-          <p:cNvPr id="3" name="Text 1"/>
-          <p:cNvSpPr/>
-          <p:nvPr/>
-        </p:nvSpPr>
-        <p:spPr>
-          <a:xfrm>
-            <a:off x="8229600" y="4796028"/>
-            <a:ext cx="457200" cy="274320"/>
-          </a:xfrm>
-          <a:prstGeom prst="rect">
-            <a:avLst/>
-          </a:prstGeom>
-          <a:noFill/>
-          <a:ln/>
-        </p:spPr>
-        <p:txBody>
-          <a:bodyPr wrap="square" lIns="0" tIns="0" rIns="0" bIns="0" rtlCol="0" anchor="ctr"/>
-          <a:lstStyle/>
-          <a:p>
-            <a:pPr marL="0" indent="0" algn="r">
-              <a:buNone/>
-            </a:pPr>
-            <a:r>
-              <a:rPr lang="en-US" sz="800" dirty="0">
-                <a:solidFill>
-                  <a:srgbClr val="64748B"/>
-                </a:solidFill>
-                <a:latin typeface="Inter" pitchFamily="34" charset="0"/>
-                <a:ea typeface="Inter" pitchFamily="34" charset="-122"/>
-                <a:cs typeface="Inter" pitchFamily="34" charset="-120"/>
-              </a:rPr>
-              <a:t>15</a:t>
-            </a:r>
-            <a:endParaRPr lang="en-US" sz="800" dirty="0"/>
-          </a:p>
-        </p:txBody>
-      </p:sp>
-      <p:sp>
-        <p:nvSpPr>
-          <p:cNvPr id="4" name="Text 2"/>
-          <p:cNvSpPr/>
-          <p:nvPr/>
-        </p:nvSpPr>
-        <p:spPr>
-          <a:xfrm>
-            <a:off x="457200" y="384048"/>
-            <a:ext cx="8229600" cy="274320"/>
-          </a:xfrm>
-          <a:prstGeom prst="rect">
-            <a:avLst/>
-          </a:prstGeom>
-          <a:noFill/>
-          <a:ln/>
-        </p:spPr>
-        <p:txBody>
-          <a:bodyPr wrap="square" lIns="0" tIns="0" rIns="0" bIns="0" rtlCol="0" anchor="ctr"/>
-          <a:lstStyle/>
-          <a:p>
-            <a:pPr marL="0" indent="0">
-              <a:buNone/>
-            </a:pPr>
-            <a:r>
-              <a:rPr lang="en-US" sz="1000" b="1" kern="0" spc="300" dirty="0">
-                <a:solidFill>
-                  <a:srgbClr val="FBBF24"/>
-                </a:solidFill>
-                <a:latin typeface="Inter" pitchFamily="34" charset="0"/>
-                <a:ea typeface="Inter" pitchFamily="34" charset="-122"/>
-                <a:cs typeface="Inter" pitchFamily="34" charset="-120"/>
-              </a:rPr>
-              <a:t>MOMENT 1 OF 3</a:t>
-            </a:r>
-            <a:endParaRPr lang="en-US" sz="1000" dirty="0"/>
-          </a:p>
-        </p:txBody>
-      </p:sp>
-      <p:sp>
-        <p:nvSpPr>
-          <p:cNvPr id="5" name="Text 3"/>
-          <p:cNvSpPr/>
-          <p:nvPr/>
-        </p:nvSpPr>
-        <p:spPr>
-          <a:xfrm>
-            <a:off x="457200" y="1371600"/>
-            <a:ext cx="8229600" cy="731520"/>
-          </a:xfrm>
-          <a:prstGeom prst="rect">
-            <a:avLst/>
-          </a:prstGeom>
-          <a:noFill/>
-          <a:ln/>
-        </p:spPr>
-        <p:txBody>
-          <a:bodyPr wrap="square" lIns="0" tIns="0" rIns="0" bIns="0" rtlCol="0" anchor="ctr"/>
-          <a:lstStyle/>
-          <a:p>
-            <a:pPr marL="0" indent="0">
-              <a:buNone/>
-            </a:pPr>
-            <a:r>
-              <a:rPr lang="en-US" sz="3600" b="1" dirty="0">
-                <a:solidFill>
-                  <a:srgbClr val="F8FAFC"/>
-                </a:solidFill>
-                <a:latin typeface="Montserrat" pitchFamily="34" charset="0"/>
-                <a:ea typeface="Inter" pitchFamily="34" charset="-122"/>
-                <a:cs typeface="Inter" pitchFamily="34" charset="-120"/>
-              </a:rPr>
-              <a:t>total orchestration</a:t>
-            </a:r>
-            <a:endParaRPr lang="en-US" sz="3600" dirty="0"/>
-          </a:p>
-        </p:txBody>
-      </p:sp>
-      <p:sp>
-        <p:nvSpPr>
-          <p:cNvPr id="6" name="Shape 4"/>
-          <p:cNvSpPr/>
-          <p:nvPr/>
-        </p:nvSpPr>
-        <p:spPr>
-          <a:xfrm>
-            <a:off x="457200" y="2331720"/>
-            <a:ext cx="8229600" cy="777240"/>
-          </a:xfrm>
-          <a:prstGeom prst="roundRect">
-            <a:avLst>
-              <a:gd name="adj" fmla="val 7059"/>
-            </a:avLst>
-          </a:prstGeom>
-          <a:solidFill>
-            <a:srgbClr val="0A101F"/>
-          </a:solidFill>
-          <a:ln/>
-        </p:spPr>
-        <p:txBody>
-          <a:bodyPr/>
-          <a:lstStyle/>
-          <a:p>
-            <a:endParaRPr/>
-          </a:p>
-        </p:txBody>
-      </p:sp>
-      <p:sp>
-        <p:nvSpPr>
-          <p:cNvPr id="7" name="Text 5"/>
-          <p:cNvSpPr/>
-          <p:nvPr/>
-        </p:nvSpPr>
-        <p:spPr>
-          <a:xfrm>
-            <a:off x="640080" y="2331720"/>
-            <a:ext cx="7863840" cy="777240"/>
-          </a:xfrm>
-          <a:prstGeom prst="rect">
-            <a:avLst/>
-          </a:prstGeom>
-          <a:noFill/>
-          <a:ln/>
-        </p:spPr>
-        <p:txBody>
-          <a:bodyPr wrap="square" lIns="0" tIns="0" rIns="0" bIns="0" rtlCol="0" anchor="ctr"/>
-          <a:lstStyle/>
-          <a:p>
-            <a:pPr marL="0" indent="0">
-              <a:buNone/>
-            </a:pPr>
-            <a:r>
-              <a:rPr lang="en-US" sz="1200" dirty="0">
-                <a:solidFill>
-                  <a:srgbClr val="34D399"/>
-                </a:solidFill>
-                <a:latin typeface="Menlo" pitchFamily="34" charset="0"/>
-                <a:ea typeface="Menlo" pitchFamily="34" charset="-122"/>
-                <a:cs typeface="Menlo" pitchFamily="34" charset="-120"/>
-              </a:rPr>
-              <a:t>$ /implement  auto-promote the next waitlisted guest when a confirmed guest cancels</a:t>
-            </a:r>
-            <a:endParaRPr lang="en-US" sz="1200" dirty="0"/>
-          </a:p>
-        </p:txBody>
-      </p:sp>
-    </p:spTree>
-  </p:cSld>
-  <p:clrMapOvr>
-    <a:masterClrMapping/>
-  </p:clrMapOvr>
-</p:sld>
+<file path=ppt/slides/slide15.xml><?xml version="1.0" encoding="UTF-8" standalone="yes"?>
+<p:sld xmlns:a="http://schemas.openxmlformats.org/drawingml/2006/main" xmlns:r="http://schemas.openxmlformats.org/officeDocument/2006/relationships" xmlns:p="http://schemas.openxmlformats.org/presentationml/2006/main"><p:cSld name="Slide 15"><p:bg><p:bgPr><a:solidFill><a:srgbClr val="0F1729"/></a:solidFill><a:effectLst/></p:bgPr></p:bg><p:spTree><p:nvGrpSpPr><p:cNvPr id="1" name=""/><p:cNvGrpSpPr/><p:nvPr/></p:nvGrpSpPr><p:grpSpPr><a:xfrm><a:off x="0" y="0"/><a:ext cx="0" cy="0"/><a:chOff x="0" y="0"/><a:chExt cx="0" cy="0"/></a:xfrm></p:grpSpPr><p:sp><p:nvSpPr><p:cNvPr id="2" name="Text 0"/><p:cNvSpPr/><p:nvPr/></p:nvSpPr><p:spPr><a:xfrm><a:off x="457200" y="4796028"/><a:ext cx="4572000" cy="274320"/></a:xfrm><a:prstGeom prst="rect"><a:avLst/></a:prstGeom><a:noFill/><a:ln/></p:spPr><p:txBody><a:bodyPr wrap="square" lIns="0" tIns="0" rIns="0" bIns="0" rtlCol="0" anchor="ctr"/><a:lstStyle/><a:p><a:pPr marL="0" indent="0"><a:buNone/></a:pPr><a:r><a:rPr lang="en-US" sz="800" kern="0" spc="200" dirty="0"><a:solidFill><a:srgbClr val="64748B"/></a:solidFill><a:latin typeface="Inter" pitchFamily="34" charset="0"/><a:ea typeface="Inter" pitchFamily="34" charset="-122"/><a:cs typeface="Inter" pitchFamily="34" charset="-120"/></a:rPr><a:t>03 · demo · moment 1</a:t></a:r><a:endParaRPr lang="en-US" sz="800" dirty="0"/></a:p></p:txBody></p:sp><p:sp><p:nvSpPr><p:cNvPr id="3" name="Text 1"/><p:cNvSpPr/><p:nvPr/></p:nvSpPr><p:spPr><a:xfrm><a:off x="8229600" y="4796028"/><a:ext cx="457200" cy="274320"/></a:xfrm><a:prstGeom prst="rect"><a:avLst/></a:prstGeom><a:noFill/><a:ln/></p:spPr><p:txBody><a:bodyPr wrap="square" lIns="0" tIns="0" rIns="0" bIns="0" rtlCol="0" anchor="ctr"/><a:lstStyle/><a:p><a:pPr marL="0" indent="0" algn="r"><a:buNone/></a:pPr><a:r><a:rPr lang="en-US" sz="800" dirty="0"><a:solidFill><a:srgbClr val="64748B"/></a:solidFill><a:latin typeface="Inter" pitchFamily="34" charset="0"/><a:ea typeface="Inter" pitchFamily="34" charset="-122"/><a:cs typeface="Inter" pitchFamily="34" charset="-120"/></a:rPr><a:t>15</a:t></a:r><a:endParaRPr lang="en-US" sz="800" dirty="0"/></a:p></p:txBody></p:sp><p:sp><p:nvSpPr><p:cNvPr id="4" name="Text 2"/><p:cNvSpPr/><p:nvPr/></p:nvSpPr><p:spPr><a:xfrm><a:off x="457200" y="384048"/><a:ext cx="8229600" cy="274320"/></a:xfrm><a:prstGeom prst="rect"><a:avLst/></a:prstGeom><a:noFill/><a:ln/></p:spPr><p:txBody><a:bodyPr wrap="square" lIns="0" tIns="0" rIns="0" bIns="0" rtlCol="0" anchor="ctr"/><a:lstStyle/><a:p><a:pPr marL="0" indent="0"><a:buNone/></a:pPr><a:r><a:rPr lang="en-US" sz="1000" b="1" kern="0" spc="300" dirty="0"><a:solidFill><a:srgbClr val="FBBF24"/></a:solidFill><a:latin typeface="Inter" pitchFamily="34" charset="0"/><a:ea typeface="Inter" pitchFamily="34" charset="-122"/><a:cs typeface="Inter" pitchFamily="34" charset="-120"/></a:rPr><a:t>MOMENT 1 OF 3</a:t></a:r><a:endParaRPr lang="en-US" sz="1000" dirty="0"/></a:p></p:txBody></p:sp><p:sp><p:nvSpPr><p:cNvPr id="5" name="Text 3"/><p:cNvSpPr/><p:nvPr/></p:nvSpPr><p:spPr><a:xfrm><a:off x="457200" y="1371600"/><a:ext cx="8229600" cy="731520"/></a:xfrm><a:prstGeom prst="rect"><a:avLst/></a:prstGeom><a:noFill/><a:ln/></p:spPr><p:txBody><a:bodyPr wrap="square" lIns="0" tIns="0" rIns="0" bIns="0" rtlCol="0" anchor="ctr"/><a:lstStyle/><a:p><a:pPr marL="0" indent="0"><a:buNone/></a:pPr><a:r><a:rPr lang="en-US" sz="3600" b="1" dirty="0"><a:solidFill><a:srgbClr val="F8FAFC"/></a:solidFill><a:latin typeface="Montserrat" pitchFamily="34" charset="0"/><a:ea typeface="Inter" pitchFamily="34" charset="-122"/><a:cs typeface="Inter" pitchFamily="34" charset="-120"/></a:rPr><a:t>watch the team assemble</a:t></a:r><a:endParaRPr lang="en-US" sz="3600" dirty="0"/></a:p></p:txBody></p:sp><p:sp><p:nvSpPr><p:cNvPr id="6" name="Shape 4"/><p:cNvSpPr/><p:nvPr/></p:nvSpPr><p:spPr><a:xfrm><a:off x="457200" y="2331720"/><a:ext cx="8229600" cy="777240"/></a:xfrm><a:prstGeom prst="roundRect"><a:avLst><a:gd name="adj" fmla="val 7059"/></a:avLst></a:prstGeom><a:solidFill><a:srgbClr val="0A101F"/></a:solidFill><a:ln/></p:spPr><p:txBody><a:bodyPr/><a:lstStyle/><a:p><a:endParaRPr/></a:p></p:txBody></p:sp><p:sp><p:nvSpPr><p:cNvPr id="7" name="Text 5"/><p:cNvSpPr/><p:nvPr/></p:nvSpPr><p:spPr><a:xfrm><a:off x="640080" y="2331720"/><a:ext cx="7863840" cy="777240"/></a:xfrm><a:prstGeom prst="rect"><a:avLst/></a:prstGeom><a:noFill/><a:ln/></p:spPr><p:txBody><a:bodyPr wrap="square" lIns="0" tIns="0" rIns="0" bIns="0" rtlCol="0" anchor="ctr"/><a:lstStyle/><a:p><a:pPr marL="0" indent="0"><a:buNone/></a:pPr><a:r><a:rPr lang="en-US" sz="1200" dirty="0"><a:solidFill><a:srgbClr val="34D399"/></a:solidFill><a:latin typeface="Menlo" pitchFamily="34" charset="0"/><a:ea typeface="Menlo" pitchFamily="34" charset="-122"/><a:cs typeface="Menlo" pitchFamily="34" charset="-120"/></a:rPr><a:t>$ /implement  auto-promote the next waitlisted guest when a confirmed guest cancels</a:t></a:r><a:endParaRPr lang="en-US" sz="1200" dirty="0"/></a:p><a:p><a:pPr marL="0" indent="0"><a:buNone/></a:pPr><a:r><a:rPr lang="en-US" sz="1000" dirty="0"><a:solidFill><a:srgbClr val="94A3B8"/></a:solidFill><a:latin typeface="Menlo" pitchFamily="34" charset="0"/><a:ea typeface="Menlo" pitchFamily="34" charset="-122"/><a:cs typeface="Menlo" pitchFamily="34" charset="-120"/></a:rPr><a:t>→ the team: code-reviewer · security-auditor · test-writer  (in parallel)</a:t><a:endParaRPr lang="en-US" sz="1000" dirty="0"/></a:p></p:txBody></p:sp></p:spTree></p:cSld><p:clrMapOvr><a:masterClrMapping/></p:clrMapOvr></p:sld>
 </file>
 
 <file path=ppt/slides/slide16.xml><?xml version="1.0" encoding="utf-8"?>
@@ -7511,7 +7258,7 @@
                 <a:ea typeface="Inter" pitchFamily="34" charset="-122"/>
                 <a:cs typeface="Inter" pitchFamily="34" charset="-120"/>
               </a:rPr>
-              <a:t>full autonomy, overnight</a:t>
+              <a:t>full autonomy — the team works overnight</a:t>
             </a:r>
             <a:endParaRPr lang="en-US" sz="3600" dirty="0"/>
           </a:p>

--- a/orchestrer-intelligence-gatherly.pptx
+++ b/orchestrer-intelligence-gatherly.pptx
@@ -6812,8 +6812,278 @@
 </p:sld>
 </file>
 
-<file path=ppt/slides/slide15.xml><?xml version="1.0" encoding="UTF-8" standalone="yes"?>
-<p:sld xmlns:a="http://schemas.openxmlformats.org/drawingml/2006/main" xmlns:r="http://schemas.openxmlformats.org/officeDocument/2006/relationships" xmlns:p="http://schemas.openxmlformats.org/presentationml/2006/main"><p:cSld name="Slide 15"><p:bg><p:bgPr><a:solidFill><a:srgbClr val="0F1729"/></a:solidFill><a:effectLst/></p:bgPr></p:bg><p:spTree><p:nvGrpSpPr><p:cNvPr id="1" name=""/><p:cNvGrpSpPr/><p:nvPr/></p:nvGrpSpPr><p:grpSpPr><a:xfrm><a:off x="0" y="0"/><a:ext cx="0" cy="0"/><a:chOff x="0" y="0"/><a:chExt cx="0" cy="0"/></a:xfrm></p:grpSpPr><p:sp><p:nvSpPr><p:cNvPr id="2" name="Text 0"/><p:cNvSpPr/><p:nvPr/></p:nvSpPr><p:spPr><a:xfrm><a:off x="457200" y="4796028"/><a:ext cx="4572000" cy="274320"/></a:xfrm><a:prstGeom prst="rect"><a:avLst/></a:prstGeom><a:noFill/><a:ln/></p:spPr><p:txBody><a:bodyPr wrap="square" lIns="0" tIns="0" rIns="0" bIns="0" rtlCol="0" anchor="ctr"/><a:lstStyle/><a:p><a:pPr marL="0" indent="0"><a:buNone/></a:pPr><a:r><a:rPr lang="en-US" sz="800" kern="0" spc="200" dirty="0"><a:solidFill><a:srgbClr val="64748B"/></a:solidFill><a:latin typeface="Inter" pitchFamily="34" charset="0"/><a:ea typeface="Inter" pitchFamily="34" charset="-122"/><a:cs typeface="Inter" pitchFamily="34" charset="-120"/></a:rPr><a:t>03 · demo · moment 1</a:t></a:r><a:endParaRPr lang="en-US" sz="800" dirty="0"/></a:p></p:txBody></p:sp><p:sp><p:nvSpPr><p:cNvPr id="3" name="Text 1"/><p:cNvSpPr/><p:nvPr/></p:nvSpPr><p:spPr><a:xfrm><a:off x="8229600" y="4796028"/><a:ext cx="457200" cy="274320"/></a:xfrm><a:prstGeom prst="rect"><a:avLst/></a:prstGeom><a:noFill/><a:ln/></p:spPr><p:txBody><a:bodyPr wrap="square" lIns="0" tIns="0" rIns="0" bIns="0" rtlCol="0" anchor="ctr"/><a:lstStyle/><a:p><a:pPr marL="0" indent="0" algn="r"><a:buNone/></a:pPr><a:r><a:rPr lang="en-US" sz="800" dirty="0"><a:solidFill><a:srgbClr val="64748B"/></a:solidFill><a:latin typeface="Inter" pitchFamily="34" charset="0"/><a:ea typeface="Inter" pitchFamily="34" charset="-122"/><a:cs typeface="Inter" pitchFamily="34" charset="-120"/></a:rPr><a:t>15</a:t></a:r><a:endParaRPr lang="en-US" sz="800" dirty="0"/></a:p></p:txBody></p:sp><p:sp><p:nvSpPr><p:cNvPr id="4" name="Text 2"/><p:cNvSpPr/><p:nvPr/></p:nvSpPr><p:spPr><a:xfrm><a:off x="457200" y="384048"/><a:ext cx="8229600" cy="274320"/></a:xfrm><a:prstGeom prst="rect"><a:avLst/></a:prstGeom><a:noFill/><a:ln/></p:spPr><p:txBody><a:bodyPr wrap="square" lIns="0" tIns="0" rIns="0" bIns="0" rtlCol="0" anchor="ctr"/><a:lstStyle/><a:p><a:pPr marL="0" indent="0"><a:buNone/></a:pPr><a:r><a:rPr lang="en-US" sz="1000" b="1" kern="0" spc="300" dirty="0"><a:solidFill><a:srgbClr val="FBBF24"/></a:solidFill><a:latin typeface="Inter" pitchFamily="34" charset="0"/><a:ea typeface="Inter" pitchFamily="34" charset="-122"/><a:cs typeface="Inter" pitchFamily="34" charset="-120"/></a:rPr><a:t>MOMENT 1 OF 3</a:t></a:r><a:endParaRPr lang="en-US" sz="1000" dirty="0"/></a:p></p:txBody></p:sp><p:sp><p:nvSpPr><p:cNvPr id="5" name="Text 3"/><p:cNvSpPr/><p:nvPr/></p:nvSpPr><p:spPr><a:xfrm><a:off x="457200" y="1371600"/><a:ext cx="8229600" cy="731520"/></a:xfrm><a:prstGeom prst="rect"><a:avLst/></a:prstGeom><a:noFill/><a:ln/></p:spPr><p:txBody><a:bodyPr wrap="square" lIns="0" tIns="0" rIns="0" bIns="0" rtlCol="0" anchor="ctr"/><a:lstStyle/><a:p><a:pPr marL="0" indent="0"><a:buNone/></a:pPr><a:r><a:rPr lang="en-US" sz="3600" b="1" dirty="0"><a:solidFill><a:srgbClr val="F8FAFC"/></a:solidFill><a:latin typeface="Montserrat" pitchFamily="34" charset="0"/><a:ea typeface="Inter" pitchFamily="34" charset="-122"/><a:cs typeface="Inter" pitchFamily="34" charset="-120"/></a:rPr><a:t>watch the team assemble</a:t></a:r><a:endParaRPr lang="en-US" sz="3600" dirty="0"/></a:p></p:txBody></p:sp><p:sp><p:nvSpPr><p:cNvPr id="6" name="Shape 4"/><p:cNvSpPr/><p:nvPr/></p:nvSpPr><p:spPr><a:xfrm><a:off x="457200" y="2331720"/><a:ext cx="8229600" cy="777240"/></a:xfrm><a:prstGeom prst="roundRect"><a:avLst><a:gd name="adj" fmla="val 7059"/></a:avLst></a:prstGeom><a:solidFill><a:srgbClr val="0A101F"/></a:solidFill><a:ln/></p:spPr><p:txBody><a:bodyPr/><a:lstStyle/><a:p><a:endParaRPr/></a:p></p:txBody></p:sp><p:sp><p:nvSpPr><p:cNvPr id="7" name="Text 5"/><p:cNvSpPr/><p:nvPr/></p:nvSpPr><p:spPr><a:xfrm><a:off x="640080" y="2331720"/><a:ext cx="7863840" cy="777240"/></a:xfrm><a:prstGeom prst="rect"><a:avLst/></a:prstGeom><a:noFill/><a:ln/></p:spPr><p:txBody><a:bodyPr wrap="square" lIns="0" tIns="0" rIns="0" bIns="0" rtlCol="0" anchor="ctr"/><a:lstStyle/><a:p><a:pPr marL="0" indent="0"><a:buNone/></a:pPr><a:r><a:rPr lang="en-US" sz="1200" dirty="0"><a:solidFill><a:srgbClr val="34D399"/></a:solidFill><a:latin typeface="Menlo" pitchFamily="34" charset="0"/><a:ea typeface="Menlo" pitchFamily="34" charset="-122"/><a:cs typeface="Menlo" pitchFamily="34" charset="-120"/></a:rPr><a:t>$ /implement  auto-promote the next waitlisted guest when a confirmed guest cancels</a:t></a:r><a:endParaRPr lang="en-US" sz="1200" dirty="0"/></a:p><a:p><a:pPr marL="0" indent="0"><a:buNone/></a:pPr><a:r><a:rPr lang="en-US" sz="1000" dirty="0"><a:solidFill><a:srgbClr val="94A3B8"/></a:solidFill><a:latin typeface="Menlo" pitchFamily="34" charset="0"/><a:ea typeface="Menlo" pitchFamily="34" charset="-122"/><a:cs typeface="Menlo" pitchFamily="34" charset="-120"/></a:rPr><a:t>→ the team: code-reviewer · security-auditor · test-writer  (in parallel)</a:t><a:endParaRPr lang="en-US" sz="1000" dirty="0"/></a:p></p:txBody></p:sp></p:spTree></p:cSld><p:clrMapOvr><a:masterClrMapping/></p:clrMapOvr></p:sld>
+<file path=ppt/slides/slide15.xml><?xml version="1.0" encoding="utf-8"?>
+<p:sld xmlns:a="http://schemas.openxmlformats.org/drawingml/2006/main" xmlns:r="http://schemas.openxmlformats.org/officeDocument/2006/relationships" xmlns:p="http://schemas.openxmlformats.org/presentationml/2006/main">
+  <p:cSld name="Slide 15">
+    <p:bg>
+      <p:bgPr>
+        <a:solidFill>
+          <a:srgbClr val="0F1729"/>
+        </a:solidFill>
+        <a:effectLst/>
+      </p:bgPr>
+    </p:bg>
+    <p:spTree>
+      <p:nvGrpSpPr>
+        <p:cNvPr id="1" name=""/>
+        <p:cNvGrpSpPr/>
+        <p:nvPr/>
+      </p:nvGrpSpPr>
+      <p:grpSpPr>
+        <a:xfrm>
+          <a:off x="0" y="0"/>
+          <a:ext cx="0" cy="0"/>
+          <a:chOff x="0" y="0"/>
+          <a:chExt cx="0" cy="0"/>
+        </a:xfrm>
+      </p:grpSpPr>
+      <p:sp>
+        <p:nvSpPr>
+          <p:cNvPr id="2" name="Text 0"/>
+          <p:cNvSpPr/>
+          <p:nvPr/>
+        </p:nvSpPr>
+        <p:spPr>
+          <a:xfrm>
+            <a:off x="457200" y="4796028"/>
+            <a:ext cx="4572000" cy="274320"/>
+          </a:xfrm>
+          <a:prstGeom prst="rect">
+            <a:avLst/>
+          </a:prstGeom>
+          <a:noFill/>
+          <a:ln/>
+        </p:spPr>
+        <p:txBody>
+          <a:bodyPr wrap="square" lIns="0" tIns="0" rIns="0" bIns="0" rtlCol="0" anchor="ctr"/>
+          <a:lstStyle/>
+          <a:p>
+            <a:pPr marL="0" indent="0">
+              <a:buNone/>
+            </a:pPr>
+            <a:r>
+              <a:rPr lang="en-US" sz="800" kern="0" spc="200" dirty="0">
+                <a:solidFill>
+                  <a:srgbClr val="64748B"/>
+                </a:solidFill>
+                <a:latin typeface="Inter" pitchFamily="34" charset="0"/>
+                <a:ea typeface="Inter" pitchFamily="34" charset="-122"/>
+                <a:cs typeface="Inter" pitchFamily="34" charset="-120"/>
+              </a:rPr>
+              <a:t>03 · demo · moment 1</a:t>
+            </a:r>
+            <a:endParaRPr lang="en-US" sz="800" dirty="0"/>
+          </a:p>
+        </p:txBody>
+      </p:sp>
+      <p:sp>
+        <p:nvSpPr>
+          <p:cNvPr id="3" name="Text 1"/>
+          <p:cNvSpPr/>
+          <p:nvPr/>
+        </p:nvSpPr>
+        <p:spPr>
+          <a:xfrm>
+            <a:off x="8229600" y="4796028"/>
+            <a:ext cx="457200" cy="274320"/>
+          </a:xfrm>
+          <a:prstGeom prst="rect">
+            <a:avLst/>
+          </a:prstGeom>
+          <a:noFill/>
+          <a:ln/>
+        </p:spPr>
+        <p:txBody>
+          <a:bodyPr wrap="square" lIns="0" tIns="0" rIns="0" bIns="0" rtlCol="0" anchor="ctr"/>
+          <a:lstStyle/>
+          <a:p>
+            <a:pPr marL="0" indent="0" algn="r">
+              <a:buNone/>
+            </a:pPr>
+            <a:r>
+              <a:rPr lang="en-US" sz="800" dirty="0">
+                <a:solidFill>
+                  <a:srgbClr val="64748B"/>
+                </a:solidFill>
+                <a:latin typeface="Inter" pitchFamily="34" charset="0"/>
+                <a:ea typeface="Inter" pitchFamily="34" charset="-122"/>
+                <a:cs typeface="Inter" pitchFamily="34" charset="-120"/>
+              </a:rPr>
+              <a:t>15</a:t>
+            </a:r>
+            <a:endParaRPr lang="en-US" sz="800" dirty="0"/>
+          </a:p>
+        </p:txBody>
+      </p:sp>
+      <p:sp>
+        <p:nvSpPr>
+          <p:cNvPr id="4" name="Text 2"/>
+          <p:cNvSpPr/>
+          <p:nvPr/>
+        </p:nvSpPr>
+        <p:spPr>
+          <a:xfrm>
+            <a:off x="457200" y="384048"/>
+            <a:ext cx="8229600" cy="274320"/>
+          </a:xfrm>
+          <a:prstGeom prst="rect">
+            <a:avLst/>
+          </a:prstGeom>
+          <a:noFill/>
+          <a:ln/>
+        </p:spPr>
+        <p:txBody>
+          <a:bodyPr wrap="square" lIns="0" tIns="0" rIns="0" bIns="0" rtlCol="0" anchor="ctr"/>
+          <a:lstStyle/>
+          <a:p>
+            <a:pPr marL="0" indent="0">
+              <a:buNone/>
+            </a:pPr>
+            <a:r>
+              <a:rPr lang="en-US" sz="1000" b="1" kern="0" spc="300" dirty="0">
+                <a:solidFill>
+                  <a:srgbClr val="FBBF24"/>
+                </a:solidFill>
+                <a:latin typeface="Inter" pitchFamily="34" charset="0"/>
+                <a:ea typeface="Inter" pitchFamily="34" charset="-122"/>
+                <a:cs typeface="Inter" pitchFamily="34" charset="-120"/>
+              </a:rPr>
+              <a:t>MOMENT 1 OF 3</a:t>
+            </a:r>
+            <a:endParaRPr lang="en-US" sz="1000" dirty="0"/>
+          </a:p>
+        </p:txBody>
+      </p:sp>
+      <p:sp>
+        <p:nvSpPr>
+          <p:cNvPr id="5" name="Text 3"/>
+          <p:cNvSpPr/>
+          <p:nvPr/>
+        </p:nvSpPr>
+        <p:spPr>
+          <a:xfrm>
+            <a:off x="457200" y="1371600"/>
+            <a:ext cx="8229600" cy="731520"/>
+          </a:xfrm>
+          <a:prstGeom prst="rect">
+            <a:avLst/>
+          </a:prstGeom>
+          <a:noFill/>
+          <a:ln/>
+        </p:spPr>
+        <p:txBody>
+          <a:bodyPr wrap="square" lIns="0" tIns="0" rIns="0" bIns="0" rtlCol="0" anchor="ctr"/>
+          <a:lstStyle/>
+          <a:p>
+            <a:pPr marL="0" indent="0">
+              <a:buNone/>
+            </a:pPr>
+            <a:r>
+              <a:rPr lang="en-US" sz="3600" b="1" dirty="0">
+                <a:solidFill>
+                  <a:srgbClr val="F8FAFC"/>
+                </a:solidFill>
+                <a:latin typeface="Montserrat" pitchFamily="34" charset="0"/>
+                <a:ea typeface="Inter" pitchFamily="34" charset="-122"/>
+                <a:cs typeface="Inter" pitchFamily="34" charset="-120"/>
+              </a:rPr>
+              <a:t>watch the team assemble</a:t>
+            </a:r>
+            <a:endParaRPr lang="en-US" sz="3600" dirty="0"/>
+          </a:p>
+        </p:txBody>
+      </p:sp>
+      <p:sp>
+        <p:nvSpPr>
+          <p:cNvPr id="6" name="Shape 4"/>
+          <p:cNvSpPr/>
+          <p:nvPr/>
+        </p:nvSpPr>
+        <p:spPr>
+          <a:xfrm>
+            <a:off x="457200" y="2331720"/>
+            <a:ext cx="8229600" cy="777240"/>
+          </a:xfrm>
+          <a:prstGeom prst="roundRect">
+            <a:avLst>
+              <a:gd name="adj" fmla="val 7059"/>
+            </a:avLst>
+          </a:prstGeom>
+          <a:solidFill>
+            <a:srgbClr val="0A101F"/>
+          </a:solidFill>
+          <a:ln/>
+        </p:spPr>
+        <p:txBody>
+          <a:bodyPr/>
+          <a:lstStyle/>
+          <a:p>
+            <a:endParaRPr/>
+          </a:p>
+        </p:txBody>
+      </p:sp>
+      <p:sp>
+        <p:nvSpPr>
+          <p:cNvPr id="7" name="Text 5"/>
+          <p:cNvSpPr/>
+          <p:nvPr/>
+        </p:nvSpPr>
+        <p:spPr>
+          <a:xfrm>
+            <a:off x="640080" y="2331720"/>
+            <a:ext cx="7863840" cy="777240"/>
+          </a:xfrm>
+          <a:prstGeom prst="rect">
+            <a:avLst/>
+          </a:prstGeom>
+          <a:noFill/>
+          <a:ln/>
+        </p:spPr>
+        <p:txBody>
+          <a:bodyPr wrap="square" lIns="0" tIns="0" rIns="0" bIns="0" rtlCol="0" anchor="ctr"/>
+          <a:lstStyle/>
+          <a:p>
+            <a:pPr marL="0" indent="0">
+              <a:buNone/>
+            </a:pPr>
+            <a:r>
+              <a:rPr lang="en-US" sz="1200" dirty="0">
+                <a:solidFill>
+                  <a:srgbClr val="34D399"/>
+                </a:solidFill>
+                <a:latin typeface="Menlo" pitchFamily="34" charset="0"/>
+                <a:ea typeface="Menlo" pitchFamily="34" charset="-122"/>
+                <a:cs typeface="Menlo" pitchFamily="34" charset="-120"/>
+              </a:rPr>
+              <a:t>$ /implement  auto-promote the next waitlisted guest when a confirmed guest cancels</a:t>
+            </a:r>
+            <a:endParaRPr lang="en-US" sz="1200" dirty="0"/>
+          </a:p>
+          <a:p>
+            <a:pPr marL="0" indent="0">
+              <a:buNone/>
+            </a:pPr>
+            <a:r>
+              <a:rPr lang="en-US" sz="1000" dirty="0">
+                <a:solidFill>
+                  <a:srgbClr val="94A3B8"/>
+                </a:solidFill>
+                <a:latin typeface="Menlo" pitchFamily="34" charset="0"/>
+                <a:ea typeface="Menlo" pitchFamily="34" charset="-122"/>
+                <a:cs typeface="Menlo" pitchFamily="34" charset="-120"/>
+              </a:rPr>
+              <a:t>→ the team: code-reviewer · security-auditor · test-writer  (in parallel)</a:t>
+            </a:r>
+            <a:endParaRPr lang="en-US" sz="1000" dirty="0"/>
+          </a:p>
+        </p:txBody>
+      </p:sp>
+    </p:spTree>
+  </p:cSld>
+  <p:clrMapOvr>
+    <a:masterClrMapping/>
+  </p:clrMapOvr>
+</p:sld>
 </file>
 
 <file path=ppt/slides/slide16.xml><?xml version="1.0" encoding="utf-8"?>

--- a/orchestrer-intelligence-gatherly.pptx
+++ b/orchestrer-intelligence-gatherly.pptx
@@ -4648,6 +4648,97 @@
               <a:t>and what to do when one fails</a:t>
             </a:r>
             <a:endParaRPr lang="en-US" sz="1400" dirty="0"/>
+          </a:p>
+        </p:txBody>
+      </p:sp>
+      <p:sp>
+        <p:nvSpPr>
+          <p:cNvPr id="30" name="Rectangle 29">
+            <a:extLst>
+              <a:ext uri="{FF2B5EF4-FFF2-40B4-BE49-F238E27FC236}">
+                <a16:creationId xmlns:a16="http://schemas.microsoft.com/office/drawing/2014/main" id="{57B5A57E-809B-4868-FA01-5B67EF4AEBBC}"/>
+              </a:ext>
+            </a:extLst>
+          </p:cNvPr>
+          <p:cNvSpPr/>
+          <p:nvPr/>
+        </p:nvSpPr>
+        <p:spPr>
+          <a:xfrm>
+            <a:off x="1481328" y="1611848"/>
+            <a:ext cx="6199632" cy="1159706"/>
+          </a:xfrm>
+          <a:prstGeom prst="rect">
+            <a:avLst/>
+          </a:prstGeom>
+          <a:noFill/>
+          <a:ln w="44450">
+            <a:solidFill>
+              <a:schemeClr val="bg1"/>
+            </a:solidFill>
+          </a:ln>
+        </p:spPr>
+        <p:style>
+          <a:lnRef idx="2">
+            <a:schemeClr val="accent1">
+              <a:shade val="15000"/>
+            </a:schemeClr>
+          </a:lnRef>
+          <a:fillRef idx="1">
+            <a:schemeClr val="accent1"/>
+          </a:fillRef>
+          <a:effectRef idx="0">
+            <a:schemeClr val="accent1"/>
+          </a:effectRef>
+          <a:fontRef idx="minor">
+            <a:schemeClr val="lt1"/>
+          </a:fontRef>
+        </p:style>
+        <p:txBody>
+          <a:bodyPr rtlCol="0" anchor="ctr"/>
+          <a:lstStyle/>
+          <a:p>
+            <a:pPr algn="ctr"/>
+            <a:endParaRPr lang="en-US"/>
+          </a:p>
+        </p:txBody>
+      </p:sp>
+      <p:sp>
+        <p:nvSpPr>
+          <p:cNvPr id="31" name="TextBox 30">
+            <a:extLst>
+              <a:ext uri="{FF2B5EF4-FFF2-40B4-BE49-F238E27FC236}">
+                <a16:creationId xmlns:a16="http://schemas.microsoft.com/office/drawing/2014/main" id="{626E6013-7D5F-ED52-3B73-AF150D587820}"/>
+              </a:ext>
+            </a:extLst>
+          </p:cNvPr>
+          <p:cNvSpPr txBox="1"/>
+          <p:nvPr/>
+        </p:nvSpPr>
+        <p:spPr>
+          <a:xfrm>
+            <a:off x="3751237" y="1611847"/>
+            <a:ext cx="1341971" cy="369332"/>
+          </a:xfrm>
+          <a:prstGeom prst="rect">
+            <a:avLst/>
+          </a:prstGeom>
+          <a:noFill/>
+        </p:spPr>
+        <p:txBody>
+          <a:bodyPr wrap="square" rtlCol="0">
+            <a:spAutoFit/>
+          </a:bodyPr>
+          <a:lstStyle/>
+          <a:p>
+            <a:r>
+              <a:rPr lang="en-US" dirty="0">
+                <a:solidFill>
+                  <a:schemeClr val="bg1"/>
+                </a:solidFill>
+              </a:rPr>
+              <a:t>For Each {}</a:t>
+            </a:r>
           </a:p>
         </p:txBody>
       </p:sp>

--- a/orchestrer-intelligence-gatherly.pptx
+++ b/orchestrer-intelligence-gatherly.pptx
@@ -3584,85 +3584,7 @@
       </p:grpSpPr>
       <p:sp>
         <p:nvSpPr>
-          <p:cNvPr id="2" name="Text 0"/>
-          <p:cNvSpPr/>
-          <p:nvPr/>
-        </p:nvSpPr>
-        <p:spPr>
-          <a:xfrm>
-            <a:off x="457200" y="4796028"/>
-            <a:ext cx="4572000" cy="274320"/>
-          </a:xfrm>
-          <a:prstGeom prst="rect">
-            <a:avLst/>
-          </a:prstGeom>
-          <a:noFill/>
-          <a:ln/>
-        </p:spPr>
-        <p:txBody>
-          <a:bodyPr wrap="square" lIns="0" tIns="0" rIns="0" bIns="0" rtlCol="0" anchor="ctr"/>
-          <a:lstStyle/>
-          <a:p>
-            <a:pPr marL="0" indent="0">
-              <a:buNone/>
-            </a:pPr>
-            <a:r>
-              <a:rPr lang="en-US" sz="800" kern="0" spc="200" dirty="0">
-                <a:solidFill>
-                  <a:srgbClr val="64748B"/>
-                </a:solidFill>
-                <a:latin typeface="Inter" pitchFamily="34" charset="0"/>
-                <a:ea typeface="Inter" pitchFamily="34" charset="-122"/>
-                <a:cs typeface="Inter" pitchFamily="34" charset="-120"/>
-              </a:rPr>
-              <a:t>02 · how it works</a:t>
-            </a:r>
-            <a:endParaRPr lang="en-US" sz="800" dirty="0"/>
-          </a:p>
-        </p:txBody>
-      </p:sp>
-      <p:sp>
-        <p:nvSpPr>
-          <p:cNvPr id="3" name="Text 1"/>
-          <p:cNvSpPr/>
-          <p:nvPr/>
-        </p:nvSpPr>
-        <p:spPr>
-          <a:xfrm>
-            <a:off x="8229600" y="4796028"/>
-            <a:ext cx="457200" cy="274320"/>
-          </a:xfrm>
-          <a:prstGeom prst="rect">
-            <a:avLst/>
-          </a:prstGeom>
-          <a:noFill/>
-          <a:ln/>
-        </p:spPr>
-        <p:txBody>
-          <a:bodyPr wrap="square" lIns="0" tIns="0" rIns="0" bIns="0" rtlCol="0" anchor="ctr"/>
-          <a:lstStyle/>
-          <a:p>
-            <a:pPr marL="0" indent="0" algn="r">
-              <a:buNone/>
-            </a:pPr>
-            <a:r>
-              <a:rPr lang="en-US" sz="800" dirty="0">
-                <a:solidFill>
-                  <a:srgbClr val="64748B"/>
-                </a:solidFill>
-                <a:latin typeface="Inter" pitchFamily="34" charset="0"/>
-                <a:ea typeface="Inter" pitchFamily="34" charset="-122"/>
-                <a:cs typeface="Inter" pitchFamily="34" charset="-120"/>
-              </a:rPr>
-              <a:t>11</a:t>
-            </a:r>
-            <a:endParaRPr lang="en-US" sz="800" dirty="0"/>
-          </a:p>
-        </p:txBody>
-      </p:sp>
-      <p:sp>
-        <p:nvSpPr>
-          <p:cNvPr id="4" name="Text 2"/>
+          <p:cNvPr id="2" name="Text"/>
           <p:cNvSpPr/>
           <p:nvPr/>
         </p:nvSpPr>
@@ -3681,7 +3603,7 @@
           <a:bodyPr wrap="square" lIns="0" tIns="0" rIns="0" bIns="0" rtlCol="0" anchor="ctr"/>
           <a:lstStyle/>
           <a:p>
-            <a:pPr marL="0" indent="0">
+            <a:pPr marL="0" indent="0" algn="l">
               <a:buNone/>
             </a:pPr>
             <a:r>
@@ -3695,13 +3617,12 @@
               </a:rPr>
               <a:t>02 · HOW IT WORKS</a:t>
             </a:r>
-            <a:endParaRPr lang="en-US" sz="1000" dirty="0"/>
-          </a:p>
-        </p:txBody>
-      </p:sp>
-      <p:sp>
-        <p:nvSpPr>
-          <p:cNvPr id="5" name="Text 3"/>
+          </a:p>
+        </p:txBody>
+      </p:sp>
+      <p:sp>
+        <p:nvSpPr>
+          <p:cNvPr id="3" name="Text"/>
           <p:cNvSpPr/>
           <p:nvPr/>
         </p:nvSpPr>
@@ -3720,34 +3641,71 @@
           <a:bodyPr wrap="square" lIns="0" tIns="0" rIns="0" bIns="0" rtlCol="0" anchor="ctr"/>
           <a:lstStyle/>
           <a:p>
-            <a:pPr marL="0" indent="0">
-              <a:buNone/>
-            </a:pPr>
-            <a:r>
-              <a:rPr lang="en-US" sz="2800" b="1" dirty="0">
+            <a:pPr marL="0" indent="0" algn="l">
+              <a:buNone/>
+            </a:pPr>
+            <a:r>
+              <a:rPr lang="en-US" sz="2800" b="1" kern="0" dirty="0">
                 <a:solidFill>
                   <a:srgbClr val="F8FAFC"/>
                 </a:solidFill>
                 <a:latin typeface="Montserrat" pitchFamily="34" charset="0"/>
-                <a:ea typeface="Inter" pitchFamily="34" charset="-122"/>
-                <a:cs typeface="Inter" pitchFamily="34" charset="-120"/>
+                <a:ea typeface="Montserrat" pitchFamily="34" charset="-122"/>
+                <a:cs typeface="Montserrat" pitchFamily="34" charset="-120"/>
               </a:rPr>
               <a:t>the loop</a:t>
             </a:r>
-            <a:endParaRPr lang="en-US" sz="2800" dirty="0"/>
-          </a:p>
-        </p:txBody>
-      </p:sp>
-      <p:sp>
-        <p:nvSpPr>
-          <p:cNvPr id="6" name="Shape 4"/>
-          <p:cNvSpPr/>
-          <p:nvPr/>
-        </p:nvSpPr>
-        <p:spPr>
-          <a:xfrm>
-            <a:off x="457200" y="2103120"/>
-            <a:ext cx="932688" cy="502920"/>
+          </a:p>
+        </p:txBody>
+      </p:sp>
+      <p:sp>
+        <p:nvSpPr>
+          <p:cNvPr id="4" name="Text"/>
+          <p:cNvSpPr/>
+          <p:nvPr/>
+        </p:nvSpPr>
+        <p:spPr>
+          <a:xfrm>
+            <a:off x="457200" y="1420000"/>
+            <a:ext cx="8229600" cy="180000"/>
+          </a:xfrm>
+          <a:prstGeom prst="rect">
+            <a:avLst/>
+          </a:prstGeom>
+          <a:noFill/>
+          <a:ln/>
+        </p:spPr>
+        <p:txBody>
+          <a:bodyPr wrap="square" lIns="0" tIns="0" rIns="0" bIns="0" rtlCol="0" anchor="ctr"/>
+          <a:lstStyle/>
+          <a:p>
+            <a:pPr marL="0" indent="0" algn="l">
+              <a:buNone/>
+            </a:pPr>
+            <a:r>
+              <a:rPr lang="en-US" sz="900" b="1" kern="0" spc="200" dirty="0">
+                <a:solidFill>
+                  <a:srgbClr val="3B82F6"/>
+                </a:solidFill>
+                <a:latin typeface="Inter" pitchFamily="34" charset="0"/>
+                <a:ea typeface="Inter" pitchFamily="34" charset="-122"/>
+                <a:cs typeface="Inter" pitchFamily="34" charset="-120"/>
+              </a:rPr>
+              <a:t>PHASE 0 · BEFORE ANY CODE</a:t>
+            </a:r>
+          </a:p>
+        </p:txBody>
+      </p:sp>
+      <p:sp>
+        <p:nvSpPr>
+          <p:cNvPr id="5" name="Pill"/>
+          <p:cNvSpPr/>
+          <p:nvPr/>
+        </p:nvSpPr>
+        <p:spPr>
+          <a:xfrm>
+            <a:off x="457200" y="1620000"/>
+            <a:ext cx="1234440" cy="560000"/>
           </a:xfrm>
           <a:prstGeom prst="roundRect">
             <a:avLst>
@@ -3765,39 +3723,14 @@
           </a:ln>
         </p:spPr>
         <p:txBody>
-          <a:bodyPr/>
-          <a:lstStyle/>
-          <a:p>
-            <a:endParaRPr/>
-          </a:p>
-        </p:txBody>
-      </p:sp>
-      <p:sp>
-        <p:nvSpPr>
-          <p:cNvPr id="7" name="Text 5"/>
-          <p:cNvSpPr/>
-          <p:nvPr/>
-        </p:nvSpPr>
-        <p:spPr>
-          <a:xfrm>
-            <a:off x="457200" y="2103120"/>
-            <a:ext cx="932688" cy="502920"/>
-          </a:xfrm>
-          <a:prstGeom prst="rect">
-            <a:avLst/>
-          </a:prstGeom>
-          <a:noFill/>
-          <a:ln/>
-        </p:spPr>
-        <p:txBody>
-          <a:bodyPr wrap="square" lIns="0" tIns="0" rIns="0" bIns="0" rtlCol="0" anchor="ctr"/>
+          <a:bodyPr wrap="square" lIns="36000" tIns="0" rIns="36000" bIns="0" rtlCol="0" anchor="ctr"/>
           <a:lstStyle/>
           <a:p>
             <a:pPr marL="0" indent="0" algn="ctr">
               <a:buNone/>
             </a:pPr>
             <a:r>
-              <a:rPr lang="en-US" sz="1100" b="1" dirty="0">
+              <a:rPr lang="en-US" sz="1050" b="1" kern="0" dirty="0">
                 <a:solidFill>
                   <a:srgbClr val="F8FAFC"/>
                 </a:solidFill>
@@ -3807,36 +3740,13 @@
               </a:rPr>
               <a:t>plan</a:t>
             </a:r>
-            <a:endParaRPr lang="en-US" sz="1100" dirty="0"/>
-          </a:p>
-        </p:txBody>
-      </p:sp>
-      <p:sp>
-        <p:nvSpPr>
-          <p:cNvPr id="8" name="Text 6"/>
-          <p:cNvSpPr/>
-          <p:nvPr/>
-        </p:nvSpPr>
-        <p:spPr>
-          <a:xfrm>
-            <a:off x="1371600" y="2103120"/>
-            <a:ext cx="164592" cy="502920"/>
-          </a:xfrm>
-          <a:prstGeom prst="rect">
-            <a:avLst/>
-          </a:prstGeom>
-          <a:noFill/>
-          <a:ln/>
-        </p:spPr>
-        <p:txBody>
-          <a:bodyPr wrap="square" lIns="0" tIns="0" rIns="0" bIns="0" rtlCol="0" anchor="ctr"/>
-          <a:lstStyle/>
+          </a:p>
           <a:p>
             <a:pPr marL="0" indent="0" algn="ctr">
               <a:buNone/>
             </a:pPr>
             <a:r>
-              <a:rPr lang="en-US" sz="1000" dirty="0">
+              <a:rPr lang="en-US" sz="750" kern="0" dirty="0">
                 <a:solidFill>
                   <a:srgbClr val="3B82F6"/>
                 </a:solidFill>
@@ -3844,22 +3754,135 @@
                 <a:ea typeface="Inter" pitchFamily="34" charset="-122"/>
                 <a:cs typeface="Inter" pitchFamily="34" charset="-120"/>
               </a:rPr>
-              <a:t>→</a:t>
-            </a:r>
-            <a:endParaRPr lang="en-US" sz="1000" dirty="0"/>
-          </a:p>
-        </p:txBody>
-      </p:sp>
-      <p:sp>
-        <p:nvSpPr>
-          <p:cNvPr id="9" name="Shape 7"/>
-          <p:cNvSpPr/>
-          <p:nvPr/>
-        </p:nvSpPr>
-        <p:spPr>
-          <a:xfrm>
-            <a:off x="1499616" y="2103120"/>
-            <a:ext cx="932688" cy="502920"/>
+              <a:t>/plan-feature</a:t>
+            </a:r>
+          </a:p>
+        </p:txBody>
+      </p:sp>
+      <p:sp>
+        <p:nvSpPr>
+          <p:cNvPr id="6" name="Text"/>
+          <p:cNvSpPr/>
+          <p:nvPr/>
+        </p:nvSpPr>
+        <p:spPr>
+          <a:xfrm>
+            <a:off x="1911640" y="1620000"/>
+            <a:ext cx="6775160" cy="560000"/>
+          </a:xfrm>
+          <a:prstGeom prst="rect">
+            <a:avLst/>
+          </a:prstGeom>
+          <a:noFill/>
+          <a:ln/>
+        </p:spPr>
+        <p:txBody>
+          <a:bodyPr wrap="square" lIns="0" tIns="0" rIns="0" bIns="0" rtlCol="0" anchor="ctr"/>
+          <a:lstStyle/>
+          <a:p>
+            <a:pPr marL="0" indent="0" algn="l">
+              <a:buNone/>
+            </a:pPr>
+            <a:r>
+              <a:rPr lang="en-US" sz="1200" kern="0" dirty="0">
+                <a:solidFill>
+                  <a:srgbClr val="94A3B8"/>
+                </a:solidFill>
+                <a:latin typeface="Inter" pitchFamily="34" charset="0"/>
+                <a:ea typeface="Inter" pitchFamily="34" charset="-122"/>
+                <a:cs typeface="Inter" pitchFamily="34" charset="-120"/>
+              </a:rPr>
+              <a:t>define AC-1 … AC-6 before writing any code</a:t>
+            </a:r>
+          </a:p>
+        </p:txBody>
+      </p:sp>
+      <p:sp>
+        <p:nvSpPr>
+          <p:cNvPr id="7" name="Text"/>
+          <p:cNvSpPr/>
+          <p:nvPr/>
+        </p:nvSpPr>
+        <p:spPr>
+          <a:xfrm>
+            <a:off x="4472000" y="2200000"/>
+            <a:ext cx="200000" cy="170000"/>
+          </a:xfrm>
+          <a:prstGeom prst="rect">
+            <a:avLst/>
+          </a:prstGeom>
+          <a:noFill/>
+          <a:ln/>
+        </p:spPr>
+        <p:txBody>
+          <a:bodyPr wrap="square" lIns="0" tIns="0" rIns="0" bIns="0" rtlCol="0" anchor="ctr"/>
+          <a:lstStyle/>
+          <a:p>
+            <a:pPr marL="0" indent="0" algn="ctr">
+              <a:buNone/>
+            </a:pPr>
+            <a:r>
+              <a:rPr lang="en-US" sz="1400" kern="0" dirty="0">
+                <a:solidFill>
+                  <a:srgbClr val="3B82F6"/>
+                </a:solidFill>
+                <a:latin typeface="Inter" pitchFamily="34" charset="0"/>
+                <a:ea typeface="Inter" pitchFamily="34" charset="-122"/>
+                <a:cs typeface="Inter" pitchFamily="34" charset="-120"/>
+              </a:rPr>
+              <a:t>↓</a:t>
+            </a:r>
+          </a:p>
+        </p:txBody>
+      </p:sp>
+      <p:sp>
+        <p:nvSpPr>
+          <p:cNvPr id="8" name="Text"/>
+          <p:cNvSpPr/>
+          <p:nvPr/>
+        </p:nvSpPr>
+        <p:spPr>
+          <a:xfrm>
+            <a:off x="457200" y="2370000"/>
+            <a:ext cx="8229600" cy="180000"/>
+          </a:xfrm>
+          <a:prstGeom prst="rect">
+            <a:avLst/>
+          </a:prstGeom>
+          <a:noFill/>
+          <a:ln/>
+        </p:spPr>
+        <p:txBody>
+          <a:bodyPr wrap="square" lIns="0" tIns="0" rIns="0" bIns="0" rtlCol="0" anchor="ctr"/>
+          <a:lstStyle/>
+          <a:p>
+            <a:pPr marL="0" indent="0" algn="l">
+              <a:buNone/>
+            </a:pPr>
+            <a:r>
+              <a:rPr lang="en-US" sz="900" b="1" kern="0" spc="200" dirty="0">
+                <a:solidFill>
+                  <a:srgbClr val="3B82F6"/>
+                </a:solidFill>
+                <a:latin typeface="Inter" pitchFamily="34" charset="0"/>
+                <a:ea typeface="Inter" pitchFamily="34" charset="-122"/>
+                <a:cs typeface="Inter" pitchFamily="34" charset="-120"/>
+              </a:rPr>
+              <a:t>FOR EACH STEP IN THE PLAN</a:t>
+            </a:r>
+          </a:p>
+        </p:txBody>
+      </p:sp>
+      <p:sp>
+        <p:nvSpPr>
+          <p:cNvPr id="9" name="Pill"/>
+          <p:cNvSpPr/>
+          <p:nvPr/>
+        </p:nvSpPr>
+        <p:spPr>
+          <a:xfrm>
+            <a:off x="457200" y="2550000"/>
+            <a:ext cx="1234440" cy="560000"/>
           </a:xfrm>
           <a:prstGeom prst="roundRect">
             <a:avLst>
@@ -3877,39 +3900,14 @@
           </a:ln>
         </p:spPr>
         <p:txBody>
-          <a:bodyPr/>
-          <a:lstStyle/>
-          <a:p>
-            <a:endParaRPr/>
-          </a:p>
-        </p:txBody>
-      </p:sp>
-      <p:sp>
-        <p:nvSpPr>
-          <p:cNvPr id="10" name="Text 8"/>
-          <p:cNvSpPr/>
-          <p:nvPr/>
-        </p:nvSpPr>
-        <p:spPr>
-          <a:xfrm>
-            <a:off x="1499616" y="2103120"/>
-            <a:ext cx="932688" cy="502920"/>
-          </a:xfrm>
-          <a:prstGeom prst="rect">
-            <a:avLst/>
-          </a:prstGeom>
-          <a:noFill/>
-          <a:ln/>
-        </p:spPr>
-        <p:txBody>
-          <a:bodyPr wrap="square" lIns="0" tIns="0" rIns="0" bIns="0" rtlCol="0" anchor="ctr"/>
+          <a:bodyPr wrap="square" lIns="36000" tIns="0" rIns="36000" bIns="0" rtlCol="0" anchor="ctr"/>
           <a:lstStyle/>
           <a:p>
             <a:pPr marL="0" indent="0" algn="ctr">
               <a:buNone/>
             </a:pPr>
             <a:r>
-              <a:rPr lang="en-US" sz="1100" b="1" dirty="0">
+              <a:rPr lang="en-US" sz="1050" b="1" kern="0" dirty="0">
                 <a:solidFill>
                   <a:srgbClr val="F8FAFC"/>
                 </a:solidFill>
@@ -3919,36 +3917,13 @@
               </a:rPr>
               <a:t>explore</a:t>
             </a:r>
-            <a:endParaRPr lang="en-US" sz="1100" dirty="0"/>
-          </a:p>
-        </p:txBody>
-      </p:sp>
-      <p:sp>
-        <p:nvSpPr>
-          <p:cNvPr id="11" name="Text 9"/>
-          <p:cNvSpPr/>
-          <p:nvPr/>
-        </p:nvSpPr>
-        <p:spPr>
-          <a:xfrm>
-            <a:off x="2414016" y="2103120"/>
-            <a:ext cx="164592" cy="502920"/>
-          </a:xfrm>
-          <a:prstGeom prst="rect">
-            <a:avLst/>
-          </a:prstGeom>
-          <a:noFill/>
-          <a:ln/>
-        </p:spPr>
-        <p:txBody>
-          <a:bodyPr wrap="square" lIns="0" tIns="0" rIns="0" bIns="0" rtlCol="0" anchor="ctr"/>
-          <a:lstStyle/>
+          </a:p>
           <a:p>
             <a:pPr marL="0" indent="0" algn="ctr">
               <a:buNone/>
             </a:pPr>
             <a:r>
-              <a:rPr lang="en-US" sz="1000" dirty="0">
+              <a:rPr lang="en-US" sz="750" kern="0" dirty="0">
                 <a:solidFill>
                   <a:srgbClr val="3B82F6"/>
                 </a:solidFill>
@@ -3956,22 +3931,59 @@
                 <a:ea typeface="Inter" pitchFamily="34" charset="-122"/>
                 <a:cs typeface="Inter" pitchFamily="34" charset="-120"/>
               </a:rPr>
+              <a:t>/explore-codebase</a:t>
+            </a:r>
+          </a:p>
+        </p:txBody>
+      </p:sp>
+      <p:sp>
+        <p:nvSpPr>
+          <p:cNvPr id="10" name="Arrow"/>
+          <p:cNvSpPr/>
+          <p:nvPr/>
+        </p:nvSpPr>
+        <p:spPr>
+          <a:xfrm>
+            <a:off x="1691640" y="2550000"/>
+            <a:ext cx="164592" cy="560000"/>
+          </a:xfrm>
+          <a:prstGeom prst="rect">
+            <a:avLst/>
+          </a:prstGeom>
+          <a:noFill/>
+          <a:ln/>
+        </p:spPr>
+        <p:txBody>
+          <a:bodyPr wrap="square" lIns="0" tIns="0" rIns="0" bIns="0" rtlCol="0" anchor="ctr"/>
+          <a:lstStyle/>
+          <a:p>
+            <a:pPr marL="0" indent="0" algn="ctr">
+              <a:buNone/>
+            </a:pPr>
+            <a:r>
+              <a:rPr lang="en-US" sz="1000" kern="0" dirty="0">
+                <a:solidFill>
+                  <a:srgbClr val="3B82F6"/>
+                </a:solidFill>
+                <a:latin typeface="Inter" pitchFamily="34" charset="0"/>
+                <a:ea typeface="Inter" pitchFamily="34" charset="-122"/>
+                <a:cs typeface="Inter" pitchFamily="34" charset="-120"/>
+              </a:rPr>
               <a:t>→</a:t>
             </a:r>
-            <a:endParaRPr lang="en-US" sz="1000" dirty="0"/>
-          </a:p>
-        </p:txBody>
-      </p:sp>
-      <p:sp>
-        <p:nvSpPr>
-          <p:cNvPr id="12" name="Shape 10"/>
-          <p:cNvSpPr/>
-          <p:nvPr/>
-        </p:nvSpPr>
-        <p:spPr>
-          <a:xfrm>
-            <a:off x="2542032" y="2103120"/>
-            <a:ext cx="932688" cy="502920"/>
+          </a:p>
+        </p:txBody>
+      </p:sp>
+      <p:sp>
+        <p:nvSpPr>
+          <p:cNvPr id="11" name="Pill"/>
+          <p:cNvSpPr/>
+          <p:nvPr/>
+        </p:nvSpPr>
+        <p:spPr>
+          <a:xfrm>
+            <a:off x="1856232" y="2550000"/>
+            <a:ext cx="1234440" cy="560000"/>
           </a:xfrm>
           <a:prstGeom prst="roundRect">
             <a:avLst>
@@ -3989,39 +4001,14 @@
           </a:ln>
         </p:spPr>
         <p:txBody>
-          <a:bodyPr/>
-          <a:lstStyle/>
-          <a:p>
-            <a:endParaRPr/>
-          </a:p>
-        </p:txBody>
-      </p:sp>
-      <p:sp>
-        <p:nvSpPr>
-          <p:cNvPr id="13" name="Text 11"/>
-          <p:cNvSpPr/>
-          <p:nvPr/>
-        </p:nvSpPr>
-        <p:spPr>
-          <a:xfrm>
-            <a:off x="2542032" y="2103120"/>
-            <a:ext cx="932688" cy="502920"/>
-          </a:xfrm>
-          <a:prstGeom prst="rect">
-            <a:avLst/>
-          </a:prstGeom>
-          <a:noFill/>
-          <a:ln/>
-        </p:spPr>
-        <p:txBody>
-          <a:bodyPr wrap="square" lIns="0" tIns="0" rIns="0" bIns="0" rtlCol="0" anchor="ctr"/>
+          <a:bodyPr wrap="square" lIns="36000" tIns="0" rIns="36000" bIns="0" rtlCol="0" anchor="ctr"/>
           <a:lstStyle/>
           <a:p>
             <a:pPr marL="0" indent="0" algn="ctr">
               <a:buNone/>
             </a:pPr>
             <a:r>
-              <a:rPr lang="en-US" sz="1100" b="1" dirty="0">
+              <a:rPr lang="en-US" sz="1050" b="1" kern="0" dirty="0">
                 <a:solidFill>
                   <a:srgbClr val="F8FAFC"/>
                 </a:solidFill>
@@ -4031,36 +4018,13 @@
               </a:rPr>
               <a:t>implement</a:t>
             </a:r>
-            <a:endParaRPr lang="en-US" sz="1100" dirty="0"/>
-          </a:p>
-        </p:txBody>
-      </p:sp>
-      <p:sp>
-        <p:nvSpPr>
-          <p:cNvPr id="14" name="Text 12"/>
-          <p:cNvSpPr/>
-          <p:nvPr/>
-        </p:nvSpPr>
-        <p:spPr>
-          <a:xfrm>
-            <a:off x="3456432" y="2103120"/>
-            <a:ext cx="164592" cy="502920"/>
-          </a:xfrm>
-          <a:prstGeom prst="rect">
-            <a:avLst/>
-          </a:prstGeom>
-          <a:noFill/>
-          <a:ln/>
-        </p:spPr>
-        <p:txBody>
-          <a:bodyPr wrap="square" lIns="0" tIns="0" rIns="0" bIns="0" rtlCol="0" anchor="ctr"/>
-          <a:lstStyle/>
+          </a:p>
           <a:p>
             <a:pPr marL="0" indent="0" algn="ctr">
               <a:buNone/>
             </a:pPr>
             <a:r>
-              <a:rPr lang="en-US" sz="1000" dirty="0">
+              <a:rPr lang="en-US" sz="750" kern="0" dirty="0">
                 <a:solidFill>
                   <a:srgbClr val="3B82F6"/>
                 </a:solidFill>
@@ -4068,22 +4032,59 @@
                 <a:ea typeface="Inter" pitchFamily="34" charset="-122"/>
                 <a:cs typeface="Inter" pitchFamily="34" charset="-120"/>
               </a:rPr>
+              <a:t>/new-endpoint</a:t>
+            </a:r>
+          </a:p>
+        </p:txBody>
+      </p:sp>
+      <p:sp>
+        <p:nvSpPr>
+          <p:cNvPr id="12" name="Arrow"/>
+          <p:cNvSpPr/>
+          <p:nvPr/>
+        </p:nvSpPr>
+        <p:spPr>
+          <a:xfrm>
+            <a:off x="3090672" y="2550000"/>
+            <a:ext cx="164592" cy="560000"/>
+          </a:xfrm>
+          <a:prstGeom prst="rect">
+            <a:avLst/>
+          </a:prstGeom>
+          <a:noFill/>
+          <a:ln/>
+        </p:spPr>
+        <p:txBody>
+          <a:bodyPr wrap="square" lIns="0" tIns="0" rIns="0" bIns="0" rtlCol="0" anchor="ctr"/>
+          <a:lstStyle/>
+          <a:p>
+            <a:pPr marL="0" indent="0" algn="ctr">
+              <a:buNone/>
+            </a:pPr>
+            <a:r>
+              <a:rPr lang="en-US" sz="1000" kern="0" dirty="0">
+                <a:solidFill>
+                  <a:srgbClr val="3B82F6"/>
+                </a:solidFill>
+                <a:latin typeface="Inter" pitchFamily="34" charset="0"/>
+                <a:ea typeface="Inter" pitchFamily="34" charset="-122"/>
+                <a:cs typeface="Inter" pitchFamily="34" charset="-120"/>
+              </a:rPr>
               <a:t>→</a:t>
             </a:r>
-            <a:endParaRPr lang="en-US" sz="1000" dirty="0"/>
-          </a:p>
-        </p:txBody>
-      </p:sp>
-      <p:sp>
-        <p:nvSpPr>
-          <p:cNvPr id="15" name="Shape 13"/>
-          <p:cNvSpPr/>
-          <p:nvPr/>
-        </p:nvSpPr>
-        <p:spPr>
-          <a:xfrm>
-            <a:off x="3584448" y="2103120"/>
-            <a:ext cx="932688" cy="502920"/>
+          </a:p>
+        </p:txBody>
+      </p:sp>
+      <p:sp>
+        <p:nvSpPr>
+          <p:cNvPr id="13" name="Pill"/>
+          <p:cNvSpPr/>
+          <p:nvPr/>
+        </p:nvSpPr>
+        <p:spPr>
+          <a:xfrm>
+            <a:off x="3255264" y="2550000"/>
+            <a:ext cx="1234440" cy="560000"/>
           </a:xfrm>
           <a:prstGeom prst="roundRect">
             <a:avLst>
@@ -4101,39 +4102,14 @@
           </a:ln>
         </p:spPr>
         <p:txBody>
-          <a:bodyPr/>
-          <a:lstStyle/>
-          <a:p>
-            <a:endParaRPr/>
-          </a:p>
-        </p:txBody>
-      </p:sp>
-      <p:sp>
-        <p:nvSpPr>
-          <p:cNvPr id="16" name="Text 14"/>
-          <p:cNvSpPr/>
-          <p:nvPr/>
-        </p:nvSpPr>
-        <p:spPr>
-          <a:xfrm>
-            <a:off x="3584448" y="2103120"/>
-            <a:ext cx="932688" cy="502920"/>
-          </a:xfrm>
-          <a:prstGeom prst="rect">
-            <a:avLst/>
-          </a:prstGeom>
-          <a:noFill/>
-          <a:ln/>
-        </p:spPr>
-        <p:txBody>
-          <a:bodyPr wrap="square" lIns="0" tIns="0" rIns="0" bIns="0" rtlCol="0" anchor="ctr"/>
+          <a:bodyPr wrap="square" lIns="36000" tIns="0" rIns="36000" bIns="0" rtlCol="0" anchor="ctr"/>
           <a:lstStyle/>
           <a:p>
             <a:pPr marL="0" indent="0" algn="ctr">
               <a:buNone/>
             </a:pPr>
             <a:r>
-              <a:rPr lang="en-US" sz="1100" b="1" dirty="0">
+              <a:rPr lang="en-US" sz="1050" b="1" kern="0" dirty="0">
                 <a:solidFill>
                   <a:srgbClr val="F8FAFC"/>
                 </a:solidFill>
@@ -4143,36 +4119,13 @@
               </a:rPr>
               <a:t>test</a:t>
             </a:r>
-            <a:endParaRPr lang="en-US" sz="1100" dirty="0"/>
-          </a:p>
-        </p:txBody>
-      </p:sp>
-      <p:sp>
-        <p:nvSpPr>
-          <p:cNvPr id="17" name="Text 15"/>
-          <p:cNvSpPr/>
-          <p:nvPr/>
-        </p:nvSpPr>
-        <p:spPr>
-          <a:xfrm>
-            <a:off x="4498848" y="2103120"/>
-            <a:ext cx="164592" cy="502920"/>
-          </a:xfrm>
-          <a:prstGeom prst="rect">
-            <a:avLst/>
-          </a:prstGeom>
-          <a:noFill/>
-          <a:ln/>
-        </p:spPr>
-        <p:txBody>
-          <a:bodyPr wrap="square" lIns="0" tIns="0" rIns="0" bIns="0" rtlCol="0" anchor="ctr"/>
-          <a:lstStyle/>
+          </a:p>
           <a:p>
             <a:pPr marL="0" indent="0" algn="ctr">
               <a:buNone/>
             </a:pPr>
             <a:r>
-              <a:rPr lang="en-US" sz="1000" dirty="0">
+              <a:rPr lang="en-US" sz="750" kern="0" dirty="0">
                 <a:solidFill>
                   <a:srgbClr val="3B82F6"/>
                 </a:solidFill>
@@ -4180,22 +4133,59 @@
                 <a:ea typeface="Inter" pitchFamily="34" charset="-122"/>
                 <a:cs typeface="Inter" pitchFamily="34" charset="-120"/>
               </a:rPr>
+              <a:t>make test</a:t>
+            </a:r>
+          </a:p>
+        </p:txBody>
+      </p:sp>
+      <p:sp>
+        <p:nvSpPr>
+          <p:cNvPr id="14" name="Arrow"/>
+          <p:cNvSpPr/>
+          <p:nvPr/>
+        </p:nvSpPr>
+        <p:spPr>
+          <a:xfrm>
+            <a:off x="4489704" y="2550000"/>
+            <a:ext cx="164592" cy="560000"/>
+          </a:xfrm>
+          <a:prstGeom prst="rect">
+            <a:avLst/>
+          </a:prstGeom>
+          <a:noFill/>
+          <a:ln/>
+        </p:spPr>
+        <p:txBody>
+          <a:bodyPr wrap="square" lIns="0" tIns="0" rIns="0" bIns="0" rtlCol="0" anchor="ctr"/>
+          <a:lstStyle/>
+          <a:p>
+            <a:pPr marL="0" indent="0" algn="ctr">
+              <a:buNone/>
+            </a:pPr>
+            <a:r>
+              <a:rPr lang="en-US" sz="1000" kern="0" dirty="0">
+                <a:solidFill>
+                  <a:srgbClr val="3B82F6"/>
+                </a:solidFill>
+                <a:latin typeface="Inter" pitchFamily="34" charset="0"/>
+                <a:ea typeface="Inter" pitchFamily="34" charset="-122"/>
+                <a:cs typeface="Inter" pitchFamily="34" charset="-120"/>
+              </a:rPr>
               <a:t>→</a:t>
             </a:r>
-            <a:endParaRPr lang="en-US" sz="1000" dirty="0"/>
-          </a:p>
-        </p:txBody>
-      </p:sp>
-      <p:sp>
-        <p:nvSpPr>
-          <p:cNvPr id="18" name="Shape 16"/>
-          <p:cNvSpPr/>
-          <p:nvPr/>
-        </p:nvSpPr>
-        <p:spPr>
-          <a:xfrm>
-            <a:off x="4626864" y="2103120"/>
-            <a:ext cx="932688" cy="502920"/>
+          </a:p>
+        </p:txBody>
+      </p:sp>
+      <p:sp>
+        <p:nvSpPr>
+          <p:cNvPr id="15" name="Pill"/>
+          <p:cNvSpPr/>
+          <p:nvPr/>
+        </p:nvSpPr>
+        <p:spPr>
+          <a:xfrm>
+            <a:off x="4654296" y="2550000"/>
+            <a:ext cx="1234440" cy="560000"/>
           </a:xfrm>
           <a:prstGeom prst="roundRect">
             <a:avLst>
@@ -4213,39 +4203,14 @@
           </a:ln>
         </p:spPr>
         <p:txBody>
-          <a:bodyPr/>
-          <a:lstStyle/>
-          <a:p>
-            <a:endParaRPr/>
-          </a:p>
-        </p:txBody>
-      </p:sp>
-      <p:sp>
-        <p:nvSpPr>
-          <p:cNvPr id="19" name="Text 17"/>
-          <p:cNvSpPr/>
-          <p:nvPr/>
-        </p:nvSpPr>
-        <p:spPr>
-          <a:xfrm>
-            <a:off x="4626864" y="2103120"/>
-            <a:ext cx="932688" cy="502920"/>
-          </a:xfrm>
-          <a:prstGeom prst="rect">
-            <a:avLst/>
-          </a:prstGeom>
-          <a:noFill/>
-          <a:ln/>
-        </p:spPr>
-        <p:txBody>
-          <a:bodyPr wrap="square" lIns="0" tIns="0" rIns="0" bIns="0" rtlCol="0" anchor="ctr"/>
+          <a:bodyPr wrap="square" lIns="36000" tIns="0" rIns="36000" bIns="0" rtlCol="0" anchor="ctr"/>
           <a:lstStyle/>
           <a:p>
             <a:pPr marL="0" indent="0" algn="ctr">
               <a:buNone/>
             </a:pPr>
             <a:r>
-              <a:rPr lang="en-US" sz="1100" b="1" dirty="0">
+              <a:rPr lang="en-US" sz="1050" b="1" kern="0" dirty="0">
                 <a:solidFill>
                   <a:srgbClr val="F8FAFC"/>
                 </a:solidFill>
@@ -4255,36 +4220,13 @@
               </a:rPr>
               <a:t>review</a:t>
             </a:r>
-            <a:endParaRPr lang="en-US" sz="1100" dirty="0"/>
-          </a:p>
-        </p:txBody>
-      </p:sp>
-      <p:sp>
-        <p:nvSpPr>
-          <p:cNvPr id="20" name="Text 18"/>
-          <p:cNvSpPr/>
-          <p:nvPr/>
-        </p:nvSpPr>
-        <p:spPr>
-          <a:xfrm>
-            <a:off x="5541264" y="2103120"/>
-            <a:ext cx="164592" cy="502920"/>
-          </a:xfrm>
-          <a:prstGeom prst="rect">
-            <a:avLst/>
-          </a:prstGeom>
-          <a:noFill/>
-          <a:ln/>
-        </p:spPr>
-        <p:txBody>
-          <a:bodyPr wrap="square" lIns="0" tIns="0" rIns="0" bIns="0" rtlCol="0" anchor="ctr"/>
-          <a:lstStyle/>
+          </a:p>
           <a:p>
             <a:pPr marL="0" indent="0" algn="ctr">
               <a:buNone/>
             </a:pPr>
             <a:r>
-              <a:rPr lang="en-US" sz="1000" dirty="0">
+              <a:rPr lang="en-US" sz="750" kern="0" dirty="0">
                 <a:solidFill>
                   <a:srgbClr val="3B82F6"/>
                 </a:solidFill>
@@ -4292,22 +4234,59 @@
                 <a:ea typeface="Inter" pitchFamily="34" charset="-122"/>
                 <a:cs typeface="Inter" pitchFamily="34" charset="-120"/>
               </a:rPr>
+              <a:t>/simplify</a:t>
+            </a:r>
+          </a:p>
+        </p:txBody>
+      </p:sp>
+      <p:sp>
+        <p:nvSpPr>
+          <p:cNvPr id="16" name="Arrow"/>
+          <p:cNvSpPr/>
+          <p:nvPr/>
+        </p:nvSpPr>
+        <p:spPr>
+          <a:xfrm>
+            <a:off x="5888736" y="2550000"/>
+            <a:ext cx="164592" cy="560000"/>
+          </a:xfrm>
+          <a:prstGeom prst="rect">
+            <a:avLst/>
+          </a:prstGeom>
+          <a:noFill/>
+          <a:ln/>
+        </p:spPr>
+        <p:txBody>
+          <a:bodyPr wrap="square" lIns="0" tIns="0" rIns="0" bIns="0" rtlCol="0" anchor="ctr"/>
+          <a:lstStyle/>
+          <a:p>
+            <a:pPr marL="0" indent="0" algn="ctr">
+              <a:buNone/>
+            </a:pPr>
+            <a:r>
+              <a:rPr lang="en-US" sz="1000" kern="0" dirty="0">
+                <a:solidFill>
+                  <a:srgbClr val="3B82F6"/>
+                </a:solidFill>
+                <a:latin typeface="Inter" pitchFamily="34" charset="0"/>
+                <a:ea typeface="Inter" pitchFamily="34" charset="-122"/>
+                <a:cs typeface="Inter" pitchFamily="34" charset="-120"/>
+              </a:rPr>
               <a:t>→</a:t>
             </a:r>
-            <a:endParaRPr lang="en-US" sz="1000" dirty="0"/>
-          </a:p>
-        </p:txBody>
-      </p:sp>
-      <p:sp>
-        <p:nvSpPr>
-          <p:cNvPr id="21" name="Shape 19"/>
-          <p:cNvSpPr/>
-          <p:nvPr/>
-        </p:nvSpPr>
-        <p:spPr>
-          <a:xfrm>
-            <a:off x="5669280" y="2103120"/>
-            <a:ext cx="932688" cy="502920"/>
+          </a:p>
+        </p:txBody>
+      </p:sp>
+      <p:sp>
+        <p:nvSpPr>
+          <p:cNvPr id="17" name="Pill"/>
+          <p:cNvSpPr/>
+          <p:nvPr/>
+        </p:nvSpPr>
+        <p:spPr>
+          <a:xfrm>
+            <a:off x="6053328" y="2550000"/>
+            <a:ext cx="1234440" cy="560000"/>
           </a:xfrm>
           <a:prstGeom prst="roundRect">
             <a:avLst>
@@ -4325,39 +4304,14 @@
           </a:ln>
         </p:spPr>
         <p:txBody>
-          <a:bodyPr/>
-          <a:lstStyle/>
-          <a:p>
-            <a:endParaRPr/>
-          </a:p>
-        </p:txBody>
-      </p:sp>
-      <p:sp>
-        <p:nvSpPr>
-          <p:cNvPr id="22" name="Text 20"/>
-          <p:cNvSpPr/>
-          <p:nvPr/>
-        </p:nvSpPr>
-        <p:spPr>
-          <a:xfrm>
-            <a:off x="5669280" y="2103120"/>
-            <a:ext cx="932688" cy="502920"/>
-          </a:xfrm>
-          <a:prstGeom prst="rect">
-            <a:avLst/>
-          </a:prstGeom>
-          <a:noFill/>
-          <a:ln/>
-        </p:spPr>
-        <p:txBody>
-          <a:bodyPr wrap="square" lIns="0" tIns="0" rIns="0" bIns="0" rtlCol="0" anchor="ctr"/>
+          <a:bodyPr wrap="square" lIns="36000" tIns="0" rIns="36000" bIns="0" rtlCol="0" anchor="ctr"/>
           <a:lstStyle/>
           <a:p>
             <a:pPr marL="0" indent="0" algn="ctr">
               <a:buNone/>
             </a:pPr>
             <a:r>
-              <a:rPr lang="en-US" sz="1100" b="1" dirty="0">
+              <a:rPr lang="en-US" sz="1050" b="1" kern="0" dirty="0">
                 <a:solidFill>
                   <a:srgbClr val="F8FAFC"/>
                 </a:solidFill>
@@ -4367,36 +4321,13 @@
               </a:rPr>
               <a:t>audit</a:t>
             </a:r>
-            <a:endParaRPr lang="en-US" sz="1100" dirty="0"/>
-          </a:p>
-        </p:txBody>
-      </p:sp>
-      <p:sp>
-        <p:nvSpPr>
-          <p:cNvPr id="23" name="Text 21"/>
-          <p:cNvSpPr/>
-          <p:nvPr/>
-        </p:nvSpPr>
-        <p:spPr>
-          <a:xfrm>
-            <a:off x="6583680" y="2103120"/>
-            <a:ext cx="164592" cy="502920"/>
-          </a:xfrm>
-          <a:prstGeom prst="rect">
-            <a:avLst/>
-          </a:prstGeom>
-          <a:noFill/>
-          <a:ln/>
-        </p:spPr>
-        <p:txBody>
-          <a:bodyPr wrap="square" lIns="0" tIns="0" rIns="0" bIns="0" rtlCol="0" anchor="ctr"/>
-          <a:lstStyle/>
+          </a:p>
           <a:p>
             <a:pPr marL="0" indent="0" algn="ctr">
               <a:buNone/>
             </a:pPr>
             <a:r>
-              <a:rPr lang="en-US" sz="1000" dirty="0">
+              <a:rPr lang="en-US" sz="750" kern="0" dirty="0">
                 <a:solidFill>
                   <a:srgbClr val="3B82F6"/>
                 </a:solidFill>
@@ -4404,22 +4335,59 @@
                 <a:ea typeface="Inter" pitchFamily="34" charset="-122"/>
                 <a:cs typeface="Inter" pitchFamily="34" charset="-120"/>
               </a:rPr>
+              <a:t>/audit-security</a:t>
+            </a:r>
+          </a:p>
+        </p:txBody>
+      </p:sp>
+      <p:sp>
+        <p:nvSpPr>
+          <p:cNvPr id="18" name="Arrow"/>
+          <p:cNvSpPr/>
+          <p:nvPr/>
+        </p:nvSpPr>
+        <p:spPr>
+          <a:xfrm>
+            <a:off x="7287768" y="2550000"/>
+            <a:ext cx="164592" cy="560000"/>
+          </a:xfrm>
+          <a:prstGeom prst="rect">
+            <a:avLst/>
+          </a:prstGeom>
+          <a:noFill/>
+          <a:ln/>
+        </p:spPr>
+        <p:txBody>
+          <a:bodyPr wrap="square" lIns="0" tIns="0" rIns="0" bIns="0" rtlCol="0" anchor="ctr"/>
+          <a:lstStyle/>
+          <a:p>
+            <a:pPr marL="0" indent="0" algn="ctr">
+              <a:buNone/>
+            </a:pPr>
+            <a:r>
+              <a:rPr lang="en-US" sz="1000" kern="0" dirty="0">
+                <a:solidFill>
+                  <a:srgbClr val="3B82F6"/>
+                </a:solidFill>
+                <a:latin typeface="Inter" pitchFamily="34" charset="0"/>
+                <a:ea typeface="Inter" pitchFamily="34" charset="-122"/>
+                <a:cs typeface="Inter" pitchFamily="34" charset="-120"/>
+              </a:rPr>
               <a:t>→</a:t>
             </a:r>
-            <a:endParaRPr lang="en-US" sz="1000" dirty="0"/>
-          </a:p>
-        </p:txBody>
-      </p:sp>
-      <p:sp>
-        <p:nvSpPr>
-          <p:cNvPr id="24" name="Shape 22"/>
-          <p:cNvSpPr/>
-          <p:nvPr/>
-        </p:nvSpPr>
-        <p:spPr>
-          <a:xfrm>
-            <a:off x="6711696" y="2103120"/>
-            <a:ext cx="932688" cy="502920"/>
+          </a:p>
+        </p:txBody>
+      </p:sp>
+      <p:sp>
+        <p:nvSpPr>
+          <p:cNvPr id="19" name="Pill"/>
+          <p:cNvSpPr/>
+          <p:nvPr/>
+        </p:nvSpPr>
+        <p:spPr>
+          <a:xfrm>
+            <a:off x="7452360" y="2550000"/>
+            <a:ext cx="1234440" cy="560000"/>
           </a:xfrm>
           <a:prstGeom prst="roundRect">
             <a:avLst>
@@ -4437,39 +4405,14 @@
           </a:ln>
         </p:spPr>
         <p:txBody>
-          <a:bodyPr/>
-          <a:lstStyle/>
-          <a:p>
-            <a:endParaRPr/>
-          </a:p>
-        </p:txBody>
-      </p:sp>
-      <p:sp>
-        <p:nvSpPr>
-          <p:cNvPr id="25" name="Text 23"/>
-          <p:cNvSpPr/>
-          <p:nvPr/>
-        </p:nvSpPr>
-        <p:spPr>
-          <a:xfrm>
-            <a:off x="6711696" y="2103120"/>
-            <a:ext cx="932688" cy="502920"/>
-          </a:xfrm>
-          <a:prstGeom prst="rect">
-            <a:avLst/>
-          </a:prstGeom>
-          <a:noFill/>
-          <a:ln/>
-        </p:spPr>
-        <p:txBody>
-          <a:bodyPr wrap="square" lIns="0" tIns="0" rIns="0" bIns="0" rtlCol="0" anchor="ctr"/>
+          <a:bodyPr wrap="square" lIns="36000" tIns="0" rIns="36000" bIns="0" rtlCol="0" anchor="ctr"/>
           <a:lstStyle/>
           <a:p>
             <a:pPr marL="0" indent="0" algn="ctr">
               <a:buNone/>
             </a:pPr>
             <a:r>
-              <a:rPr lang="en-US" sz="1100" b="1" dirty="0">
+              <a:rPr lang="en-US" sz="1050" b="1" kern="0" dirty="0">
                 <a:solidFill>
                   <a:srgbClr val="F8FAFC"/>
                 </a:solidFill>
@@ -4479,36 +4422,13 @@
               </a:rPr>
               <a:t>commit</a:t>
             </a:r>
-            <a:endParaRPr lang="en-US" sz="1100" dirty="0"/>
-          </a:p>
-        </p:txBody>
-      </p:sp>
-      <p:sp>
-        <p:nvSpPr>
-          <p:cNvPr id="26" name="Text 24"/>
-          <p:cNvSpPr/>
-          <p:nvPr/>
-        </p:nvSpPr>
-        <p:spPr>
-          <a:xfrm>
-            <a:off x="7626096" y="2103120"/>
-            <a:ext cx="164592" cy="502920"/>
-          </a:xfrm>
-          <a:prstGeom prst="rect">
-            <a:avLst/>
-          </a:prstGeom>
-          <a:noFill/>
-          <a:ln/>
-        </p:spPr>
-        <p:txBody>
-          <a:bodyPr wrap="square" lIns="0" tIns="0" rIns="0" bIns="0" rtlCol="0" anchor="ctr"/>
-          <a:lstStyle/>
+          </a:p>
           <a:p>
             <a:pPr marL="0" indent="0" algn="ctr">
               <a:buNone/>
             </a:pPr>
             <a:r>
-              <a:rPr lang="en-US" sz="1000" dirty="0">
+              <a:rPr lang="en-US" sz="750" kern="0" dirty="0">
                 <a:solidFill>
                   <a:srgbClr val="3B82F6"/>
                 </a:solidFill>
@@ -4516,22 +4436,135 @@
                 <a:ea typeface="Inter" pitchFamily="34" charset="-122"/>
                 <a:cs typeface="Inter" pitchFamily="34" charset="-120"/>
               </a:rPr>
-              <a:t>→</a:t>
-            </a:r>
-            <a:endParaRPr lang="en-US" sz="1000" dirty="0"/>
-          </a:p>
-        </p:txBody>
-      </p:sp>
-      <p:sp>
-        <p:nvSpPr>
-          <p:cNvPr id="27" name="Shape 25"/>
-          <p:cNvSpPr/>
-          <p:nvPr/>
-        </p:nvSpPr>
-        <p:spPr>
-          <a:xfrm>
-            <a:off x="7754112" y="2103120"/>
-            <a:ext cx="932688" cy="502920"/>
+              <a:t>/commit-sc</a:t>
+            </a:r>
+          </a:p>
+        </p:txBody>
+      </p:sp>
+      <p:sp>
+        <p:nvSpPr>
+          <p:cNvPr id="20" name="Text"/>
+          <p:cNvSpPr/>
+          <p:nvPr/>
+        </p:nvSpPr>
+        <p:spPr>
+          <a:xfrm>
+            <a:off x="3255264" y="3120000"/>
+            <a:ext cx="1234440" cy="150000"/>
+          </a:xfrm>
+          <a:prstGeom prst="rect">
+            <a:avLst/>
+          </a:prstGeom>
+          <a:noFill/>
+          <a:ln/>
+        </p:spPr>
+        <p:txBody>
+          <a:bodyPr wrap="square" lIns="0" tIns="0" rIns="0" bIns="0" rtlCol="0" anchor="ctr"/>
+          <a:lstStyle/>
+          <a:p>
+            <a:pPr marL="0" indent="0" algn="ctr">
+              <a:buNone/>
+            </a:pPr>
+            <a:r>
+              <a:rPr lang="en-US" sz="800" kern="0" dirty="0">
+                <a:solidFill>
+                  <a:srgbClr val="94A3B8"/>
+                </a:solidFill>
+                <a:latin typeface="Inter" pitchFamily="34" charset="0"/>
+                <a:ea typeface="Inter" pitchFamily="34" charset="-122"/>
+                <a:cs typeface="Inter" pitchFamily="34" charset="-120"/>
+              </a:rPr>
+              <a:t>↺ fails → fix → retry × n</a:t>
+            </a:r>
+          </a:p>
+        </p:txBody>
+      </p:sp>
+      <p:sp>
+        <p:nvSpPr>
+          <p:cNvPr id="21" name="Text"/>
+          <p:cNvSpPr/>
+          <p:nvPr/>
+        </p:nvSpPr>
+        <p:spPr>
+          <a:xfrm>
+            <a:off x="4472000" y="3300000"/>
+            <a:ext cx="200000" cy="170000"/>
+          </a:xfrm>
+          <a:prstGeom prst="rect">
+            <a:avLst/>
+          </a:prstGeom>
+          <a:noFill/>
+          <a:ln/>
+        </p:spPr>
+        <p:txBody>
+          <a:bodyPr wrap="square" lIns="0" tIns="0" rIns="0" bIns="0" rtlCol="0" anchor="ctr"/>
+          <a:lstStyle/>
+          <a:p>
+            <a:pPr marL="0" indent="0" algn="ctr">
+              <a:buNone/>
+            </a:pPr>
+            <a:r>
+              <a:rPr lang="en-US" sz="1400" kern="0" dirty="0">
+                <a:solidFill>
+                  <a:srgbClr val="3B82F6"/>
+                </a:solidFill>
+                <a:latin typeface="Inter" pitchFamily="34" charset="0"/>
+                <a:ea typeface="Inter" pitchFamily="34" charset="-122"/>
+                <a:cs typeface="Inter" pitchFamily="34" charset="-120"/>
+              </a:rPr>
+              <a:t>↓</a:t>
+            </a:r>
+          </a:p>
+        </p:txBody>
+      </p:sp>
+      <p:sp>
+        <p:nvSpPr>
+          <p:cNvPr id="22" name="Text"/>
+          <p:cNvSpPr/>
+          <p:nvPr/>
+        </p:nvSpPr>
+        <p:spPr>
+          <a:xfrm>
+            <a:off x="457200" y="3470000"/>
+            <a:ext cx="8229600" cy="180000"/>
+          </a:xfrm>
+          <a:prstGeom prst="rect">
+            <a:avLst/>
+          </a:prstGeom>
+          <a:noFill/>
+          <a:ln/>
+        </p:spPr>
+        <p:txBody>
+          <a:bodyPr wrap="square" lIns="0" tIns="0" rIns="0" bIns="0" rtlCol="0" anchor="ctr"/>
+          <a:lstStyle/>
+          <a:p>
+            <a:pPr marL="0" indent="0" algn="l">
+              <a:buNone/>
+            </a:pPr>
+            <a:r>
+              <a:rPr lang="en-US" sz="900" b="1" kern="0" spc="200" dirty="0">
+                <a:solidFill>
+                  <a:srgbClr val="3B82F6"/>
+                </a:solidFill>
+                <a:latin typeface="Inter" pitchFamily="34" charset="0"/>
+                <a:ea typeface="Inter" pitchFamily="34" charset="-122"/>
+                <a:cs typeface="Inter" pitchFamily="34" charset="-120"/>
+              </a:rPr>
+              <a:t>ACCEPTANCE GATE · THEN SHIP</a:t>
+            </a:r>
+          </a:p>
+        </p:txBody>
+      </p:sp>
+      <p:sp>
+        <p:nvSpPr>
+          <p:cNvPr id="23" name="Pill"/>
+          <p:cNvSpPr/>
+          <p:nvPr/>
+        </p:nvSpPr>
+        <p:spPr>
+          <a:xfrm>
+            <a:off x="457200" y="3650000"/>
+            <a:ext cx="1514246" cy="560000"/>
           </a:xfrm>
           <a:prstGeom prst="roundRect">
             <a:avLst>
@@ -4549,39 +4582,14 @@
           </a:ln>
         </p:spPr>
         <p:txBody>
-          <a:bodyPr/>
-          <a:lstStyle/>
-          <a:p>
-            <a:endParaRPr/>
-          </a:p>
-        </p:txBody>
-      </p:sp>
-      <p:sp>
-        <p:nvSpPr>
-          <p:cNvPr id="28" name="Text 26"/>
-          <p:cNvSpPr/>
-          <p:nvPr/>
-        </p:nvSpPr>
-        <p:spPr>
-          <a:xfrm>
-            <a:off x="7754112" y="2103120"/>
-            <a:ext cx="932688" cy="502920"/>
-          </a:xfrm>
-          <a:prstGeom prst="rect">
-            <a:avLst/>
-          </a:prstGeom>
-          <a:noFill/>
-          <a:ln/>
-        </p:spPr>
-        <p:txBody>
-          <a:bodyPr wrap="square" lIns="0" tIns="0" rIns="0" bIns="0" rtlCol="0" anchor="ctr"/>
+          <a:bodyPr wrap="square" lIns="36000" tIns="0" rIns="36000" bIns="0" rtlCol="0" anchor="ctr"/>
           <a:lstStyle/>
           <a:p>
             <a:pPr marL="0" indent="0" algn="ctr">
               <a:buNone/>
             </a:pPr>
             <a:r>
-              <a:rPr lang="en-US" sz="1100" b="1" dirty="0">
+              <a:rPr lang="en-US" sz="1050" b="1" kern="0" dirty="0">
                 <a:solidFill>
                   <a:srgbClr val="F8FAFC"/>
                 </a:solidFill>
@@ -4589,38 +4597,457 @@
                 <a:ea typeface="Inter" pitchFamily="34" charset="-122"/>
                 <a:cs typeface="Inter" pitchFamily="34" charset="-120"/>
               </a:rPr>
-              <a:t>PR</a:t>
-            </a:r>
-            <a:endParaRPr lang="en-US" sz="1100" dirty="0"/>
-          </a:p>
-        </p:txBody>
-      </p:sp>
-      <p:sp>
-        <p:nvSpPr>
-          <p:cNvPr id="29" name="Text 27"/>
-          <p:cNvSpPr/>
-          <p:nvPr/>
-        </p:nvSpPr>
-        <p:spPr>
-          <a:xfrm>
-            <a:off x="457200" y="3108960"/>
-            <a:ext cx="8229600" cy="640080"/>
-          </a:xfrm>
-          <a:prstGeom prst="rect">
-            <a:avLst/>
-          </a:prstGeom>
-          <a:noFill/>
-          <a:ln/>
-        </p:spPr>
-        <p:txBody>
-          <a:bodyPr wrap="square" lIns="0" tIns="0" rIns="0" bIns="0" rtlCol="0" anchor="ctr"/>
-          <a:lstStyle/>
+              <a:t>acceptance gate</a:t>
+            </a:r>
+          </a:p>
           <a:p>
             <a:pPr marL="0" indent="0" algn="ctr">
               <a:buNone/>
             </a:pPr>
             <a:r>
-              <a:rPr lang="en-US" sz="1400" dirty="0">
+              <a:rPr lang="en-US" sz="750" kern="0" dirty="0">
+                <a:solidFill>
+                  <a:srgbClr val="3B82F6"/>
+                </a:solidFill>
+                <a:latin typeface="Inter" pitchFamily="34" charset="0"/>
+                <a:ea typeface="Inter" pitchFamily="34" charset="-122"/>
+                <a:cs typeface="Inter" pitchFamily="34" charset="-120"/>
+              </a:rPr>
+              <a:t>AC-1 … AC-6</a:t>
+            </a:r>
+          </a:p>
+        </p:txBody>
+      </p:sp>
+      <p:sp>
+        <p:nvSpPr>
+          <p:cNvPr id="24" name="Arrow"/>
+          <p:cNvSpPr/>
+          <p:nvPr/>
+        </p:nvSpPr>
+        <p:spPr>
+          <a:xfrm>
+            <a:off x="1971446" y="3650000"/>
+            <a:ext cx="164592" cy="560000"/>
+          </a:xfrm>
+          <a:prstGeom prst="rect">
+            <a:avLst/>
+          </a:prstGeom>
+          <a:noFill/>
+          <a:ln/>
+        </p:spPr>
+        <p:txBody>
+          <a:bodyPr wrap="square" lIns="0" tIns="0" rIns="0" bIns="0" rtlCol="0" anchor="ctr"/>
+          <a:lstStyle/>
+          <a:p>
+            <a:pPr marL="0" indent="0" algn="ctr">
+              <a:buNone/>
+            </a:pPr>
+            <a:r>
+              <a:rPr lang="en-US" sz="1000" kern="0" dirty="0">
+                <a:solidFill>
+                  <a:srgbClr val="3B82F6"/>
+                </a:solidFill>
+                <a:latin typeface="Inter" pitchFamily="34" charset="0"/>
+                <a:ea typeface="Inter" pitchFamily="34" charset="-122"/>
+                <a:cs typeface="Inter" pitchFamily="34" charset="-120"/>
+              </a:rPr>
+              <a:t>→</a:t>
+            </a:r>
+          </a:p>
+        </p:txBody>
+      </p:sp>
+      <p:sp>
+        <p:nvSpPr>
+          <p:cNvPr id="25" name="Pill"/>
+          <p:cNvSpPr/>
+          <p:nvPr/>
+        </p:nvSpPr>
+        <p:spPr>
+          <a:xfrm>
+            <a:off x="2136038" y="3650000"/>
+            <a:ext cx="1514246" cy="560000"/>
+          </a:xfrm>
+          <a:prstGeom prst="roundRect">
+            <a:avLst>
+              <a:gd name="adj" fmla="val 9091"/>
+            </a:avLst>
+          </a:prstGeom>
+          <a:solidFill>
+            <a:srgbClr val="1B2640"/>
+          </a:solidFill>
+          <a:ln w="9525">
+            <a:solidFill>
+              <a:srgbClr val="64748B"/>
+            </a:solidFill>
+            <a:prstDash val="solid"/>
+          </a:ln>
+        </p:spPr>
+        <p:txBody>
+          <a:bodyPr wrap="square" lIns="36000" tIns="0" rIns="36000" bIns="0" rtlCol="0" anchor="ctr"/>
+          <a:lstStyle/>
+          <a:p>
+            <a:pPr marL="0" indent="0" algn="ctr">
+              <a:buNone/>
+            </a:pPr>
+            <a:r>
+              <a:rPr lang="en-US" sz="1050" b="1" kern="0" dirty="0">
+                <a:solidFill>
+                  <a:srgbClr val="F8FAFC"/>
+                </a:solidFill>
+                <a:latin typeface="Inter" pitchFamily="34" charset="0"/>
+                <a:ea typeface="Inter" pitchFamily="34" charset="-122"/>
+                <a:cs typeface="Inter" pitchFamily="34" charset="-120"/>
+              </a:rPr>
+              <a:t>PR review</a:t>
+            </a:r>
+          </a:p>
+          <a:p>
+            <a:pPr marL="0" indent="0" algn="ctr">
+              <a:buNone/>
+            </a:pPr>
+            <a:r>
+              <a:rPr lang="en-US" sz="750" kern="0" dirty="0">
+                <a:solidFill>
+                  <a:srgbClr val="3B82F6"/>
+                </a:solidFill>
+                <a:latin typeface="Inter" pitchFamily="34" charset="0"/>
+                <a:ea typeface="Inter" pitchFamily="34" charset="-122"/>
+                <a:cs typeface="Inter" pitchFamily="34" charset="-120"/>
+              </a:rPr>
+              <a:t>/review-pr</a:t>
+            </a:r>
+          </a:p>
+        </p:txBody>
+      </p:sp>
+      <p:sp>
+        <p:nvSpPr>
+          <p:cNvPr id="26" name="Arrow"/>
+          <p:cNvSpPr/>
+          <p:nvPr/>
+        </p:nvSpPr>
+        <p:spPr>
+          <a:xfrm>
+            <a:off x="3650284" y="3650000"/>
+            <a:ext cx="164592" cy="560000"/>
+          </a:xfrm>
+          <a:prstGeom prst="rect">
+            <a:avLst/>
+          </a:prstGeom>
+          <a:noFill/>
+          <a:ln/>
+        </p:spPr>
+        <p:txBody>
+          <a:bodyPr wrap="square" lIns="0" tIns="0" rIns="0" bIns="0" rtlCol="0" anchor="ctr"/>
+          <a:lstStyle/>
+          <a:p>
+            <a:pPr marL="0" indent="0" algn="ctr">
+              <a:buNone/>
+            </a:pPr>
+            <a:r>
+              <a:rPr lang="en-US" sz="1000" kern="0" dirty="0">
+                <a:solidFill>
+                  <a:srgbClr val="3B82F6"/>
+                </a:solidFill>
+                <a:latin typeface="Inter" pitchFamily="34" charset="0"/>
+                <a:ea typeface="Inter" pitchFamily="34" charset="-122"/>
+                <a:cs typeface="Inter" pitchFamily="34" charset="-120"/>
+              </a:rPr>
+              <a:t>→</a:t>
+            </a:r>
+          </a:p>
+        </p:txBody>
+      </p:sp>
+      <p:sp>
+        <p:nvSpPr>
+          <p:cNvPr id="27" name="Pill"/>
+          <p:cNvSpPr/>
+          <p:nvPr/>
+        </p:nvSpPr>
+        <p:spPr>
+          <a:xfrm>
+            <a:off x="3814876" y="3650000"/>
+            <a:ext cx="1514246" cy="560000"/>
+          </a:xfrm>
+          <a:prstGeom prst="roundRect">
+            <a:avLst>
+              <a:gd name="adj" fmla="val 9091"/>
+            </a:avLst>
+          </a:prstGeom>
+          <a:solidFill>
+            <a:srgbClr val="1B2640"/>
+          </a:solidFill>
+          <a:ln w="9525">
+            <a:solidFill>
+              <a:srgbClr val="64748B"/>
+            </a:solidFill>
+            <a:prstDash val="solid"/>
+          </a:ln>
+        </p:spPr>
+        <p:txBody>
+          <a:bodyPr wrap="square" lIns="36000" tIns="0" rIns="36000" bIns="0" rtlCol="0" anchor="ctr"/>
+          <a:lstStyle/>
+          <a:p>
+            <a:pPr marL="0" indent="0" algn="ctr">
+              <a:buNone/>
+            </a:pPr>
+            <a:r>
+              <a:rPr lang="en-US" sz="1050" b="1" kern="0" dirty="0">
+                <a:solidFill>
+                  <a:srgbClr val="F8FAFC"/>
+                </a:solidFill>
+                <a:latin typeface="Inter" pitchFamily="34" charset="0"/>
+                <a:ea typeface="Inter" pitchFamily="34" charset="-122"/>
+                <a:cs typeface="Inter" pitchFamily="34" charset="-120"/>
+              </a:rPr>
+              <a:t>create PR</a:t>
+            </a:r>
+          </a:p>
+          <a:p>
+            <a:pPr marL="0" indent="0" algn="ctr">
+              <a:buNone/>
+            </a:pPr>
+            <a:r>
+              <a:rPr lang="en-US" sz="750" kern="0" dirty="0">
+                <a:solidFill>
+                  <a:srgbClr val="3B82F6"/>
+                </a:solidFill>
+                <a:latin typeface="Inter" pitchFamily="34" charset="0"/>
+                <a:ea typeface="Inter" pitchFamily="34" charset="-122"/>
+                <a:cs typeface="Inter" pitchFamily="34" charset="-120"/>
+              </a:rPr>
+              <a:t>/create-pr</a:t>
+            </a:r>
+          </a:p>
+        </p:txBody>
+      </p:sp>
+      <p:sp>
+        <p:nvSpPr>
+          <p:cNvPr id="28" name="Arrow"/>
+          <p:cNvSpPr/>
+          <p:nvPr/>
+        </p:nvSpPr>
+        <p:spPr>
+          <a:xfrm>
+            <a:off x="5329122" y="3650000"/>
+            <a:ext cx="164592" cy="560000"/>
+          </a:xfrm>
+          <a:prstGeom prst="rect">
+            <a:avLst/>
+          </a:prstGeom>
+          <a:noFill/>
+          <a:ln/>
+        </p:spPr>
+        <p:txBody>
+          <a:bodyPr wrap="square" lIns="0" tIns="0" rIns="0" bIns="0" rtlCol="0" anchor="ctr"/>
+          <a:lstStyle/>
+          <a:p>
+            <a:pPr marL="0" indent="0" algn="ctr">
+              <a:buNone/>
+            </a:pPr>
+            <a:r>
+              <a:rPr lang="en-US" sz="1000" kern="0" dirty="0">
+                <a:solidFill>
+                  <a:srgbClr val="3B82F6"/>
+                </a:solidFill>
+                <a:latin typeface="Inter" pitchFamily="34" charset="0"/>
+                <a:ea typeface="Inter" pitchFamily="34" charset="-122"/>
+                <a:cs typeface="Inter" pitchFamily="34" charset="-120"/>
+              </a:rPr>
+              <a:t>→</a:t>
+            </a:r>
+          </a:p>
+        </p:txBody>
+      </p:sp>
+      <p:sp>
+        <p:nvSpPr>
+          <p:cNvPr id="29" name="Pill"/>
+          <p:cNvSpPr/>
+          <p:nvPr/>
+        </p:nvSpPr>
+        <p:spPr>
+          <a:xfrm>
+            <a:off x="5493714" y="3650000"/>
+            <a:ext cx="1514246" cy="560000"/>
+          </a:xfrm>
+          <a:prstGeom prst="roundRect">
+            <a:avLst>
+              <a:gd name="adj" fmla="val 9091"/>
+            </a:avLst>
+          </a:prstGeom>
+          <a:solidFill>
+            <a:srgbClr val="1B2640"/>
+          </a:solidFill>
+          <a:ln w="9525">
+            <a:solidFill>
+              <a:srgbClr val="64748B"/>
+            </a:solidFill>
+            <a:prstDash val="solid"/>
+          </a:ln>
+        </p:spPr>
+        <p:txBody>
+          <a:bodyPr wrap="square" lIns="36000" tIns="0" rIns="36000" bIns="0" rtlCol="0" anchor="ctr"/>
+          <a:lstStyle/>
+          <a:p>
+            <a:pPr marL="0" indent="0" algn="ctr">
+              <a:buNone/>
+            </a:pPr>
+            <a:r>
+              <a:rPr lang="en-US" sz="1050" b="1" kern="0" dirty="0">
+                <a:solidFill>
+                  <a:srgbClr val="F8FAFC"/>
+                </a:solidFill>
+                <a:latin typeface="Inter" pitchFamily="34" charset="0"/>
+                <a:ea typeface="Inter" pitchFamily="34" charset="-122"/>
+                <a:cs typeface="Inter" pitchFamily="34" charset="-120"/>
+              </a:rPr>
+              <a:t>pipeline</a:t>
+            </a:r>
+          </a:p>
+          <a:p>
+            <a:pPr marL="0" indent="0" algn="ctr">
+              <a:buNone/>
+            </a:pPr>
+            <a:r>
+              <a:rPr lang="en-US" sz="750" kern="0" dirty="0">
+                <a:solidFill>
+                  <a:srgbClr val="3B82F6"/>
+                </a:solidFill>
+                <a:latin typeface="Inter" pitchFamily="34" charset="0"/>
+                <a:ea typeface="Inter" pitchFamily="34" charset="-122"/>
+                <a:cs typeface="Inter" pitchFamily="34" charset="-120"/>
+              </a:rPr>
+              <a:t>/devops watch</a:t>
+            </a:r>
+          </a:p>
+        </p:txBody>
+      </p:sp>
+      <p:sp>
+        <p:nvSpPr>
+          <p:cNvPr id="30" name="Arrow"/>
+          <p:cNvSpPr/>
+          <p:nvPr/>
+        </p:nvSpPr>
+        <p:spPr>
+          <a:xfrm>
+            <a:off x="7007960" y="3650000"/>
+            <a:ext cx="164592" cy="560000"/>
+          </a:xfrm>
+          <a:prstGeom prst="rect">
+            <a:avLst/>
+          </a:prstGeom>
+          <a:noFill/>
+          <a:ln/>
+        </p:spPr>
+        <p:txBody>
+          <a:bodyPr wrap="square" lIns="0" tIns="0" rIns="0" bIns="0" rtlCol="0" anchor="ctr"/>
+          <a:lstStyle/>
+          <a:p>
+            <a:pPr marL="0" indent="0" algn="ctr">
+              <a:buNone/>
+            </a:pPr>
+            <a:r>
+              <a:rPr lang="en-US" sz="1000" kern="0" dirty="0">
+                <a:solidFill>
+                  <a:srgbClr val="3B82F6"/>
+                </a:solidFill>
+                <a:latin typeface="Inter" pitchFamily="34" charset="0"/>
+                <a:ea typeface="Inter" pitchFamily="34" charset="-122"/>
+                <a:cs typeface="Inter" pitchFamily="34" charset="-120"/>
+              </a:rPr>
+              <a:t>→</a:t>
+            </a:r>
+          </a:p>
+        </p:txBody>
+      </p:sp>
+      <p:sp>
+        <p:nvSpPr>
+          <p:cNvPr id="31" name="Pill"/>
+          <p:cNvSpPr/>
+          <p:nvPr/>
+        </p:nvSpPr>
+        <p:spPr>
+          <a:xfrm>
+            <a:off x="7172552" y="3650000"/>
+            <a:ext cx="1514246" cy="560000"/>
+          </a:xfrm>
+          <a:prstGeom prst="roundRect">
+            <a:avLst>
+              <a:gd name="adj" fmla="val 9091"/>
+            </a:avLst>
+          </a:prstGeom>
+          <a:solidFill>
+            <a:srgbClr val="1B2640"/>
+          </a:solidFill>
+          <a:ln w="19050">
+            <a:solidFill>
+              <a:srgbClr val="3B82F6"/>
+            </a:solidFill>
+            <a:prstDash val="solid"/>
+          </a:ln>
+        </p:spPr>
+        <p:txBody>
+          <a:bodyPr wrap="square" lIns="36000" tIns="0" rIns="36000" bIns="0" rtlCol="0" anchor="ctr"/>
+          <a:lstStyle/>
+          <a:p>
+            <a:pPr marL="0" indent="0" algn="ctr">
+              <a:buNone/>
+            </a:pPr>
+            <a:r>
+              <a:rPr lang="en-US" sz="1050" b="1" kern="0" dirty="0">
+                <a:solidFill>
+                  <a:srgbClr val="F8FAFC"/>
+                </a:solidFill>
+                <a:latin typeface="Inter" pitchFamily="34" charset="0"/>
+                <a:ea typeface="Inter" pitchFamily="34" charset="-122"/>
+                <a:cs typeface="Inter" pitchFamily="34" charset="-120"/>
+              </a:rPr>
+              <a:t>human review</a:t>
+            </a:r>
+          </a:p>
+          <a:p>
+            <a:pPr marL="0" indent="0" algn="ctr">
+              <a:buNone/>
+            </a:pPr>
+            <a:r>
+              <a:rPr lang="en-US" sz="750" kern="0" dirty="0">
+                <a:solidFill>
+                  <a:srgbClr val="3B82F6"/>
+                </a:solidFill>
+                <a:latin typeface="Inter" pitchFamily="34" charset="0"/>
+                <a:ea typeface="Inter" pitchFamily="34" charset="-122"/>
+                <a:cs typeface="Inter" pitchFamily="34" charset="-120"/>
+              </a:rPr>
+              <a:t>mandatory</a:t>
+            </a:r>
+          </a:p>
+        </p:txBody>
+      </p:sp>
+      <p:sp>
+        <p:nvSpPr>
+          <p:cNvPr id="32" name="Text"/>
+          <p:cNvSpPr/>
+          <p:nvPr/>
+        </p:nvSpPr>
+        <p:spPr>
+          <a:xfrm>
+            <a:off x="457200" y="4300000"/>
+            <a:ext cx="8229600" cy="420000"/>
+          </a:xfrm>
+          <a:prstGeom prst="rect">
+            <a:avLst/>
+          </a:prstGeom>
+          <a:noFill/>
+          <a:ln/>
+        </p:spPr>
+        <p:txBody>
+          <a:bodyPr wrap="square" lIns="0" tIns="0" rIns="0" bIns="0" rtlCol="0" anchor="ctr"/>
+          <a:lstStyle/>
+          <a:p>
+            <a:pPr marL="0" indent="0" algn="ctr">
+              <a:buNone/>
+            </a:pPr>
+            <a:r>
+              <a:rPr lang="en-US" sz="1100" kern="0" dirty="0">
                 <a:solidFill>
                   <a:srgbClr val="94A3B8"/>
                 </a:solidFill>
@@ -4628,16 +5055,15 @@
                 <a:ea typeface="Inter" pitchFamily="34" charset="-122"/>
                 <a:cs typeface="Inter" pitchFamily="34" charset="-120"/>
               </a:rPr>
-              <a:t>each box is a specialist — the orchestrator picks which one, when,</a:t>
-            </a:r>
-            <a:endParaRPr lang="en-US" sz="1400" dirty="0"/>
+              <a:t>each box is a skill the orchestrator invokes — it decides which, when, and how to recover.</a:t>
+            </a:r>
           </a:p>
           <a:p>
             <a:pPr marL="0" indent="0" algn="ctr">
               <a:buNone/>
             </a:pPr>
             <a:r>
-              <a:rPr lang="en-US" sz="1400" dirty="0">
+              <a:rPr lang="en-US" sz="1100" kern="0" dirty="0">
                 <a:solidFill>
                   <a:srgbClr val="94A3B8"/>
                 </a:solidFill>
@@ -4645,9 +5071,84 @@
                 <a:ea typeface="Inter" pitchFamily="34" charset="-122"/>
                 <a:cs typeface="Inter" pitchFamily="34" charset="-120"/>
               </a:rPr>
-              <a:t>and what to do when one fails</a:t>
-            </a:r>
-            <a:endParaRPr lang="en-US" sz="1400" dirty="0"/>
+              <a:t>the inner loop retries on failure; a human must approve before merge.</a:t>
+            </a:r>
+          </a:p>
+        </p:txBody>
+      </p:sp>
+      <p:sp>
+        <p:nvSpPr>
+          <p:cNvPr id="33" name="Text"/>
+          <p:cNvSpPr/>
+          <p:nvPr/>
+        </p:nvSpPr>
+        <p:spPr>
+          <a:xfrm>
+            <a:off x="457200" y="4796028"/>
+            <a:ext cx="4572000" cy="274320"/>
+          </a:xfrm>
+          <a:prstGeom prst="rect">
+            <a:avLst/>
+          </a:prstGeom>
+          <a:noFill/>
+          <a:ln/>
+        </p:spPr>
+        <p:txBody>
+          <a:bodyPr wrap="square" lIns="0" tIns="0" rIns="0" bIns="0" rtlCol="0" anchor="ctr"/>
+          <a:lstStyle/>
+          <a:p>
+            <a:pPr marL="0" indent="0" algn="l">
+              <a:buNone/>
+            </a:pPr>
+            <a:r>
+              <a:rPr lang="en-US" sz="800" kern="0" spc="200" dirty="0">
+                <a:solidFill>
+                  <a:srgbClr val="64748B"/>
+                </a:solidFill>
+                <a:latin typeface="Inter" pitchFamily="34" charset="0"/>
+                <a:ea typeface="Inter" pitchFamily="34" charset="-122"/>
+                <a:cs typeface="Inter" pitchFamily="34" charset="-120"/>
+              </a:rPr>
+              <a:t>02 · how it works</a:t>
+            </a:r>
+          </a:p>
+        </p:txBody>
+      </p:sp>
+      <p:sp>
+        <p:nvSpPr>
+          <p:cNvPr id="34" name="Text"/>
+          <p:cNvSpPr/>
+          <p:nvPr/>
+        </p:nvSpPr>
+        <p:spPr>
+          <a:xfrm>
+            <a:off x="8229600" y="4796028"/>
+            <a:ext cx="457200" cy="274320"/>
+          </a:xfrm>
+          <a:prstGeom prst="rect">
+            <a:avLst/>
+          </a:prstGeom>
+          <a:noFill/>
+          <a:ln/>
+        </p:spPr>
+        <p:txBody>
+          <a:bodyPr wrap="square" lIns="0" tIns="0" rIns="0" bIns="0" rtlCol="0" anchor="ctr"/>
+          <a:lstStyle/>
+          <a:p>
+            <a:pPr marL="0" indent="0" algn="r">
+              <a:buNone/>
+            </a:pPr>
+            <a:r>
+              <a:rPr lang="en-US" sz="800" kern="0" dirty="0">
+                <a:solidFill>
+                  <a:srgbClr val="64748B"/>
+                </a:solidFill>
+                <a:latin typeface="Inter" pitchFamily="34" charset="0"/>
+                <a:ea typeface="Inter" pitchFamily="34" charset="-122"/>
+                <a:cs typeface="Inter" pitchFamily="34" charset="-120"/>
+              </a:rPr>
+              <a:t>11</a:t>
+            </a:r>
           </a:p>
         </p:txBody>
       </p:sp>

--- a/orchestrer-intelligence-gatherly.pptx
+++ b/orchestrer-intelligence-gatherly.pptx
@@ -3584,85 +3584,7 @@
       </p:grpSpPr>
       <p:sp>
         <p:nvSpPr>
-          <p:cNvPr id="2" name="Text 0"/>
-          <p:cNvSpPr/>
-          <p:nvPr/>
-        </p:nvSpPr>
-        <p:spPr>
-          <a:xfrm>
-            <a:off x="457200" y="4796028"/>
-            <a:ext cx="4572000" cy="274320"/>
-          </a:xfrm>
-          <a:prstGeom prst="rect">
-            <a:avLst/>
-          </a:prstGeom>
-          <a:noFill/>
-          <a:ln/>
-        </p:spPr>
-        <p:txBody>
-          <a:bodyPr wrap="square" lIns="0" tIns="0" rIns="0" bIns="0" rtlCol="0" anchor="ctr"/>
-          <a:lstStyle/>
-          <a:p>
-            <a:pPr marL="0" indent="0">
-              <a:buNone/>
-            </a:pPr>
-            <a:r>
-              <a:rPr lang="en-US" sz="800" kern="0" spc="200" dirty="0">
-                <a:solidFill>
-                  <a:srgbClr val="64748B"/>
-                </a:solidFill>
-                <a:latin typeface="Inter" pitchFamily="34" charset="0"/>
-                <a:ea typeface="Inter" pitchFamily="34" charset="-122"/>
-                <a:cs typeface="Inter" pitchFamily="34" charset="-120"/>
-              </a:rPr>
-              <a:t>02 · how it works</a:t>
-            </a:r>
-            <a:endParaRPr lang="en-US" sz="800" dirty="0"/>
-          </a:p>
-        </p:txBody>
-      </p:sp>
-      <p:sp>
-        <p:nvSpPr>
-          <p:cNvPr id="3" name="Text 1"/>
-          <p:cNvSpPr/>
-          <p:nvPr/>
-        </p:nvSpPr>
-        <p:spPr>
-          <a:xfrm>
-            <a:off x="8229600" y="4796028"/>
-            <a:ext cx="457200" cy="274320"/>
-          </a:xfrm>
-          <a:prstGeom prst="rect">
-            <a:avLst/>
-          </a:prstGeom>
-          <a:noFill/>
-          <a:ln/>
-        </p:spPr>
-        <p:txBody>
-          <a:bodyPr wrap="square" lIns="0" tIns="0" rIns="0" bIns="0" rtlCol="0" anchor="ctr"/>
-          <a:lstStyle/>
-          <a:p>
-            <a:pPr marL="0" indent="0" algn="r">
-              <a:buNone/>
-            </a:pPr>
-            <a:r>
-              <a:rPr lang="en-US" sz="800" dirty="0">
-                <a:solidFill>
-                  <a:srgbClr val="64748B"/>
-                </a:solidFill>
-                <a:latin typeface="Inter" pitchFamily="34" charset="0"/>
-                <a:ea typeface="Inter" pitchFamily="34" charset="-122"/>
-                <a:cs typeface="Inter" pitchFamily="34" charset="-120"/>
-              </a:rPr>
-              <a:t>11</a:t>
-            </a:r>
-            <a:endParaRPr lang="en-US" sz="800" dirty="0"/>
-          </a:p>
-        </p:txBody>
-      </p:sp>
-      <p:sp>
-        <p:nvSpPr>
-          <p:cNvPr id="4" name="Text 2"/>
+          <p:cNvPr id="2" name="Text"/>
           <p:cNvSpPr/>
           <p:nvPr/>
         </p:nvSpPr>
@@ -3681,11 +3603,11 @@
           <a:bodyPr wrap="square" lIns="0" tIns="0" rIns="0" bIns="0" rtlCol="0" anchor="ctr"/>
           <a:lstStyle/>
           <a:p>
-            <a:pPr marL="0" indent="0">
-              <a:buNone/>
-            </a:pPr>
-            <a:r>
-              <a:rPr lang="en-US" sz="1000" b="1" kern="0" spc="300" dirty="0">
+            <a:pPr marL="0" indent="0" algn="l">
+              <a:buNone/>
+            </a:pPr>
+            <a:r>
+              <a:rPr lang="en-US" sz="1000" b="1" spc="300" kern="0" dirty="0">
                 <a:solidFill>
                   <a:srgbClr val="3B82F6"/>
                 </a:solidFill>
@@ -3695,13 +3617,12 @@
               </a:rPr>
               <a:t>02 · HOW IT WORKS</a:t>
             </a:r>
-            <a:endParaRPr lang="en-US" sz="1000" dirty="0"/>
-          </a:p>
-        </p:txBody>
-      </p:sp>
-      <p:sp>
-        <p:nvSpPr>
-          <p:cNvPr id="5" name="Text 3"/>
+          </a:p>
+        </p:txBody>
+      </p:sp>
+      <p:sp>
+        <p:nvSpPr>
+          <p:cNvPr id="3" name="Text"/>
           <p:cNvSpPr/>
           <p:nvPr/>
         </p:nvSpPr>
@@ -3720,34 +3641,71 @@
           <a:bodyPr wrap="square" lIns="0" tIns="0" rIns="0" bIns="0" rtlCol="0" anchor="ctr"/>
           <a:lstStyle/>
           <a:p>
-            <a:pPr marL="0" indent="0">
-              <a:buNone/>
-            </a:pPr>
-            <a:r>
-              <a:rPr lang="en-US" sz="2800" b="1" dirty="0">
+            <a:pPr marL="0" indent="0" algn="l">
+              <a:buNone/>
+            </a:pPr>
+            <a:r>
+              <a:rPr lang="en-US" sz="2800" b="1" kern="0" dirty="0">
                 <a:solidFill>
                   <a:srgbClr val="F8FAFC"/>
                 </a:solidFill>
                 <a:latin typeface="Montserrat" pitchFamily="34" charset="0"/>
-                <a:ea typeface="Inter" pitchFamily="34" charset="-122"/>
-                <a:cs typeface="Inter" pitchFamily="34" charset="-120"/>
+                <a:ea typeface="Montserrat" pitchFamily="34" charset="-122"/>
+                <a:cs typeface="Montserrat" pitchFamily="34" charset="-120"/>
               </a:rPr>
               <a:t>the loop</a:t>
             </a:r>
-            <a:endParaRPr lang="en-US" sz="2800" dirty="0"/>
-          </a:p>
-        </p:txBody>
-      </p:sp>
-      <p:sp>
-        <p:nvSpPr>
-          <p:cNvPr id="6" name="Shape 4"/>
-          <p:cNvSpPr/>
-          <p:nvPr/>
-        </p:nvSpPr>
-        <p:spPr>
-          <a:xfrm>
-            <a:off x="457200" y="2103120"/>
-            <a:ext cx="932688" cy="502920"/>
+          </a:p>
+        </p:txBody>
+      </p:sp>
+      <p:sp>
+        <p:nvSpPr>
+          <p:cNvPr id="4" name="Text"/>
+          <p:cNvSpPr/>
+          <p:nvPr/>
+        </p:nvSpPr>
+        <p:spPr>
+          <a:xfrm>
+            <a:off x="457200" y="1420000"/>
+            <a:ext cx="8229600" cy="180000"/>
+          </a:xfrm>
+          <a:prstGeom prst="rect">
+            <a:avLst/>
+          </a:prstGeom>
+          <a:noFill/>
+          <a:ln/>
+        </p:spPr>
+        <p:txBody>
+          <a:bodyPr wrap="square" lIns="0" tIns="0" rIns="0" bIns="0" rtlCol="0" anchor="ctr"/>
+          <a:lstStyle/>
+          <a:p>
+            <a:pPr marL="0" indent="0" algn="l">
+              <a:buNone/>
+            </a:pPr>
+            <a:r>
+              <a:rPr lang="en-US" sz="900" b="1" spc="200" kern="0" dirty="0">
+                <a:solidFill>
+                  <a:srgbClr val="3B82F6"/>
+                </a:solidFill>
+                <a:latin typeface="Inter" pitchFamily="34" charset="0"/>
+                <a:ea typeface="Inter" pitchFamily="34" charset="-122"/>
+                <a:cs typeface="Inter" pitchFamily="34" charset="-120"/>
+              </a:rPr>
+              <a:t>PHASE 0 · BEFORE ANY CODE</a:t>
+            </a:r>
+          </a:p>
+        </p:txBody>
+      </p:sp>
+      <p:sp>
+        <p:nvSpPr>
+          <p:cNvPr id="5" name="Pill"/>
+          <p:cNvSpPr/>
+          <p:nvPr/>
+        </p:nvSpPr>
+        <p:spPr>
+          <a:xfrm>
+            <a:off x="457200" y="1620000"/>
+            <a:ext cx="1234440" cy="560000"/>
           </a:xfrm>
           <a:prstGeom prst="roundRect">
             <a:avLst>
@@ -3765,39 +3723,14 @@
           </a:ln>
         </p:spPr>
         <p:txBody>
-          <a:bodyPr/>
-          <a:lstStyle/>
-          <a:p>
-            <a:endParaRPr/>
-          </a:p>
-        </p:txBody>
-      </p:sp>
-      <p:sp>
-        <p:nvSpPr>
-          <p:cNvPr id="7" name="Text 5"/>
-          <p:cNvSpPr/>
-          <p:nvPr/>
-        </p:nvSpPr>
-        <p:spPr>
-          <a:xfrm>
-            <a:off x="457200" y="2103120"/>
-            <a:ext cx="932688" cy="502920"/>
-          </a:xfrm>
-          <a:prstGeom prst="rect">
-            <a:avLst/>
-          </a:prstGeom>
-          <a:noFill/>
-          <a:ln/>
-        </p:spPr>
-        <p:txBody>
-          <a:bodyPr wrap="square" lIns="0" tIns="0" rIns="0" bIns="0" rtlCol="0" anchor="ctr"/>
+          <a:bodyPr wrap="square" lIns="36000" tIns="0" rIns="36000" bIns="0" rtlCol="0" anchor="ctr"/>
           <a:lstStyle/>
           <a:p>
             <a:pPr marL="0" indent="0" algn="ctr">
               <a:buNone/>
             </a:pPr>
             <a:r>
-              <a:rPr lang="en-US" sz="1100" b="1" dirty="0">
+              <a:rPr lang="en-US" sz="1050" b="1" kern="0" dirty="0">
                 <a:solidFill>
                   <a:srgbClr val="F8FAFC"/>
                 </a:solidFill>
@@ -3807,36 +3740,13 @@
               </a:rPr>
               <a:t>plan</a:t>
             </a:r>
-            <a:endParaRPr lang="en-US" sz="1100" dirty="0"/>
-          </a:p>
-        </p:txBody>
-      </p:sp>
-      <p:sp>
-        <p:nvSpPr>
-          <p:cNvPr id="8" name="Text 6"/>
-          <p:cNvSpPr/>
-          <p:nvPr/>
-        </p:nvSpPr>
-        <p:spPr>
-          <a:xfrm>
-            <a:off x="1371600" y="2103120"/>
-            <a:ext cx="164592" cy="502920"/>
-          </a:xfrm>
-          <a:prstGeom prst="rect">
-            <a:avLst/>
-          </a:prstGeom>
-          <a:noFill/>
-          <a:ln/>
-        </p:spPr>
-        <p:txBody>
-          <a:bodyPr wrap="square" lIns="0" tIns="0" rIns="0" bIns="0" rtlCol="0" anchor="ctr"/>
-          <a:lstStyle/>
+          </a:p>
           <a:p>
             <a:pPr marL="0" indent="0" algn="ctr">
               <a:buNone/>
             </a:pPr>
             <a:r>
-              <a:rPr lang="en-US" sz="1000" dirty="0">
+              <a:rPr lang="en-US" sz="750" kern="0" dirty="0">
                 <a:solidFill>
                   <a:srgbClr val="3B82F6"/>
                 </a:solidFill>
@@ -3844,22 +3754,135 @@
                 <a:ea typeface="Inter" pitchFamily="34" charset="-122"/>
                 <a:cs typeface="Inter" pitchFamily="34" charset="-120"/>
               </a:rPr>
-              <a:t>→</a:t>
-            </a:r>
-            <a:endParaRPr lang="en-US" sz="1000" dirty="0"/>
-          </a:p>
-        </p:txBody>
-      </p:sp>
-      <p:sp>
-        <p:nvSpPr>
-          <p:cNvPr id="9" name="Shape 7"/>
-          <p:cNvSpPr/>
-          <p:nvPr/>
-        </p:nvSpPr>
-        <p:spPr>
-          <a:xfrm>
-            <a:off x="1499616" y="2103120"/>
-            <a:ext cx="932688" cy="502920"/>
+              <a:t>/plan-feature</a:t>
+            </a:r>
+          </a:p>
+        </p:txBody>
+      </p:sp>
+      <p:sp>
+        <p:nvSpPr>
+          <p:cNvPr id="6" name="Text"/>
+          <p:cNvSpPr/>
+          <p:nvPr/>
+        </p:nvSpPr>
+        <p:spPr>
+          <a:xfrm>
+            <a:off x="1911640" y="1620000"/>
+            <a:ext cx="6775160" cy="560000"/>
+          </a:xfrm>
+          <a:prstGeom prst="rect">
+            <a:avLst/>
+          </a:prstGeom>
+          <a:noFill/>
+          <a:ln/>
+        </p:spPr>
+        <p:txBody>
+          <a:bodyPr wrap="square" lIns="0" tIns="0" rIns="0" bIns="0" rtlCol="0" anchor="ctr"/>
+          <a:lstStyle/>
+          <a:p>
+            <a:pPr marL="0" indent="0" algn="l">
+              <a:buNone/>
+            </a:pPr>
+            <a:r>
+              <a:rPr lang="en-US" sz="1200" kern="0" dirty="0">
+                <a:solidFill>
+                  <a:srgbClr val="94A3B8"/>
+                </a:solidFill>
+                <a:latin typeface="Inter" pitchFamily="34" charset="0"/>
+                <a:ea typeface="Inter" pitchFamily="34" charset="-122"/>
+                <a:cs typeface="Inter" pitchFamily="34" charset="-120"/>
+              </a:rPr>
+              <a:t>define AC-1 … AC-6 before writing any code</a:t>
+            </a:r>
+          </a:p>
+        </p:txBody>
+      </p:sp>
+      <p:sp>
+        <p:nvSpPr>
+          <p:cNvPr id="7" name="Text"/>
+          <p:cNvSpPr/>
+          <p:nvPr/>
+        </p:nvSpPr>
+        <p:spPr>
+          <a:xfrm>
+            <a:off x="4472000" y="2200000"/>
+            <a:ext cx="200000" cy="170000"/>
+          </a:xfrm>
+          <a:prstGeom prst="rect">
+            <a:avLst/>
+          </a:prstGeom>
+          <a:noFill/>
+          <a:ln/>
+        </p:spPr>
+        <p:txBody>
+          <a:bodyPr wrap="square" lIns="0" tIns="0" rIns="0" bIns="0" rtlCol="0" anchor="ctr"/>
+          <a:lstStyle/>
+          <a:p>
+            <a:pPr marL="0" indent="0" algn="ctr">
+              <a:buNone/>
+            </a:pPr>
+            <a:r>
+              <a:rPr lang="en-US" sz="1400" kern="0" dirty="0">
+                <a:solidFill>
+                  <a:srgbClr val="3B82F6"/>
+                </a:solidFill>
+                <a:latin typeface="Inter" pitchFamily="34" charset="0"/>
+                <a:ea typeface="Inter" pitchFamily="34" charset="-122"/>
+                <a:cs typeface="Inter" pitchFamily="34" charset="-120"/>
+              </a:rPr>
+              <a:t>↓</a:t>
+            </a:r>
+          </a:p>
+        </p:txBody>
+      </p:sp>
+      <p:sp>
+        <p:nvSpPr>
+          <p:cNvPr id="8" name="Text"/>
+          <p:cNvSpPr/>
+          <p:nvPr/>
+        </p:nvSpPr>
+        <p:spPr>
+          <a:xfrm>
+            <a:off x="457200" y="2370000"/>
+            <a:ext cx="8229600" cy="180000"/>
+          </a:xfrm>
+          <a:prstGeom prst="rect">
+            <a:avLst/>
+          </a:prstGeom>
+          <a:noFill/>
+          <a:ln/>
+        </p:spPr>
+        <p:txBody>
+          <a:bodyPr wrap="square" lIns="0" tIns="0" rIns="0" bIns="0" rtlCol="0" anchor="ctr"/>
+          <a:lstStyle/>
+          <a:p>
+            <a:pPr marL="0" indent="0" algn="l">
+              <a:buNone/>
+            </a:pPr>
+            <a:r>
+              <a:rPr lang="en-US" sz="900" b="1" spc="200" kern="0" dirty="0">
+                <a:solidFill>
+                  <a:srgbClr val="3B82F6"/>
+                </a:solidFill>
+                <a:latin typeface="Inter" pitchFamily="34" charset="0"/>
+                <a:ea typeface="Inter" pitchFamily="34" charset="-122"/>
+                <a:cs typeface="Inter" pitchFamily="34" charset="-120"/>
+              </a:rPr>
+              <a:t>FOR EACH STEP IN THE PLAN</a:t>
+            </a:r>
+          </a:p>
+        </p:txBody>
+      </p:sp>
+      <p:sp>
+        <p:nvSpPr>
+          <p:cNvPr id="9" name="Pill"/>
+          <p:cNvSpPr/>
+          <p:nvPr/>
+        </p:nvSpPr>
+        <p:spPr>
+          <a:xfrm>
+            <a:off x="457200" y="2550000"/>
+            <a:ext cx="1234440" cy="560000"/>
           </a:xfrm>
           <a:prstGeom prst="roundRect">
             <a:avLst>
@@ -3877,39 +3900,14 @@
           </a:ln>
         </p:spPr>
         <p:txBody>
-          <a:bodyPr/>
-          <a:lstStyle/>
-          <a:p>
-            <a:endParaRPr/>
-          </a:p>
-        </p:txBody>
-      </p:sp>
-      <p:sp>
-        <p:nvSpPr>
-          <p:cNvPr id="10" name="Text 8"/>
-          <p:cNvSpPr/>
-          <p:nvPr/>
-        </p:nvSpPr>
-        <p:spPr>
-          <a:xfrm>
-            <a:off x="1499616" y="2103120"/>
-            <a:ext cx="932688" cy="502920"/>
-          </a:xfrm>
-          <a:prstGeom prst="rect">
-            <a:avLst/>
-          </a:prstGeom>
-          <a:noFill/>
-          <a:ln/>
-        </p:spPr>
-        <p:txBody>
-          <a:bodyPr wrap="square" lIns="0" tIns="0" rIns="0" bIns="0" rtlCol="0" anchor="ctr"/>
+          <a:bodyPr wrap="square" lIns="36000" tIns="0" rIns="36000" bIns="0" rtlCol="0" anchor="ctr"/>
           <a:lstStyle/>
           <a:p>
             <a:pPr marL="0" indent="0" algn="ctr">
               <a:buNone/>
             </a:pPr>
             <a:r>
-              <a:rPr lang="en-US" sz="1100" b="1" dirty="0">
+              <a:rPr lang="en-US" sz="1050" b="1" kern="0" dirty="0">
                 <a:solidFill>
                   <a:srgbClr val="F8FAFC"/>
                 </a:solidFill>
@@ -3919,36 +3917,13 @@
               </a:rPr>
               <a:t>explore</a:t>
             </a:r>
-            <a:endParaRPr lang="en-US" sz="1100" dirty="0"/>
-          </a:p>
-        </p:txBody>
-      </p:sp>
-      <p:sp>
-        <p:nvSpPr>
-          <p:cNvPr id="11" name="Text 9"/>
-          <p:cNvSpPr/>
-          <p:nvPr/>
-        </p:nvSpPr>
-        <p:spPr>
-          <a:xfrm>
-            <a:off x="2414016" y="2103120"/>
-            <a:ext cx="164592" cy="502920"/>
-          </a:xfrm>
-          <a:prstGeom prst="rect">
-            <a:avLst/>
-          </a:prstGeom>
-          <a:noFill/>
-          <a:ln/>
-        </p:spPr>
-        <p:txBody>
-          <a:bodyPr wrap="square" lIns="0" tIns="0" rIns="0" bIns="0" rtlCol="0" anchor="ctr"/>
-          <a:lstStyle/>
+          </a:p>
           <a:p>
             <a:pPr marL="0" indent="0" algn="ctr">
               <a:buNone/>
             </a:pPr>
             <a:r>
-              <a:rPr lang="en-US" sz="1000" dirty="0">
+              <a:rPr lang="en-US" sz="750" kern="0" dirty="0">
                 <a:solidFill>
                   <a:srgbClr val="3B82F6"/>
                 </a:solidFill>
@@ -3956,22 +3931,59 @@
                 <a:ea typeface="Inter" pitchFamily="34" charset="-122"/>
                 <a:cs typeface="Inter" pitchFamily="34" charset="-120"/>
               </a:rPr>
+              <a:t>/explore-codebase</a:t>
+            </a:r>
+          </a:p>
+        </p:txBody>
+      </p:sp>
+      <p:sp>
+        <p:nvSpPr>
+          <p:cNvPr id="10" name="Arrow"/>
+          <p:cNvSpPr/>
+          <p:nvPr/>
+        </p:nvSpPr>
+        <p:spPr>
+          <a:xfrm>
+            <a:off x="1691640" y="2550000"/>
+            <a:ext cx="164592" cy="560000"/>
+          </a:xfrm>
+          <a:prstGeom prst="rect">
+            <a:avLst/>
+          </a:prstGeom>
+          <a:noFill/>
+          <a:ln/>
+        </p:spPr>
+        <p:txBody>
+          <a:bodyPr wrap="square" lIns="0" tIns="0" rIns="0" bIns="0" rtlCol="0" anchor="ctr"/>
+          <a:lstStyle/>
+          <a:p>
+            <a:pPr marL="0" indent="0" algn="ctr">
+              <a:buNone/>
+            </a:pPr>
+            <a:r>
+              <a:rPr lang="en-US" sz="1000" kern="0" dirty="0">
+                <a:solidFill>
+                  <a:srgbClr val="3B82F6"/>
+                </a:solidFill>
+                <a:latin typeface="Inter" pitchFamily="34" charset="0"/>
+                <a:ea typeface="Inter" pitchFamily="34" charset="-122"/>
+                <a:cs typeface="Inter" pitchFamily="34" charset="-120"/>
+              </a:rPr>
               <a:t>→</a:t>
             </a:r>
-            <a:endParaRPr lang="en-US" sz="1000" dirty="0"/>
-          </a:p>
-        </p:txBody>
-      </p:sp>
-      <p:sp>
-        <p:nvSpPr>
-          <p:cNvPr id="12" name="Shape 10"/>
-          <p:cNvSpPr/>
-          <p:nvPr/>
-        </p:nvSpPr>
-        <p:spPr>
-          <a:xfrm>
-            <a:off x="2542032" y="2103120"/>
-            <a:ext cx="932688" cy="502920"/>
+          </a:p>
+        </p:txBody>
+      </p:sp>
+      <p:sp>
+        <p:nvSpPr>
+          <p:cNvPr id="11" name="Pill"/>
+          <p:cNvSpPr/>
+          <p:nvPr/>
+        </p:nvSpPr>
+        <p:spPr>
+          <a:xfrm>
+            <a:off x="1856232" y="2550000"/>
+            <a:ext cx="1234440" cy="560000"/>
           </a:xfrm>
           <a:prstGeom prst="roundRect">
             <a:avLst>
@@ -3989,39 +4001,14 @@
           </a:ln>
         </p:spPr>
         <p:txBody>
-          <a:bodyPr/>
-          <a:lstStyle/>
-          <a:p>
-            <a:endParaRPr/>
-          </a:p>
-        </p:txBody>
-      </p:sp>
-      <p:sp>
-        <p:nvSpPr>
-          <p:cNvPr id="13" name="Text 11"/>
-          <p:cNvSpPr/>
-          <p:nvPr/>
-        </p:nvSpPr>
-        <p:spPr>
-          <a:xfrm>
-            <a:off x="2542032" y="2103120"/>
-            <a:ext cx="932688" cy="502920"/>
-          </a:xfrm>
-          <a:prstGeom prst="rect">
-            <a:avLst/>
-          </a:prstGeom>
-          <a:noFill/>
-          <a:ln/>
-        </p:spPr>
-        <p:txBody>
-          <a:bodyPr wrap="square" lIns="0" tIns="0" rIns="0" bIns="0" rtlCol="0" anchor="ctr"/>
+          <a:bodyPr wrap="square" lIns="36000" tIns="0" rIns="36000" bIns="0" rtlCol="0" anchor="ctr"/>
           <a:lstStyle/>
           <a:p>
             <a:pPr marL="0" indent="0" algn="ctr">
               <a:buNone/>
             </a:pPr>
             <a:r>
-              <a:rPr lang="en-US" sz="1100" b="1" dirty="0">
+              <a:rPr lang="en-US" sz="1050" b="1" kern="0" dirty="0">
                 <a:solidFill>
                   <a:srgbClr val="F8FAFC"/>
                 </a:solidFill>
@@ -4031,36 +4018,13 @@
               </a:rPr>
               <a:t>implement</a:t>
             </a:r>
-            <a:endParaRPr lang="en-US" sz="1100" dirty="0"/>
-          </a:p>
-        </p:txBody>
-      </p:sp>
-      <p:sp>
-        <p:nvSpPr>
-          <p:cNvPr id="14" name="Text 12"/>
-          <p:cNvSpPr/>
-          <p:nvPr/>
-        </p:nvSpPr>
-        <p:spPr>
-          <a:xfrm>
-            <a:off x="3456432" y="2103120"/>
-            <a:ext cx="164592" cy="502920"/>
-          </a:xfrm>
-          <a:prstGeom prst="rect">
-            <a:avLst/>
-          </a:prstGeom>
-          <a:noFill/>
-          <a:ln/>
-        </p:spPr>
-        <p:txBody>
-          <a:bodyPr wrap="square" lIns="0" tIns="0" rIns="0" bIns="0" rtlCol="0" anchor="ctr"/>
-          <a:lstStyle/>
+          </a:p>
           <a:p>
             <a:pPr marL="0" indent="0" algn="ctr">
               <a:buNone/>
             </a:pPr>
             <a:r>
-              <a:rPr lang="en-US" sz="1000" dirty="0">
+              <a:rPr lang="en-US" sz="750" kern="0" dirty="0">
                 <a:solidFill>
                   <a:srgbClr val="3B82F6"/>
                 </a:solidFill>
@@ -4068,22 +4032,59 @@
                 <a:ea typeface="Inter" pitchFamily="34" charset="-122"/>
                 <a:cs typeface="Inter" pitchFamily="34" charset="-120"/>
               </a:rPr>
+              <a:t>/new-endpoint</a:t>
+            </a:r>
+          </a:p>
+        </p:txBody>
+      </p:sp>
+      <p:sp>
+        <p:nvSpPr>
+          <p:cNvPr id="12" name="Arrow"/>
+          <p:cNvSpPr/>
+          <p:nvPr/>
+        </p:nvSpPr>
+        <p:spPr>
+          <a:xfrm>
+            <a:off x="3090672" y="2550000"/>
+            <a:ext cx="164592" cy="560000"/>
+          </a:xfrm>
+          <a:prstGeom prst="rect">
+            <a:avLst/>
+          </a:prstGeom>
+          <a:noFill/>
+          <a:ln/>
+        </p:spPr>
+        <p:txBody>
+          <a:bodyPr wrap="square" lIns="0" tIns="0" rIns="0" bIns="0" rtlCol="0" anchor="ctr"/>
+          <a:lstStyle/>
+          <a:p>
+            <a:pPr marL="0" indent="0" algn="ctr">
+              <a:buNone/>
+            </a:pPr>
+            <a:r>
+              <a:rPr lang="en-US" sz="1000" kern="0" dirty="0">
+                <a:solidFill>
+                  <a:srgbClr val="3B82F6"/>
+                </a:solidFill>
+                <a:latin typeface="Inter" pitchFamily="34" charset="0"/>
+                <a:ea typeface="Inter" pitchFamily="34" charset="-122"/>
+                <a:cs typeface="Inter" pitchFamily="34" charset="-120"/>
+              </a:rPr>
               <a:t>→</a:t>
             </a:r>
-            <a:endParaRPr lang="en-US" sz="1000" dirty="0"/>
-          </a:p>
-        </p:txBody>
-      </p:sp>
-      <p:sp>
-        <p:nvSpPr>
-          <p:cNvPr id="15" name="Shape 13"/>
-          <p:cNvSpPr/>
-          <p:nvPr/>
-        </p:nvSpPr>
-        <p:spPr>
-          <a:xfrm>
-            <a:off x="3584448" y="2103120"/>
-            <a:ext cx="932688" cy="502920"/>
+          </a:p>
+        </p:txBody>
+      </p:sp>
+      <p:sp>
+        <p:nvSpPr>
+          <p:cNvPr id="13" name="Pill"/>
+          <p:cNvSpPr/>
+          <p:nvPr/>
+        </p:nvSpPr>
+        <p:spPr>
+          <a:xfrm>
+            <a:off x="3255264" y="2550000"/>
+            <a:ext cx="1234440" cy="560000"/>
           </a:xfrm>
           <a:prstGeom prst="roundRect">
             <a:avLst>
@@ -4101,39 +4102,14 @@
           </a:ln>
         </p:spPr>
         <p:txBody>
-          <a:bodyPr/>
-          <a:lstStyle/>
-          <a:p>
-            <a:endParaRPr/>
-          </a:p>
-        </p:txBody>
-      </p:sp>
-      <p:sp>
-        <p:nvSpPr>
-          <p:cNvPr id="16" name="Text 14"/>
-          <p:cNvSpPr/>
-          <p:nvPr/>
-        </p:nvSpPr>
-        <p:spPr>
-          <a:xfrm>
-            <a:off x="3584448" y="2103120"/>
-            <a:ext cx="932688" cy="502920"/>
-          </a:xfrm>
-          <a:prstGeom prst="rect">
-            <a:avLst/>
-          </a:prstGeom>
-          <a:noFill/>
-          <a:ln/>
-        </p:spPr>
-        <p:txBody>
-          <a:bodyPr wrap="square" lIns="0" tIns="0" rIns="0" bIns="0" rtlCol="0" anchor="ctr"/>
+          <a:bodyPr wrap="square" lIns="36000" tIns="0" rIns="36000" bIns="0" rtlCol="0" anchor="ctr"/>
           <a:lstStyle/>
           <a:p>
             <a:pPr marL="0" indent="0" algn="ctr">
               <a:buNone/>
             </a:pPr>
             <a:r>
-              <a:rPr lang="en-US" sz="1100" b="1" dirty="0">
+              <a:rPr lang="en-US" sz="1050" b="1" kern="0" dirty="0">
                 <a:solidFill>
                   <a:srgbClr val="F8FAFC"/>
                 </a:solidFill>
@@ -4143,36 +4119,13 @@
               </a:rPr>
               <a:t>test</a:t>
             </a:r>
-            <a:endParaRPr lang="en-US" sz="1100" dirty="0"/>
-          </a:p>
-        </p:txBody>
-      </p:sp>
-      <p:sp>
-        <p:nvSpPr>
-          <p:cNvPr id="17" name="Text 15"/>
-          <p:cNvSpPr/>
-          <p:nvPr/>
-        </p:nvSpPr>
-        <p:spPr>
-          <a:xfrm>
-            <a:off x="4498848" y="2103120"/>
-            <a:ext cx="164592" cy="502920"/>
-          </a:xfrm>
-          <a:prstGeom prst="rect">
-            <a:avLst/>
-          </a:prstGeom>
-          <a:noFill/>
-          <a:ln/>
-        </p:spPr>
-        <p:txBody>
-          <a:bodyPr wrap="square" lIns="0" tIns="0" rIns="0" bIns="0" rtlCol="0" anchor="ctr"/>
-          <a:lstStyle/>
+          </a:p>
           <a:p>
             <a:pPr marL="0" indent="0" algn="ctr">
               <a:buNone/>
             </a:pPr>
             <a:r>
-              <a:rPr lang="en-US" sz="1000" dirty="0">
+              <a:rPr lang="en-US" sz="750" kern="0" dirty="0">
                 <a:solidFill>
                   <a:srgbClr val="3B82F6"/>
                 </a:solidFill>
@@ -4180,22 +4133,59 @@
                 <a:ea typeface="Inter" pitchFamily="34" charset="-122"/>
                 <a:cs typeface="Inter" pitchFamily="34" charset="-120"/>
               </a:rPr>
+              <a:t>make test</a:t>
+            </a:r>
+          </a:p>
+        </p:txBody>
+      </p:sp>
+      <p:sp>
+        <p:nvSpPr>
+          <p:cNvPr id="14" name="Arrow"/>
+          <p:cNvSpPr/>
+          <p:nvPr/>
+        </p:nvSpPr>
+        <p:spPr>
+          <a:xfrm>
+            <a:off x="4489704" y="2550000"/>
+            <a:ext cx="164592" cy="560000"/>
+          </a:xfrm>
+          <a:prstGeom prst="rect">
+            <a:avLst/>
+          </a:prstGeom>
+          <a:noFill/>
+          <a:ln/>
+        </p:spPr>
+        <p:txBody>
+          <a:bodyPr wrap="square" lIns="0" tIns="0" rIns="0" bIns="0" rtlCol="0" anchor="ctr"/>
+          <a:lstStyle/>
+          <a:p>
+            <a:pPr marL="0" indent="0" algn="ctr">
+              <a:buNone/>
+            </a:pPr>
+            <a:r>
+              <a:rPr lang="en-US" sz="1000" kern="0" dirty="0">
+                <a:solidFill>
+                  <a:srgbClr val="3B82F6"/>
+                </a:solidFill>
+                <a:latin typeface="Inter" pitchFamily="34" charset="0"/>
+                <a:ea typeface="Inter" pitchFamily="34" charset="-122"/>
+                <a:cs typeface="Inter" pitchFamily="34" charset="-120"/>
+              </a:rPr>
               <a:t>→</a:t>
             </a:r>
-            <a:endParaRPr lang="en-US" sz="1000" dirty="0"/>
-          </a:p>
-        </p:txBody>
-      </p:sp>
-      <p:sp>
-        <p:nvSpPr>
-          <p:cNvPr id="18" name="Shape 16"/>
-          <p:cNvSpPr/>
-          <p:nvPr/>
-        </p:nvSpPr>
-        <p:spPr>
-          <a:xfrm>
-            <a:off x="4626864" y="2103120"/>
-            <a:ext cx="932688" cy="502920"/>
+          </a:p>
+        </p:txBody>
+      </p:sp>
+      <p:sp>
+        <p:nvSpPr>
+          <p:cNvPr id="15" name="Pill"/>
+          <p:cNvSpPr/>
+          <p:nvPr/>
+        </p:nvSpPr>
+        <p:spPr>
+          <a:xfrm>
+            <a:off x="4654296" y="2550000"/>
+            <a:ext cx="1234440" cy="560000"/>
           </a:xfrm>
           <a:prstGeom prst="roundRect">
             <a:avLst>
@@ -4213,39 +4203,14 @@
           </a:ln>
         </p:spPr>
         <p:txBody>
-          <a:bodyPr/>
-          <a:lstStyle/>
-          <a:p>
-            <a:endParaRPr/>
-          </a:p>
-        </p:txBody>
-      </p:sp>
-      <p:sp>
-        <p:nvSpPr>
-          <p:cNvPr id="19" name="Text 17"/>
-          <p:cNvSpPr/>
-          <p:nvPr/>
-        </p:nvSpPr>
-        <p:spPr>
-          <a:xfrm>
-            <a:off x="4626864" y="2103120"/>
-            <a:ext cx="932688" cy="502920"/>
-          </a:xfrm>
-          <a:prstGeom prst="rect">
-            <a:avLst/>
-          </a:prstGeom>
-          <a:noFill/>
-          <a:ln/>
-        </p:spPr>
-        <p:txBody>
-          <a:bodyPr wrap="square" lIns="0" tIns="0" rIns="0" bIns="0" rtlCol="0" anchor="ctr"/>
+          <a:bodyPr wrap="square" lIns="36000" tIns="0" rIns="36000" bIns="0" rtlCol="0" anchor="ctr"/>
           <a:lstStyle/>
           <a:p>
             <a:pPr marL="0" indent="0" algn="ctr">
               <a:buNone/>
             </a:pPr>
             <a:r>
-              <a:rPr lang="en-US" sz="1100" b="1" dirty="0">
+              <a:rPr lang="en-US" sz="1050" b="1" kern="0" dirty="0">
                 <a:solidFill>
                   <a:srgbClr val="F8FAFC"/>
                 </a:solidFill>
@@ -4255,36 +4220,13 @@
               </a:rPr>
               <a:t>review</a:t>
             </a:r>
-            <a:endParaRPr lang="en-US" sz="1100" dirty="0"/>
-          </a:p>
-        </p:txBody>
-      </p:sp>
-      <p:sp>
-        <p:nvSpPr>
-          <p:cNvPr id="20" name="Text 18"/>
-          <p:cNvSpPr/>
-          <p:nvPr/>
-        </p:nvSpPr>
-        <p:spPr>
-          <a:xfrm>
-            <a:off x="5541264" y="2103120"/>
-            <a:ext cx="164592" cy="502920"/>
-          </a:xfrm>
-          <a:prstGeom prst="rect">
-            <a:avLst/>
-          </a:prstGeom>
-          <a:noFill/>
-          <a:ln/>
-        </p:spPr>
-        <p:txBody>
-          <a:bodyPr wrap="square" lIns="0" tIns="0" rIns="0" bIns="0" rtlCol="0" anchor="ctr"/>
-          <a:lstStyle/>
+          </a:p>
           <a:p>
             <a:pPr marL="0" indent="0" algn="ctr">
               <a:buNone/>
             </a:pPr>
             <a:r>
-              <a:rPr lang="en-US" sz="1000" dirty="0">
+              <a:rPr lang="en-US" sz="750" kern="0" dirty="0">
                 <a:solidFill>
                   <a:srgbClr val="3B82F6"/>
                 </a:solidFill>
@@ -4292,22 +4234,59 @@
                 <a:ea typeface="Inter" pitchFamily="34" charset="-122"/>
                 <a:cs typeface="Inter" pitchFamily="34" charset="-120"/>
               </a:rPr>
+              <a:t>/simplify</a:t>
+            </a:r>
+          </a:p>
+        </p:txBody>
+      </p:sp>
+      <p:sp>
+        <p:nvSpPr>
+          <p:cNvPr id="16" name="Arrow"/>
+          <p:cNvSpPr/>
+          <p:nvPr/>
+        </p:nvSpPr>
+        <p:spPr>
+          <a:xfrm>
+            <a:off x="5888736" y="2550000"/>
+            <a:ext cx="164592" cy="560000"/>
+          </a:xfrm>
+          <a:prstGeom prst="rect">
+            <a:avLst/>
+          </a:prstGeom>
+          <a:noFill/>
+          <a:ln/>
+        </p:spPr>
+        <p:txBody>
+          <a:bodyPr wrap="square" lIns="0" tIns="0" rIns="0" bIns="0" rtlCol="0" anchor="ctr"/>
+          <a:lstStyle/>
+          <a:p>
+            <a:pPr marL="0" indent="0" algn="ctr">
+              <a:buNone/>
+            </a:pPr>
+            <a:r>
+              <a:rPr lang="en-US" sz="1000" kern="0" dirty="0">
+                <a:solidFill>
+                  <a:srgbClr val="3B82F6"/>
+                </a:solidFill>
+                <a:latin typeface="Inter" pitchFamily="34" charset="0"/>
+                <a:ea typeface="Inter" pitchFamily="34" charset="-122"/>
+                <a:cs typeface="Inter" pitchFamily="34" charset="-120"/>
+              </a:rPr>
               <a:t>→</a:t>
             </a:r>
-            <a:endParaRPr lang="en-US" sz="1000" dirty="0"/>
-          </a:p>
-        </p:txBody>
-      </p:sp>
-      <p:sp>
-        <p:nvSpPr>
-          <p:cNvPr id="21" name="Shape 19"/>
-          <p:cNvSpPr/>
-          <p:nvPr/>
-        </p:nvSpPr>
-        <p:spPr>
-          <a:xfrm>
-            <a:off x="5669280" y="2103120"/>
-            <a:ext cx="932688" cy="502920"/>
+          </a:p>
+        </p:txBody>
+      </p:sp>
+      <p:sp>
+        <p:nvSpPr>
+          <p:cNvPr id="17" name="Pill"/>
+          <p:cNvSpPr/>
+          <p:nvPr/>
+        </p:nvSpPr>
+        <p:spPr>
+          <a:xfrm>
+            <a:off x="6053328" y="2550000"/>
+            <a:ext cx="1234440" cy="560000"/>
           </a:xfrm>
           <a:prstGeom prst="roundRect">
             <a:avLst>
@@ -4325,39 +4304,14 @@
           </a:ln>
         </p:spPr>
         <p:txBody>
-          <a:bodyPr/>
-          <a:lstStyle/>
-          <a:p>
-            <a:endParaRPr/>
-          </a:p>
-        </p:txBody>
-      </p:sp>
-      <p:sp>
-        <p:nvSpPr>
-          <p:cNvPr id="22" name="Text 20"/>
-          <p:cNvSpPr/>
-          <p:nvPr/>
-        </p:nvSpPr>
-        <p:spPr>
-          <a:xfrm>
-            <a:off x="5669280" y="2103120"/>
-            <a:ext cx="932688" cy="502920"/>
-          </a:xfrm>
-          <a:prstGeom prst="rect">
-            <a:avLst/>
-          </a:prstGeom>
-          <a:noFill/>
-          <a:ln/>
-        </p:spPr>
-        <p:txBody>
-          <a:bodyPr wrap="square" lIns="0" tIns="0" rIns="0" bIns="0" rtlCol="0" anchor="ctr"/>
+          <a:bodyPr wrap="square" lIns="36000" tIns="0" rIns="36000" bIns="0" rtlCol="0" anchor="ctr"/>
           <a:lstStyle/>
           <a:p>
             <a:pPr marL="0" indent="0" algn="ctr">
               <a:buNone/>
             </a:pPr>
             <a:r>
-              <a:rPr lang="en-US" sz="1100" b="1" dirty="0">
+              <a:rPr lang="en-US" sz="1050" b="1" kern="0" dirty="0">
                 <a:solidFill>
                   <a:srgbClr val="F8FAFC"/>
                 </a:solidFill>
@@ -4367,36 +4321,13 @@
               </a:rPr>
               <a:t>audit</a:t>
             </a:r>
-            <a:endParaRPr lang="en-US" sz="1100" dirty="0"/>
-          </a:p>
-        </p:txBody>
-      </p:sp>
-      <p:sp>
-        <p:nvSpPr>
-          <p:cNvPr id="23" name="Text 21"/>
-          <p:cNvSpPr/>
-          <p:nvPr/>
-        </p:nvSpPr>
-        <p:spPr>
-          <a:xfrm>
-            <a:off x="6583680" y="2103120"/>
-            <a:ext cx="164592" cy="502920"/>
-          </a:xfrm>
-          <a:prstGeom prst="rect">
-            <a:avLst/>
-          </a:prstGeom>
-          <a:noFill/>
-          <a:ln/>
-        </p:spPr>
-        <p:txBody>
-          <a:bodyPr wrap="square" lIns="0" tIns="0" rIns="0" bIns="0" rtlCol="0" anchor="ctr"/>
-          <a:lstStyle/>
+          </a:p>
           <a:p>
             <a:pPr marL="0" indent="0" algn="ctr">
               <a:buNone/>
             </a:pPr>
             <a:r>
-              <a:rPr lang="en-US" sz="1000" dirty="0">
+              <a:rPr lang="en-US" sz="750" kern="0" dirty="0">
                 <a:solidFill>
                   <a:srgbClr val="3B82F6"/>
                 </a:solidFill>
@@ -4404,22 +4335,59 @@
                 <a:ea typeface="Inter" pitchFamily="34" charset="-122"/>
                 <a:cs typeface="Inter" pitchFamily="34" charset="-120"/>
               </a:rPr>
+              <a:t>/audit-security</a:t>
+            </a:r>
+          </a:p>
+        </p:txBody>
+      </p:sp>
+      <p:sp>
+        <p:nvSpPr>
+          <p:cNvPr id="18" name="Arrow"/>
+          <p:cNvSpPr/>
+          <p:nvPr/>
+        </p:nvSpPr>
+        <p:spPr>
+          <a:xfrm>
+            <a:off x="7287768" y="2550000"/>
+            <a:ext cx="164592" cy="560000"/>
+          </a:xfrm>
+          <a:prstGeom prst="rect">
+            <a:avLst/>
+          </a:prstGeom>
+          <a:noFill/>
+          <a:ln/>
+        </p:spPr>
+        <p:txBody>
+          <a:bodyPr wrap="square" lIns="0" tIns="0" rIns="0" bIns="0" rtlCol="0" anchor="ctr"/>
+          <a:lstStyle/>
+          <a:p>
+            <a:pPr marL="0" indent="0" algn="ctr">
+              <a:buNone/>
+            </a:pPr>
+            <a:r>
+              <a:rPr lang="en-US" sz="1000" kern="0" dirty="0">
+                <a:solidFill>
+                  <a:srgbClr val="3B82F6"/>
+                </a:solidFill>
+                <a:latin typeface="Inter" pitchFamily="34" charset="0"/>
+                <a:ea typeface="Inter" pitchFamily="34" charset="-122"/>
+                <a:cs typeface="Inter" pitchFamily="34" charset="-120"/>
+              </a:rPr>
               <a:t>→</a:t>
             </a:r>
-            <a:endParaRPr lang="en-US" sz="1000" dirty="0"/>
-          </a:p>
-        </p:txBody>
-      </p:sp>
-      <p:sp>
-        <p:nvSpPr>
-          <p:cNvPr id="24" name="Shape 22"/>
-          <p:cNvSpPr/>
-          <p:nvPr/>
-        </p:nvSpPr>
-        <p:spPr>
-          <a:xfrm>
-            <a:off x="6711696" y="2103120"/>
-            <a:ext cx="932688" cy="502920"/>
+          </a:p>
+        </p:txBody>
+      </p:sp>
+      <p:sp>
+        <p:nvSpPr>
+          <p:cNvPr id="19" name="Pill"/>
+          <p:cNvSpPr/>
+          <p:nvPr/>
+        </p:nvSpPr>
+        <p:spPr>
+          <a:xfrm>
+            <a:off x="7452360" y="2550000"/>
+            <a:ext cx="1234440" cy="560000"/>
           </a:xfrm>
           <a:prstGeom prst="roundRect">
             <a:avLst>
@@ -4437,39 +4405,14 @@
           </a:ln>
         </p:spPr>
         <p:txBody>
-          <a:bodyPr/>
-          <a:lstStyle/>
-          <a:p>
-            <a:endParaRPr/>
-          </a:p>
-        </p:txBody>
-      </p:sp>
-      <p:sp>
-        <p:nvSpPr>
-          <p:cNvPr id="25" name="Text 23"/>
-          <p:cNvSpPr/>
-          <p:nvPr/>
-        </p:nvSpPr>
-        <p:spPr>
-          <a:xfrm>
-            <a:off x="6711696" y="2103120"/>
-            <a:ext cx="932688" cy="502920"/>
-          </a:xfrm>
-          <a:prstGeom prst="rect">
-            <a:avLst/>
-          </a:prstGeom>
-          <a:noFill/>
-          <a:ln/>
-        </p:spPr>
-        <p:txBody>
-          <a:bodyPr wrap="square" lIns="0" tIns="0" rIns="0" bIns="0" rtlCol="0" anchor="ctr"/>
+          <a:bodyPr wrap="square" lIns="36000" tIns="0" rIns="36000" bIns="0" rtlCol="0" anchor="ctr"/>
           <a:lstStyle/>
           <a:p>
             <a:pPr marL="0" indent="0" algn="ctr">
               <a:buNone/>
             </a:pPr>
             <a:r>
-              <a:rPr lang="en-US" sz="1100" b="1" dirty="0">
+              <a:rPr lang="en-US" sz="1050" b="1" kern="0" dirty="0">
                 <a:solidFill>
                   <a:srgbClr val="F8FAFC"/>
                 </a:solidFill>
@@ -4479,36 +4422,13 @@
               </a:rPr>
               <a:t>commit</a:t>
             </a:r>
-            <a:endParaRPr lang="en-US" sz="1100" dirty="0"/>
-          </a:p>
-        </p:txBody>
-      </p:sp>
-      <p:sp>
-        <p:nvSpPr>
-          <p:cNvPr id="26" name="Text 24"/>
-          <p:cNvSpPr/>
-          <p:nvPr/>
-        </p:nvSpPr>
-        <p:spPr>
-          <a:xfrm>
-            <a:off x="7626096" y="2103120"/>
-            <a:ext cx="164592" cy="502920"/>
-          </a:xfrm>
-          <a:prstGeom prst="rect">
-            <a:avLst/>
-          </a:prstGeom>
-          <a:noFill/>
-          <a:ln/>
-        </p:spPr>
-        <p:txBody>
-          <a:bodyPr wrap="square" lIns="0" tIns="0" rIns="0" bIns="0" rtlCol="0" anchor="ctr"/>
-          <a:lstStyle/>
+          </a:p>
           <a:p>
             <a:pPr marL="0" indent="0" algn="ctr">
               <a:buNone/>
             </a:pPr>
             <a:r>
-              <a:rPr lang="en-US" sz="1000" dirty="0">
+              <a:rPr lang="en-US" sz="750" kern="0" dirty="0">
                 <a:solidFill>
                   <a:srgbClr val="3B82F6"/>
                 </a:solidFill>
@@ -4516,22 +4436,135 @@
                 <a:ea typeface="Inter" pitchFamily="34" charset="-122"/>
                 <a:cs typeface="Inter" pitchFamily="34" charset="-120"/>
               </a:rPr>
-              <a:t>→</a:t>
-            </a:r>
-            <a:endParaRPr lang="en-US" sz="1000" dirty="0"/>
-          </a:p>
-        </p:txBody>
-      </p:sp>
-      <p:sp>
-        <p:nvSpPr>
-          <p:cNvPr id="27" name="Shape 25"/>
-          <p:cNvSpPr/>
-          <p:nvPr/>
-        </p:nvSpPr>
-        <p:spPr>
-          <a:xfrm>
-            <a:off x="7754112" y="2103120"/>
-            <a:ext cx="932688" cy="502920"/>
+              <a:t>/commit-sc</a:t>
+            </a:r>
+          </a:p>
+        </p:txBody>
+      </p:sp>
+      <p:sp>
+        <p:nvSpPr>
+          <p:cNvPr id="20" name="Text"/>
+          <p:cNvSpPr/>
+          <p:nvPr/>
+        </p:nvSpPr>
+        <p:spPr>
+          <a:xfrm>
+            <a:off x="3255264" y="3120000"/>
+            <a:ext cx="1234440" cy="150000"/>
+          </a:xfrm>
+          <a:prstGeom prst="rect">
+            <a:avLst/>
+          </a:prstGeom>
+          <a:noFill/>
+          <a:ln/>
+        </p:spPr>
+        <p:txBody>
+          <a:bodyPr wrap="square" lIns="0" tIns="0" rIns="0" bIns="0" rtlCol="0" anchor="ctr"/>
+          <a:lstStyle/>
+          <a:p>
+            <a:pPr marL="0" indent="0" algn="ctr">
+              <a:buNone/>
+            </a:pPr>
+            <a:r>
+              <a:rPr lang="en-US" sz="800" kern="0" dirty="0">
+                <a:solidFill>
+                  <a:srgbClr val="94A3B8"/>
+                </a:solidFill>
+                <a:latin typeface="Inter" pitchFamily="34" charset="0"/>
+                <a:ea typeface="Inter" pitchFamily="34" charset="-122"/>
+                <a:cs typeface="Inter" pitchFamily="34" charset="-120"/>
+              </a:rPr>
+              <a:t>↺ fails → fix → retry ×3</a:t>
+            </a:r>
+          </a:p>
+        </p:txBody>
+      </p:sp>
+      <p:sp>
+        <p:nvSpPr>
+          <p:cNvPr id="21" name="Text"/>
+          <p:cNvSpPr/>
+          <p:nvPr/>
+        </p:nvSpPr>
+        <p:spPr>
+          <a:xfrm>
+            <a:off x="4472000" y="3300000"/>
+            <a:ext cx="200000" cy="170000"/>
+          </a:xfrm>
+          <a:prstGeom prst="rect">
+            <a:avLst/>
+          </a:prstGeom>
+          <a:noFill/>
+          <a:ln/>
+        </p:spPr>
+        <p:txBody>
+          <a:bodyPr wrap="square" lIns="0" tIns="0" rIns="0" bIns="0" rtlCol="0" anchor="ctr"/>
+          <a:lstStyle/>
+          <a:p>
+            <a:pPr marL="0" indent="0" algn="ctr">
+              <a:buNone/>
+            </a:pPr>
+            <a:r>
+              <a:rPr lang="en-US" sz="1400" kern="0" dirty="0">
+                <a:solidFill>
+                  <a:srgbClr val="3B82F6"/>
+                </a:solidFill>
+                <a:latin typeface="Inter" pitchFamily="34" charset="0"/>
+                <a:ea typeface="Inter" pitchFamily="34" charset="-122"/>
+                <a:cs typeface="Inter" pitchFamily="34" charset="-120"/>
+              </a:rPr>
+              <a:t>↓</a:t>
+            </a:r>
+          </a:p>
+        </p:txBody>
+      </p:sp>
+      <p:sp>
+        <p:nvSpPr>
+          <p:cNvPr id="22" name="Text"/>
+          <p:cNvSpPr/>
+          <p:nvPr/>
+        </p:nvSpPr>
+        <p:spPr>
+          <a:xfrm>
+            <a:off x="457200" y="3470000"/>
+            <a:ext cx="8229600" cy="180000"/>
+          </a:xfrm>
+          <a:prstGeom prst="rect">
+            <a:avLst/>
+          </a:prstGeom>
+          <a:noFill/>
+          <a:ln/>
+        </p:spPr>
+        <p:txBody>
+          <a:bodyPr wrap="square" lIns="0" tIns="0" rIns="0" bIns="0" rtlCol="0" anchor="ctr"/>
+          <a:lstStyle/>
+          <a:p>
+            <a:pPr marL="0" indent="0" algn="l">
+              <a:buNone/>
+            </a:pPr>
+            <a:r>
+              <a:rPr lang="en-US" sz="900" b="1" spc="200" kern="0" dirty="0">
+                <a:solidFill>
+                  <a:srgbClr val="3B82F6"/>
+                </a:solidFill>
+                <a:latin typeface="Inter" pitchFamily="34" charset="0"/>
+                <a:ea typeface="Inter" pitchFamily="34" charset="-122"/>
+                <a:cs typeface="Inter" pitchFamily="34" charset="-120"/>
+              </a:rPr>
+              <a:t>ACCEPTANCE GATE · THEN SHIP</a:t>
+            </a:r>
+          </a:p>
+        </p:txBody>
+      </p:sp>
+      <p:sp>
+        <p:nvSpPr>
+          <p:cNvPr id="23" name="Pill"/>
+          <p:cNvSpPr/>
+          <p:nvPr/>
+        </p:nvSpPr>
+        <p:spPr>
+          <a:xfrm>
+            <a:off x="457200" y="3650000"/>
+            <a:ext cx="1514246" cy="560000"/>
           </a:xfrm>
           <a:prstGeom prst="roundRect">
             <a:avLst>
@@ -4549,39 +4582,14 @@
           </a:ln>
         </p:spPr>
         <p:txBody>
-          <a:bodyPr/>
-          <a:lstStyle/>
-          <a:p>
-            <a:endParaRPr/>
-          </a:p>
-        </p:txBody>
-      </p:sp>
-      <p:sp>
-        <p:nvSpPr>
-          <p:cNvPr id="28" name="Text 26"/>
-          <p:cNvSpPr/>
-          <p:nvPr/>
-        </p:nvSpPr>
-        <p:spPr>
-          <a:xfrm>
-            <a:off x="7754112" y="2103120"/>
-            <a:ext cx="932688" cy="502920"/>
-          </a:xfrm>
-          <a:prstGeom prst="rect">
-            <a:avLst/>
-          </a:prstGeom>
-          <a:noFill/>
-          <a:ln/>
-        </p:spPr>
-        <p:txBody>
-          <a:bodyPr wrap="square" lIns="0" tIns="0" rIns="0" bIns="0" rtlCol="0" anchor="ctr"/>
+          <a:bodyPr wrap="square" lIns="36000" tIns="0" rIns="36000" bIns="0" rtlCol="0" anchor="ctr"/>
           <a:lstStyle/>
           <a:p>
             <a:pPr marL="0" indent="0" algn="ctr">
               <a:buNone/>
             </a:pPr>
             <a:r>
-              <a:rPr lang="en-US" sz="1100" b="1" dirty="0">
+              <a:rPr lang="en-US" sz="1050" b="1" kern="0" dirty="0">
                 <a:solidFill>
                   <a:srgbClr val="F8FAFC"/>
                 </a:solidFill>
@@ -4589,38 +4597,457 @@
                 <a:ea typeface="Inter" pitchFamily="34" charset="-122"/>
                 <a:cs typeface="Inter" pitchFamily="34" charset="-120"/>
               </a:rPr>
-              <a:t>PR</a:t>
-            </a:r>
-            <a:endParaRPr lang="en-US" sz="1100" dirty="0"/>
-          </a:p>
-        </p:txBody>
-      </p:sp>
-      <p:sp>
-        <p:nvSpPr>
-          <p:cNvPr id="29" name="Text 27"/>
-          <p:cNvSpPr/>
-          <p:nvPr/>
-        </p:nvSpPr>
-        <p:spPr>
-          <a:xfrm>
-            <a:off x="457200" y="3108960"/>
-            <a:ext cx="8229600" cy="640080"/>
-          </a:xfrm>
-          <a:prstGeom prst="rect">
-            <a:avLst/>
-          </a:prstGeom>
-          <a:noFill/>
-          <a:ln/>
-        </p:spPr>
-        <p:txBody>
-          <a:bodyPr wrap="square" lIns="0" tIns="0" rIns="0" bIns="0" rtlCol="0" anchor="ctr"/>
-          <a:lstStyle/>
+              <a:t>acceptance gate</a:t>
+            </a:r>
+          </a:p>
           <a:p>
             <a:pPr marL="0" indent="0" algn="ctr">
               <a:buNone/>
             </a:pPr>
             <a:r>
-              <a:rPr lang="en-US" sz="1400" dirty="0">
+              <a:rPr lang="en-US" sz="750" kern="0" dirty="0">
+                <a:solidFill>
+                  <a:srgbClr val="3B82F6"/>
+                </a:solidFill>
+                <a:latin typeface="Inter" pitchFamily="34" charset="0"/>
+                <a:ea typeface="Inter" pitchFamily="34" charset="-122"/>
+                <a:cs typeface="Inter" pitchFamily="34" charset="-120"/>
+              </a:rPr>
+              <a:t>AC-1 … AC-6</a:t>
+            </a:r>
+          </a:p>
+        </p:txBody>
+      </p:sp>
+      <p:sp>
+        <p:nvSpPr>
+          <p:cNvPr id="24" name="Arrow"/>
+          <p:cNvSpPr/>
+          <p:nvPr/>
+        </p:nvSpPr>
+        <p:spPr>
+          <a:xfrm>
+            <a:off x="1971446" y="3650000"/>
+            <a:ext cx="164592" cy="560000"/>
+          </a:xfrm>
+          <a:prstGeom prst="rect">
+            <a:avLst/>
+          </a:prstGeom>
+          <a:noFill/>
+          <a:ln/>
+        </p:spPr>
+        <p:txBody>
+          <a:bodyPr wrap="square" lIns="0" tIns="0" rIns="0" bIns="0" rtlCol="0" anchor="ctr"/>
+          <a:lstStyle/>
+          <a:p>
+            <a:pPr marL="0" indent="0" algn="ctr">
+              <a:buNone/>
+            </a:pPr>
+            <a:r>
+              <a:rPr lang="en-US" sz="1000" kern="0" dirty="0">
+                <a:solidFill>
+                  <a:srgbClr val="3B82F6"/>
+                </a:solidFill>
+                <a:latin typeface="Inter" pitchFamily="34" charset="0"/>
+                <a:ea typeface="Inter" pitchFamily="34" charset="-122"/>
+                <a:cs typeface="Inter" pitchFamily="34" charset="-120"/>
+              </a:rPr>
+              <a:t>→</a:t>
+            </a:r>
+          </a:p>
+        </p:txBody>
+      </p:sp>
+      <p:sp>
+        <p:nvSpPr>
+          <p:cNvPr id="25" name="Pill"/>
+          <p:cNvSpPr/>
+          <p:nvPr/>
+        </p:nvSpPr>
+        <p:spPr>
+          <a:xfrm>
+            <a:off x="2136038" y="3650000"/>
+            <a:ext cx="1514246" cy="560000"/>
+          </a:xfrm>
+          <a:prstGeom prst="roundRect">
+            <a:avLst>
+              <a:gd name="adj" fmla="val 9091"/>
+            </a:avLst>
+          </a:prstGeom>
+          <a:solidFill>
+            <a:srgbClr val="1B2640"/>
+          </a:solidFill>
+          <a:ln w="9525">
+            <a:solidFill>
+              <a:srgbClr val="64748B"/>
+            </a:solidFill>
+            <a:prstDash val="solid"/>
+          </a:ln>
+        </p:spPr>
+        <p:txBody>
+          <a:bodyPr wrap="square" lIns="36000" tIns="0" rIns="36000" bIns="0" rtlCol="0" anchor="ctr"/>
+          <a:lstStyle/>
+          <a:p>
+            <a:pPr marL="0" indent="0" algn="ctr">
+              <a:buNone/>
+            </a:pPr>
+            <a:r>
+              <a:rPr lang="en-US" sz="1050" b="1" kern="0" dirty="0">
+                <a:solidFill>
+                  <a:srgbClr val="F8FAFC"/>
+                </a:solidFill>
+                <a:latin typeface="Inter" pitchFamily="34" charset="0"/>
+                <a:ea typeface="Inter" pitchFamily="34" charset="-122"/>
+                <a:cs typeface="Inter" pitchFamily="34" charset="-120"/>
+              </a:rPr>
+              <a:t>PR review</a:t>
+            </a:r>
+          </a:p>
+          <a:p>
+            <a:pPr marL="0" indent="0" algn="ctr">
+              <a:buNone/>
+            </a:pPr>
+            <a:r>
+              <a:rPr lang="en-US" sz="750" kern="0" dirty="0">
+                <a:solidFill>
+                  <a:srgbClr val="3B82F6"/>
+                </a:solidFill>
+                <a:latin typeface="Inter" pitchFamily="34" charset="0"/>
+                <a:ea typeface="Inter" pitchFamily="34" charset="-122"/>
+                <a:cs typeface="Inter" pitchFamily="34" charset="-120"/>
+              </a:rPr>
+              <a:t>/review-pr</a:t>
+            </a:r>
+          </a:p>
+        </p:txBody>
+      </p:sp>
+      <p:sp>
+        <p:nvSpPr>
+          <p:cNvPr id="26" name="Arrow"/>
+          <p:cNvSpPr/>
+          <p:nvPr/>
+        </p:nvSpPr>
+        <p:spPr>
+          <a:xfrm>
+            <a:off x="3650284" y="3650000"/>
+            <a:ext cx="164592" cy="560000"/>
+          </a:xfrm>
+          <a:prstGeom prst="rect">
+            <a:avLst/>
+          </a:prstGeom>
+          <a:noFill/>
+          <a:ln/>
+        </p:spPr>
+        <p:txBody>
+          <a:bodyPr wrap="square" lIns="0" tIns="0" rIns="0" bIns="0" rtlCol="0" anchor="ctr"/>
+          <a:lstStyle/>
+          <a:p>
+            <a:pPr marL="0" indent="0" algn="ctr">
+              <a:buNone/>
+            </a:pPr>
+            <a:r>
+              <a:rPr lang="en-US" sz="1000" kern="0" dirty="0">
+                <a:solidFill>
+                  <a:srgbClr val="3B82F6"/>
+                </a:solidFill>
+                <a:latin typeface="Inter" pitchFamily="34" charset="0"/>
+                <a:ea typeface="Inter" pitchFamily="34" charset="-122"/>
+                <a:cs typeface="Inter" pitchFamily="34" charset="-120"/>
+              </a:rPr>
+              <a:t>→</a:t>
+            </a:r>
+          </a:p>
+        </p:txBody>
+      </p:sp>
+      <p:sp>
+        <p:nvSpPr>
+          <p:cNvPr id="27" name="Pill"/>
+          <p:cNvSpPr/>
+          <p:nvPr/>
+        </p:nvSpPr>
+        <p:spPr>
+          <a:xfrm>
+            <a:off x="3814876" y="3650000"/>
+            <a:ext cx="1514246" cy="560000"/>
+          </a:xfrm>
+          <a:prstGeom prst="roundRect">
+            <a:avLst>
+              <a:gd name="adj" fmla="val 9091"/>
+            </a:avLst>
+          </a:prstGeom>
+          <a:solidFill>
+            <a:srgbClr val="1B2640"/>
+          </a:solidFill>
+          <a:ln w="9525">
+            <a:solidFill>
+              <a:srgbClr val="64748B"/>
+            </a:solidFill>
+            <a:prstDash val="solid"/>
+          </a:ln>
+        </p:spPr>
+        <p:txBody>
+          <a:bodyPr wrap="square" lIns="36000" tIns="0" rIns="36000" bIns="0" rtlCol="0" anchor="ctr"/>
+          <a:lstStyle/>
+          <a:p>
+            <a:pPr marL="0" indent="0" algn="ctr">
+              <a:buNone/>
+            </a:pPr>
+            <a:r>
+              <a:rPr lang="en-US" sz="1050" b="1" kern="0" dirty="0">
+                <a:solidFill>
+                  <a:srgbClr val="F8FAFC"/>
+                </a:solidFill>
+                <a:latin typeface="Inter" pitchFamily="34" charset="0"/>
+                <a:ea typeface="Inter" pitchFamily="34" charset="-122"/>
+                <a:cs typeface="Inter" pitchFamily="34" charset="-120"/>
+              </a:rPr>
+              <a:t>create PR</a:t>
+            </a:r>
+          </a:p>
+          <a:p>
+            <a:pPr marL="0" indent="0" algn="ctr">
+              <a:buNone/>
+            </a:pPr>
+            <a:r>
+              <a:rPr lang="en-US" sz="750" kern="0" dirty="0">
+                <a:solidFill>
+                  <a:srgbClr val="3B82F6"/>
+                </a:solidFill>
+                <a:latin typeface="Inter" pitchFamily="34" charset="0"/>
+                <a:ea typeface="Inter" pitchFamily="34" charset="-122"/>
+                <a:cs typeface="Inter" pitchFamily="34" charset="-120"/>
+              </a:rPr>
+              <a:t>/create-pr</a:t>
+            </a:r>
+          </a:p>
+        </p:txBody>
+      </p:sp>
+      <p:sp>
+        <p:nvSpPr>
+          <p:cNvPr id="28" name="Arrow"/>
+          <p:cNvSpPr/>
+          <p:nvPr/>
+        </p:nvSpPr>
+        <p:spPr>
+          <a:xfrm>
+            <a:off x="5329122" y="3650000"/>
+            <a:ext cx="164592" cy="560000"/>
+          </a:xfrm>
+          <a:prstGeom prst="rect">
+            <a:avLst/>
+          </a:prstGeom>
+          <a:noFill/>
+          <a:ln/>
+        </p:spPr>
+        <p:txBody>
+          <a:bodyPr wrap="square" lIns="0" tIns="0" rIns="0" bIns="0" rtlCol="0" anchor="ctr"/>
+          <a:lstStyle/>
+          <a:p>
+            <a:pPr marL="0" indent="0" algn="ctr">
+              <a:buNone/>
+            </a:pPr>
+            <a:r>
+              <a:rPr lang="en-US" sz="1000" kern="0" dirty="0">
+                <a:solidFill>
+                  <a:srgbClr val="3B82F6"/>
+                </a:solidFill>
+                <a:latin typeface="Inter" pitchFamily="34" charset="0"/>
+                <a:ea typeface="Inter" pitchFamily="34" charset="-122"/>
+                <a:cs typeface="Inter" pitchFamily="34" charset="-120"/>
+              </a:rPr>
+              <a:t>→</a:t>
+            </a:r>
+          </a:p>
+        </p:txBody>
+      </p:sp>
+      <p:sp>
+        <p:nvSpPr>
+          <p:cNvPr id="29" name="Pill"/>
+          <p:cNvSpPr/>
+          <p:nvPr/>
+        </p:nvSpPr>
+        <p:spPr>
+          <a:xfrm>
+            <a:off x="5493714" y="3650000"/>
+            <a:ext cx="1514246" cy="560000"/>
+          </a:xfrm>
+          <a:prstGeom prst="roundRect">
+            <a:avLst>
+              <a:gd name="adj" fmla="val 9091"/>
+            </a:avLst>
+          </a:prstGeom>
+          <a:solidFill>
+            <a:srgbClr val="1B2640"/>
+          </a:solidFill>
+          <a:ln w="9525">
+            <a:solidFill>
+              <a:srgbClr val="64748B"/>
+            </a:solidFill>
+            <a:prstDash val="solid"/>
+          </a:ln>
+        </p:spPr>
+        <p:txBody>
+          <a:bodyPr wrap="square" lIns="36000" tIns="0" rIns="36000" bIns="0" rtlCol="0" anchor="ctr"/>
+          <a:lstStyle/>
+          <a:p>
+            <a:pPr marL="0" indent="0" algn="ctr">
+              <a:buNone/>
+            </a:pPr>
+            <a:r>
+              <a:rPr lang="en-US" sz="1050" b="1" kern="0" dirty="0">
+                <a:solidFill>
+                  <a:srgbClr val="F8FAFC"/>
+                </a:solidFill>
+                <a:latin typeface="Inter" pitchFamily="34" charset="0"/>
+                <a:ea typeface="Inter" pitchFamily="34" charset="-122"/>
+                <a:cs typeface="Inter" pitchFamily="34" charset="-120"/>
+              </a:rPr>
+              <a:t>pipeline</a:t>
+            </a:r>
+          </a:p>
+          <a:p>
+            <a:pPr marL="0" indent="0" algn="ctr">
+              <a:buNone/>
+            </a:pPr>
+            <a:r>
+              <a:rPr lang="en-US" sz="750" kern="0" dirty="0">
+                <a:solidFill>
+                  <a:srgbClr val="3B82F6"/>
+                </a:solidFill>
+                <a:latin typeface="Inter" pitchFamily="34" charset="0"/>
+                <a:ea typeface="Inter" pitchFamily="34" charset="-122"/>
+                <a:cs typeface="Inter" pitchFamily="34" charset="-120"/>
+              </a:rPr>
+              <a:t>/devops watch</a:t>
+            </a:r>
+          </a:p>
+        </p:txBody>
+      </p:sp>
+      <p:sp>
+        <p:nvSpPr>
+          <p:cNvPr id="30" name="Arrow"/>
+          <p:cNvSpPr/>
+          <p:nvPr/>
+        </p:nvSpPr>
+        <p:spPr>
+          <a:xfrm>
+            <a:off x="7007960" y="3650000"/>
+            <a:ext cx="164592" cy="560000"/>
+          </a:xfrm>
+          <a:prstGeom prst="rect">
+            <a:avLst/>
+          </a:prstGeom>
+          <a:noFill/>
+          <a:ln/>
+        </p:spPr>
+        <p:txBody>
+          <a:bodyPr wrap="square" lIns="0" tIns="0" rIns="0" bIns="0" rtlCol="0" anchor="ctr"/>
+          <a:lstStyle/>
+          <a:p>
+            <a:pPr marL="0" indent="0" algn="ctr">
+              <a:buNone/>
+            </a:pPr>
+            <a:r>
+              <a:rPr lang="en-US" sz="1000" kern="0" dirty="0">
+                <a:solidFill>
+                  <a:srgbClr val="3B82F6"/>
+                </a:solidFill>
+                <a:latin typeface="Inter" pitchFamily="34" charset="0"/>
+                <a:ea typeface="Inter" pitchFamily="34" charset="-122"/>
+                <a:cs typeface="Inter" pitchFamily="34" charset="-120"/>
+              </a:rPr>
+              <a:t>→</a:t>
+            </a:r>
+          </a:p>
+        </p:txBody>
+      </p:sp>
+      <p:sp>
+        <p:nvSpPr>
+          <p:cNvPr id="31" name="Pill"/>
+          <p:cNvSpPr/>
+          <p:nvPr/>
+        </p:nvSpPr>
+        <p:spPr>
+          <a:xfrm>
+            <a:off x="7172552" y="3650000"/>
+            <a:ext cx="1514246" cy="560000"/>
+          </a:xfrm>
+          <a:prstGeom prst="roundRect">
+            <a:avLst>
+              <a:gd name="adj" fmla="val 9091"/>
+            </a:avLst>
+          </a:prstGeom>
+          <a:solidFill>
+            <a:srgbClr val="1B2640"/>
+          </a:solidFill>
+          <a:ln w="19050">
+            <a:solidFill>
+              <a:srgbClr val="3B82F6"/>
+            </a:solidFill>
+            <a:prstDash val="solid"/>
+          </a:ln>
+        </p:spPr>
+        <p:txBody>
+          <a:bodyPr wrap="square" lIns="36000" tIns="0" rIns="36000" bIns="0" rtlCol="0" anchor="ctr"/>
+          <a:lstStyle/>
+          <a:p>
+            <a:pPr marL="0" indent="0" algn="ctr">
+              <a:buNone/>
+            </a:pPr>
+            <a:r>
+              <a:rPr lang="en-US" sz="1050" b="1" kern="0" dirty="0">
+                <a:solidFill>
+                  <a:srgbClr val="F8FAFC"/>
+                </a:solidFill>
+                <a:latin typeface="Inter" pitchFamily="34" charset="0"/>
+                <a:ea typeface="Inter" pitchFamily="34" charset="-122"/>
+                <a:cs typeface="Inter" pitchFamily="34" charset="-120"/>
+              </a:rPr>
+              <a:t>human review</a:t>
+            </a:r>
+          </a:p>
+          <a:p>
+            <a:pPr marL="0" indent="0" algn="ctr">
+              <a:buNone/>
+            </a:pPr>
+            <a:r>
+              <a:rPr lang="en-US" sz="750" kern="0" dirty="0">
+                <a:solidFill>
+                  <a:srgbClr val="3B82F6"/>
+                </a:solidFill>
+                <a:latin typeface="Inter" pitchFamily="34" charset="0"/>
+                <a:ea typeface="Inter" pitchFamily="34" charset="-122"/>
+                <a:cs typeface="Inter" pitchFamily="34" charset="-120"/>
+              </a:rPr>
+              <a:t>mandatory</a:t>
+            </a:r>
+          </a:p>
+        </p:txBody>
+      </p:sp>
+      <p:sp>
+        <p:nvSpPr>
+          <p:cNvPr id="32" name="Text"/>
+          <p:cNvSpPr/>
+          <p:nvPr/>
+        </p:nvSpPr>
+        <p:spPr>
+          <a:xfrm>
+            <a:off x="457200" y="4300000"/>
+            <a:ext cx="8229600" cy="420000"/>
+          </a:xfrm>
+          <a:prstGeom prst="rect">
+            <a:avLst/>
+          </a:prstGeom>
+          <a:noFill/>
+          <a:ln/>
+        </p:spPr>
+        <p:txBody>
+          <a:bodyPr wrap="square" lIns="0" tIns="0" rIns="0" bIns="0" rtlCol="0" anchor="ctr"/>
+          <a:lstStyle/>
+          <a:p>
+            <a:pPr marL="0" indent="0" algn="ctr">
+              <a:buNone/>
+            </a:pPr>
+            <a:r>
+              <a:rPr lang="en-US" sz="1100" kern="0" dirty="0">
                 <a:solidFill>
                   <a:srgbClr val="94A3B8"/>
                 </a:solidFill>
@@ -4628,16 +5055,15 @@
                 <a:ea typeface="Inter" pitchFamily="34" charset="-122"/>
                 <a:cs typeface="Inter" pitchFamily="34" charset="-120"/>
               </a:rPr>
-              <a:t>each box is a specialist — the orchestrator picks which one, when,</a:t>
-            </a:r>
-            <a:endParaRPr lang="en-US" sz="1400" dirty="0"/>
+              <a:t>each box is a skill the orchestrator invokes — it decides which, when, and how to recover.</a:t>
+            </a:r>
           </a:p>
           <a:p>
             <a:pPr marL="0" indent="0" algn="ctr">
               <a:buNone/>
             </a:pPr>
             <a:r>
-              <a:rPr lang="en-US" sz="1400" dirty="0">
+              <a:rPr lang="en-US" sz="1100" kern="0" dirty="0">
                 <a:solidFill>
                   <a:srgbClr val="94A3B8"/>
                 </a:solidFill>
@@ -4645,99 +5071,83 @@
                 <a:ea typeface="Inter" pitchFamily="34" charset="-122"/>
                 <a:cs typeface="Inter" pitchFamily="34" charset="-120"/>
               </a:rPr>
-              <a:t>and what to do when one fails</a:t>
-            </a:r>
-            <a:endParaRPr lang="en-US" sz="1400" dirty="0"/>
-          </a:p>
-        </p:txBody>
-      </p:sp>
-      <p:sp>
-        <p:nvSpPr>
-          <p:cNvPr id="30" name="Rectangle 29">
-            <a:extLst>
-              <a:ext uri="{FF2B5EF4-FFF2-40B4-BE49-F238E27FC236}">
-                <a16:creationId xmlns:a16="http://schemas.microsoft.com/office/drawing/2014/main" id="{57B5A57E-809B-4868-FA01-5B67EF4AEBBC}"/>
-              </a:ext>
-            </a:extLst>
-          </p:cNvPr>
-          <p:cNvSpPr/>
-          <p:nvPr/>
-        </p:nvSpPr>
-        <p:spPr>
-          <a:xfrm>
-            <a:off x="1481328" y="1611848"/>
-            <a:ext cx="6163056" cy="1159706"/>
-          </a:xfrm>
-          <a:prstGeom prst="rect">
-            <a:avLst/>
-          </a:prstGeom>
-          <a:noFill/>
-          <a:ln w="44450">
-            <a:solidFill>
-              <a:schemeClr val="bg1"/>
-            </a:solidFill>
-          </a:ln>
-        </p:spPr>
-        <p:style>
-          <a:lnRef idx="2">
-            <a:schemeClr val="accent1">
-              <a:shade val="15000"/>
-            </a:schemeClr>
-          </a:lnRef>
-          <a:fillRef idx="1">
-            <a:schemeClr val="accent1"/>
-          </a:fillRef>
-          <a:effectRef idx="0">
-            <a:schemeClr val="accent1"/>
-          </a:effectRef>
-          <a:fontRef idx="minor">
-            <a:schemeClr val="lt1"/>
-          </a:fontRef>
-        </p:style>
-        <p:txBody>
-          <a:bodyPr rtlCol="0" anchor="ctr"/>
-          <a:lstStyle/>
-          <a:p>
-            <a:pPr algn="ctr"/>
-            <a:endParaRPr lang="en-US"/>
-          </a:p>
-        </p:txBody>
-      </p:sp>
-      <p:sp>
-        <p:nvSpPr>
-          <p:cNvPr id="31" name="TextBox 30">
-            <a:extLst>
-              <a:ext uri="{FF2B5EF4-FFF2-40B4-BE49-F238E27FC236}">
-                <a16:creationId xmlns:a16="http://schemas.microsoft.com/office/drawing/2014/main" id="{626E6013-7D5F-ED52-3B73-AF150D587820}"/>
-              </a:ext>
-            </a:extLst>
-          </p:cNvPr>
-          <p:cNvSpPr txBox="1"/>
-          <p:nvPr/>
-        </p:nvSpPr>
-        <p:spPr>
-          <a:xfrm>
-            <a:off x="3751237" y="1611847"/>
-            <a:ext cx="1341971" cy="369332"/>
-          </a:xfrm>
-          <a:prstGeom prst="rect">
-            <a:avLst/>
-          </a:prstGeom>
-          <a:noFill/>
-        </p:spPr>
-        <p:txBody>
-          <a:bodyPr wrap="square" rtlCol="0">
-            <a:spAutoFit/>
-          </a:bodyPr>
-          <a:lstStyle/>
-          <a:p>
-            <a:r>
-              <a:rPr lang="en-US" dirty="0">
-                <a:solidFill>
-                  <a:schemeClr val="bg1"/>
-                </a:solidFill>
-              </a:rPr>
-              <a:t>For Each {}</a:t>
+              <a:t>the inner loop retries on failure; a human must approve before merge.</a:t>
+            </a:r>
+          </a:p>
+        </p:txBody>
+      </p:sp>
+      <p:sp>
+        <p:nvSpPr>
+          <p:cNvPr id="33" name="Text"/>
+          <p:cNvSpPr/>
+          <p:nvPr/>
+        </p:nvSpPr>
+        <p:spPr>
+          <a:xfrm>
+            <a:off x="457200" y="4796028"/>
+            <a:ext cx="4572000" cy="274320"/>
+          </a:xfrm>
+          <a:prstGeom prst="rect">
+            <a:avLst/>
+          </a:prstGeom>
+          <a:noFill/>
+          <a:ln/>
+        </p:spPr>
+        <p:txBody>
+          <a:bodyPr wrap="square" lIns="0" tIns="0" rIns="0" bIns="0" rtlCol="0" anchor="ctr"/>
+          <a:lstStyle/>
+          <a:p>
+            <a:pPr marL="0" indent="0" algn="l">
+              <a:buNone/>
+            </a:pPr>
+            <a:r>
+              <a:rPr lang="en-US" sz="800" spc="200" kern="0" dirty="0">
+                <a:solidFill>
+                  <a:srgbClr val="64748B"/>
+                </a:solidFill>
+                <a:latin typeface="Inter" pitchFamily="34" charset="0"/>
+                <a:ea typeface="Inter" pitchFamily="34" charset="-122"/>
+                <a:cs typeface="Inter" pitchFamily="34" charset="-120"/>
+              </a:rPr>
+              <a:t>02 · how it works</a:t>
+            </a:r>
+          </a:p>
+        </p:txBody>
+      </p:sp>
+      <p:sp>
+        <p:nvSpPr>
+          <p:cNvPr id="34" name="Text"/>
+          <p:cNvSpPr/>
+          <p:nvPr/>
+        </p:nvSpPr>
+        <p:spPr>
+          <a:xfrm>
+            <a:off x="8229600" y="4796028"/>
+            <a:ext cx="457200" cy="274320"/>
+          </a:xfrm>
+          <a:prstGeom prst="rect">
+            <a:avLst/>
+          </a:prstGeom>
+          <a:noFill/>
+          <a:ln/>
+        </p:spPr>
+        <p:txBody>
+          <a:bodyPr wrap="square" lIns="0" tIns="0" rIns="0" bIns="0" rtlCol="0" anchor="ctr"/>
+          <a:lstStyle/>
+          <a:p>
+            <a:pPr marL="0" indent="0" algn="r">
+              <a:buNone/>
+            </a:pPr>
+            <a:r>
+              <a:rPr lang="en-US" sz="800" kern="0" dirty="0">
+                <a:solidFill>
+                  <a:srgbClr val="64748B"/>
+                </a:solidFill>
+                <a:latin typeface="Inter" pitchFamily="34" charset="0"/>
+                <a:ea typeface="Inter" pitchFamily="34" charset="-122"/>
+                <a:cs typeface="Inter" pitchFamily="34" charset="-120"/>
+              </a:rPr>
+              <a:t>11</a:t>
             </a:r>
           </a:p>
         </p:txBody>
